--- a/Cours_IA/PowerPoints/00_Cours_Complet_Python_IA.pptx
+++ b/Cours_IA/PowerPoints/00_Cours_Complet_Python_IA.pptx
@@ -52,9 +52,13 @@
     <p:sldId id="300" r:id="rId46"/>
     <p:sldId id="301" r:id="rId47"/>
     <p:sldId id="302" r:id="rId48"/>
+    <p:sldId id="303" r:id="rId49"/>
+    <p:sldId id="304" r:id="rId50"/>
+    <p:sldId id="305" r:id="rId51"/>
+    <p:sldId id="306" r:id="rId52"/>
   </p:sldIdLst>
   <p:notesMasterIdLst>
-    <p:notesMasterId r:id="rId49"/>
+    <p:notesMasterId r:id="rId53"/>
   </p:notesMasterIdLst>
   <p:sldSz cx="9144000" cy="5143500"/>
   <p:notesSz cx="5143500" cy="9144000"/>
@@ -7618,6 +7622,182 @@
 </p:notes>
 </file>
 
+<file path=ppt/notesSlides/notesSlide48.xml><?xml version="1.0" encoding="utf-8"?>
+<p:notes xmlns:a="http://schemas.openxmlformats.org/drawingml/2006/main" xmlns:r="http://schemas.openxmlformats.org/officeDocument/2006/relationships" xmlns:p="http://schemas.openxmlformats.org/presentationml/2006/main">
+  <p:cSld>
+    <p:spTree>
+      <p:nvGrpSpPr>
+        <p:cNvPr id="1" name=""/>
+        <p:cNvGrpSpPr/>
+        <p:nvPr/>
+      </p:nvGrpSpPr>
+      <p:grpSpPr>
+        <a:xfrm>
+          <a:off x="0" y="0"/>
+          <a:ext cx="0" cy="0"/>
+          <a:chOff x="0" y="0"/>
+          <a:chExt cx="0" cy="0"/>
+        </a:xfrm>
+      </p:grpSpPr>
+      <p:sp>
+        <p:nvSpPr>
+          <p:cNvPr id="2" name="Slide Image Placeholder 1"/>
+          <p:cNvSpPr>
+            <a:spLocks noGrp="1" noRot="1" noChangeAspect="1"/>
+          </p:cNvSpPr>
+          <p:nvPr>
+            <p:ph type="sldImg"/>
+          </p:nvPr>
+        </p:nvSpPr>
+        <p:spPr/>
+      </p:sp>
+      <p:sp>
+        <p:nvSpPr>
+          <p:cNvPr id="3" name="Notes Placeholder 2"/>
+          <p:cNvSpPr>
+            <a:spLocks noGrp="1"/>
+          </p:cNvSpPr>
+          <p:nvPr>
+            <p:ph type="body" idx="1"/>
+          </p:nvPr>
+        </p:nvSpPr>
+        <p:spPr/>
+        <p:txBody>
+          <a:bodyPr/>
+          <a:lstStyle/>
+          <a:p>
+            <a:r>
+              <a:rPr lang="en-US" dirty="0"/>
+              <a:t/>
+            </a:r>
+            <a:endParaRPr lang="en-US" dirty="0"/>
+          </a:p>
+        </p:txBody>
+      </p:sp>
+      <p:sp>
+        <p:nvSpPr>
+          <p:cNvPr id="4" name="Slide Number Placeholder 3"/>
+          <p:cNvSpPr>
+            <a:spLocks noGrp="1"/>
+          </p:cNvSpPr>
+          <p:nvPr>
+            <p:ph type="sldNum" sz="quarter" idx="10"/>
+          </p:nvPr>
+        </p:nvSpPr>
+        <p:spPr/>
+        <p:txBody>
+          <a:bodyPr/>
+          <a:lstStyle/>
+          <a:p>
+            <a:fld id="{F7021451-1387-4CA6-816F-3879F97B5CBC}" type="slidenum">
+              <a:rPr lang="en-US"/>
+              <a:t>48</a:t>
+            </a:fld>
+            <a:endParaRPr lang="en-US"/>
+          </a:p>
+        </p:txBody>
+      </p:sp>
+    </p:spTree>
+    <p:extLst>
+      <p:ext uri="{BB962C8B-B14F-4D97-AF65-F5344CB8AC3E}">
+        <p14:creationId xmlns:p14="http://schemas.microsoft.com/office/powerpoint/2010/main" val="1024086991"/>
+      </p:ext>
+    </p:extLst>
+  </p:cSld>
+  <p:clrMapOvr>
+    <a:masterClrMapping/>
+  </p:clrMapOvr>
+</p:notes>
+</file>
+
+<file path=ppt/notesSlides/notesSlide49.xml><?xml version="1.0" encoding="utf-8"?>
+<p:notes xmlns:a="http://schemas.openxmlformats.org/drawingml/2006/main" xmlns:r="http://schemas.openxmlformats.org/officeDocument/2006/relationships" xmlns:p="http://schemas.openxmlformats.org/presentationml/2006/main">
+  <p:cSld>
+    <p:spTree>
+      <p:nvGrpSpPr>
+        <p:cNvPr id="1" name=""/>
+        <p:cNvGrpSpPr/>
+        <p:nvPr/>
+      </p:nvGrpSpPr>
+      <p:grpSpPr>
+        <a:xfrm>
+          <a:off x="0" y="0"/>
+          <a:ext cx="0" cy="0"/>
+          <a:chOff x="0" y="0"/>
+          <a:chExt cx="0" cy="0"/>
+        </a:xfrm>
+      </p:grpSpPr>
+      <p:sp>
+        <p:nvSpPr>
+          <p:cNvPr id="2" name="Slide Image Placeholder 1"/>
+          <p:cNvSpPr>
+            <a:spLocks noGrp="1" noRot="1" noChangeAspect="1"/>
+          </p:cNvSpPr>
+          <p:nvPr>
+            <p:ph type="sldImg"/>
+          </p:nvPr>
+        </p:nvSpPr>
+        <p:spPr/>
+      </p:sp>
+      <p:sp>
+        <p:nvSpPr>
+          <p:cNvPr id="3" name="Notes Placeholder 2"/>
+          <p:cNvSpPr>
+            <a:spLocks noGrp="1"/>
+          </p:cNvSpPr>
+          <p:nvPr>
+            <p:ph type="body" idx="1"/>
+          </p:nvPr>
+        </p:nvSpPr>
+        <p:spPr/>
+        <p:txBody>
+          <a:bodyPr/>
+          <a:lstStyle/>
+          <a:p>
+            <a:r>
+              <a:rPr lang="en-US" dirty="0"/>
+              <a:t/>
+            </a:r>
+            <a:endParaRPr lang="en-US" dirty="0"/>
+          </a:p>
+        </p:txBody>
+      </p:sp>
+      <p:sp>
+        <p:nvSpPr>
+          <p:cNvPr id="4" name="Slide Number Placeholder 3"/>
+          <p:cNvSpPr>
+            <a:spLocks noGrp="1"/>
+          </p:cNvSpPr>
+          <p:nvPr>
+            <p:ph type="sldNum" sz="quarter" idx="10"/>
+          </p:nvPr>
+        </p:nvSpPr>
+        <p:spPr/>
+        <p:txBody>
+          <a:bodyPr/>
+          <a:lstStyle/>
+          <a:p>
+            <a:fld id="{F7021451-1387-4CA6-816F-3879F97B5CBC}" type="slidenum">
+              <a:rPr lang="en-US"/>
+              <a:t>49</a:t>
+            </a:fld>
+            <a:endParaRPr lang="en-US"/>
+          </a:p>
+        </p:txBody>
+      </p:sp>
+    </p:spTree>
+    <p:extLst>
+      <p:ext uri="{BB962C8B-B14F-4D97-AF65-F5344CB8AC3E}">
+        <p14:creationId xmlns:p14="http://schemas.microsoft.com/office/powerpoint/2010/main" val="1024086991"/>
+      </p:ext>
+    </p:extLst>
+  </p:cSld>
+  <p:clrMapOvr>
+    <a:masterClrMapping/>
+  </p:clrMapOvr>
+</p:notes>
+</file>
+
 <file path=ppt/notesSlides/notesSlide5.xml><?xml version="1.0" encoding="utf-8"?>
 <p:notes xmlns:a="http://schemas.openxmlformats.org/drawingml/2006/main" xmlns:r="http://schemas.openxmlformats.org/officeDocument/2006/relationships" xmlns:p="http://schemas.openxmlformats.org/presentationml/2006/main">
   <p:cSld>
@@ -7688,6 +7868,182 @@
             <a:fld id="{F7021451-1387-4CA6-816F-3879F97B5CBC}" type="slidenum">
               <a:rPr lang="en-US"/>
               <a:t>5</a:t>
+            </a:fld>
+            <a:endParaRPr lang="en-US"/>
+          </a:p>
+        </p:txBody>
+      </p:sp>
+    </p:spTree>
+    <p:extLst>
+      <p:ext uri="{BB962C8B-B14F-4D97-AF65-F5344CB8AC3E}">
+        <p14:creationId xmlns:p14="http://schemas.microsoft.com/office/powerpoint/2010/main" val="1024086991"/>
+      </p:ext>
+    </p:extLst>
+  </p:cSld>
+  <p:clrMapOvr>
+    <a:masterClrMapping/>
+  </p:clrMapOvr>
+</p:notes>
+</file>
+
+<file path=ppt/notesSlides/notesSlide50.xml><?xml version="1.0" encoding="utf-8"?>
+<p:notes xmlns:a="http://schemas.openxmlformats.org/drawingml/2006/main" xmlns:r="http://schemas.openxmlformats.org/officeDocument/2006/relationships" xmlns:p="http://schemas.openxmlformats.org/presentationml/2006/main">
+  <p:cSld>
+    <p:spTree>
+      <p:nvGrpSpPr>
+        <p:cNvPr id="1" name=""/>
+        <p:cNvGrpSpPr/>
+        <p:nvPr/>
+      </p:nvGrpSpPr>
+      <p:grpSpPr>
+        <a:xfrm>
+          <a:off x="0" y="0"/>
+          <a:ext cx="0" cy="0"/>
+          <a:chOff x="0" y="0"/>
+          <a:chExt cx="0" cy="0"/>
+        </a:xfrm>
+      </p:grpSpPr>
+      <p:sp>
+        <p:nvSpPr>
+          <p:cNvPr id="2" name="Slide Image Placeholder 1"/>
+          <p:cNvSpPr>
+            <a:spLocks noGrp="1" noRot="1" noChangeAspect="1"/>
+          </p:cNvSpPr>
+          <p:nvPr>
+            <p:ph type="sldImg"/>
+          </p:nvPr>
+        </p:nvSpPr>
+        <p:spPr/>
+      </p:sp>
+      <p:sp>
+        <p:nvSpPr>
+          <p:cNvPr id="3" name="Notes Placeholder 2"/>
+          <p:cNvSpPr>
+            <a:spLocks noGrp="1"/>
+          </p:cNvSpPr>
+          <p:nvPr>
+            <p:ph type="body" idx="1"/>
+          </p:nvPr>
+        </p:nvSpPr>
+        <p:spPr/>
+        <p:txBody>
+          <a:bodyPr/>
+          <a:lstStyle/>
+          <a:p>
+            <a:r>
+              <a:rPr lang="en-US" dirty="0"/>
+              <a:t/>
+            </a:r>
+            <a:endParaRPr lang="en-US" dirty="0"/>
+          </a:p>
+        </p:txBody>
+      </p:sp>
+      <p:sp>
+        <p:nvSpPr>
+          <p:cNvPr id="4" name="Slide Number Placeholder 3"/>
+          <p:cNvSpPr>
+            <a:spLocks noGrp="1"/>
+          </p:cNvSpPr>
+          <p:nvPr>
+            <p:ph type="sldNum" sz="quarter" idx="10"/>
+          </p:nvPr>
+        </p:nvSpPr>
+        <p:spPr/>
+        <p:txBody>
+          <a:bodyPr/>
+          <a:lstStyle/>
+          <a:p>
+            <a:fld id="{F7021451-1387-4CA6-816F-3879F97B5CBC}" type="slidenum">
+              <a:rPr lang="en-US"/>
+              <a:t>50</a:t>
+            </a:fld>
+            <a:endParaRPr lang="en-US"/>
+          </a:p>
+        </p:txBody>
+      </p:sp>
+    </p:spTree>
+    <p:extLst>
+      <p:ext uri="{BB962C8B-B14F-4D97-AF65-F5344CB8AC3E}">
+        <p14:creationId xmlns:p14="http://schemas.microsoft.com/office/powerpoint/2010/main" val="1024086991"/>
+      </p:ext>
+    </p:extLst>
+  </p:cSld>
+  <p:clrMapOvr>
+    <a:masterClrMapping/>
+  </p:clrMapOvr>
+</p:notes>
+</file>
+
+<file path=ppt/notesSlides/notesSlide51.xml><?xml version="1.0" encoding="utf-8"?>
+<p:notes xmlns:a="http://schemas.openxmlformats.org/drawingml/2006/main" xmlns:r="http://schemas.openxmlformats.org/officeDocument/2006/relationships" xmlns:p="http://schemas.openxmlformats.org/presentationml/2006/main">
+  <p:cSld>
+    <p:spTree>
+      <p:nvGrpSpPr>
+        <p:cNvPr id="1" name=""/>
+        <p:cNvGrpSpPr/>
+        <p:nvPr/>
+      </p:nvGrpSpPr>
+      <p:grpSpPr>
+        <a:xfrm>
+          <a:off x="0" y="0"/>
+          <a:ext cx="0" cy="0"/>
+          <a:chOff x="0" y="0"/>
+          <a:chExt cx="0" cy="0"/>
+        </a:xfrm>
+      </p:grpSpPr>
+      <p:sp>
+        <p:nvSpPr>
+          <p:cNvPr id="2" name="Slide Image Placeholder 1"/>
+          <p:cNvSpPr>
+            <a:spLocks noGrp="1" noRot="1" noChangeAspect="1"/>
+          </p:cNvSpPr>
+          <p:nvPr>
+            <p:ph type="sldImg"/>
+          </p:nvPr>
+        </p:nvSpPr>
+        <p:spPr/>
+      </p:sp>
+      <p:sp>
+        <p:nvSpPr>
+          <p:cNvPr id="3" name="Notes Placeholder 2"/>
+          <p:cNvSpPr>
+            <a:spLocks noGrp="1"/>
+          </p:cNvSpPr>
+          <p:nvPr>
+            <p:ph type="body" idx="1"/>
+          </p:nvPr>
+        </p:nvSpPr>
+        <p:spPr/>
+        <p:txBody>
+          <a:bodyPr/>
+          <a:lstStyle/>
+          <a:p>
+            <a:r>
+              <a:rPr lang="en-US" dirty="0"/>
+              <a:t/>
+            </a:r>
+            <a:endParaRPr lang="en-US" dirty="0"/>
+          </a:p>
+        </p:txBody>
+      </p:sp>
+      <p:sp>
+        <p:nvSpPr>
+          <p:cNvPr id="4" name="Slide Number Placeholder 3"/>
+          <p:cNvSpPr>
+            <a:spLocks noGrp="1"/>
+          </p:cNvSpPr>
+          <p:nvPr>
+            <p:ph type="sldNum" sz="quarter" idx="10"/>
+          </p:nvPr>
+        </p:nvSpPr>
+        <p:spPr/>
+        <p:txBody>
+          <a:bodyPr/>
+          <a:lstStyle/>
+          <a:p>
+            <a:fld id="{F7021451-1387-4CA6-816F-3879F97B5CBC}" type="slidenum">
+              <a:rPr lang="en-US"/>
+              <a:t>51</a:t>
             </a:fld>
             <a:endParaRPr lang="en-US"/>
           </a:p>
@@ -41864,7 +42220,7 @@
                 <a:ea typeface="Calibri" pitchFamily="34" charset="-122"/>
                 <a:cs typeface="Calibri" pitchFamily="34" charset="-120"/>
               </a:rPr>
-              <a:t>brique par brique et tu écris ta propre boucle d'entraînement. Notebook S9_P2.</a:t>
+              <a:t>brique par brique et tu écris ta propre boucle. Notebooks S9_P2 → S9_P5.</a:t>
             </a:r>
             <a:endParaRPr lang="en-US" sz="1350" dirty="0"/>
           </a:p>
@@ -43382,13 +43738,13 @@
             <a:r>
               <a:rPr lang="en-US" sz="1100" b="1" spc="200" kern="0" dirty="0">
                 <a:solidFill>
-                  <a:srgbClr val="017A61"/>
-                </a:solidFill>
-                <a:latin typeface="Calibri" pitchFamily="34" charset="0"/>
-                <a:ea typeface="Calibri" pitchFamily="34" charset="-122"/>
-                <a:cs typeface="Calibri" pitchFamily="34" charset="-120"/>
-              </a:rPr>
-              <a:t>LE MUR DE LA HONTE (ON A TOUS FAIT CES ERREURS)</a:t>
+                  <a:srgbClr val="9C7A00"/>
+                </a:solidFill>
+                <a:latin typeface="Calibri" pitchFamily="34" charset="0"/>
+                <a:ea typeface="Calibri" pitchFamily="34" charset="-122"/>
+                <a:cs typeface="Calibri" pitchFamily="34" charset="-120"/>
+              </a:rPr>
+              <a:t>S9_P3 · DEEP_LEARNING/</a:t>
             </a:r>
             <a:endParaRPr lang="en-US" sz="1100" dirty="0"/>
           </a:p>
@@ -43427,7 +43783,7 @@
                 <a:ea typeface="Calibri" pitchFamily="34" charset="-122"/>
                 <a:cs typeface="Calibri" pitchFamily="34" charset="-120"/>
               </a:rPr>
-              <a:t>Les 8 pièges célèbres du cours 🏆</a:t>
+              <a:t>L'escalier : de l'autograd à Lightning</a:t>
             </a:r>
             <a:endParaRPr lang="en-US" sz="2700" dirty="0"/>
           </a:p>
@@ -43442,15 +43798,15 @@
         <p:spPr>
           <a:xfrm>
             <a:off x="457200" y="1188720"/>
-            <a:ext cx="4041648" cy="804672"/>
+            <a:ext cx="4297680" cy="1600200"/>
           </a:xfrm>
           <a:prstGeom prst="roundRect">
             <a:avLst>
-              <a:gd name="adj" fmla="val 6818"/>
+              <a:gd name="adj" fmla="val 4000"/>
             </a:avLst>
           </a:prstGeom>
           <a:solidFill>
-            <a:srgbClr val="EEF4FE"/>
+            <a:srgbClr val="141E3C"/>
           </a:solidFill>
           <a:ln/>
           <a:effectLst>
@@ -43470,28 +43826,68 @@
         </p:nvSpPr>
         <p:spPr>
           <a:xfrm>
-            <a:off x="566928" y="1426464"/>
-            <a:ext cx="329184" cy="329184"/>
+            <a:off x="585216" y="1307592"/>
+            <a:ext cx="64008" cy="64008"/>
           </a:xfrm>
           <a:prstGeom prst="ellipse">
             <a:avLst/>
           </a:prstGeom>
           <a:solidFill>
-            <a:srgbClr val="D64550"/>
+            <a:srgbClr val="E8604C"/>
           </a:solidFill>
           <a:ln/>
         </p:spPr>
       </p:sp>
       <p:sp>
         <p:nvSpPr>
-          <p:cNvPr id="6" name="Text 4"/>
-          <p:cNvSpPr/>
-          <p:nvPr/>
-        </p:nvSpPr>
-        <p:spPr>
-          <a:xfrm>
-            <a:off x="566928" y="1417320"/>
-            <a:ext cx="329184" cy="329184"/>
+          <p:cNvPr id="6" name="Shape 4"/>
+          <p:cNvSpPr/>
+          <p:nvPr/>
+        </p:nvSpPr>
+        <p:spPr>
+          <a:xfrm>
+            <a:off x="713232" y="1307592"/>
+            <a:ext cx="64008" cy="64008"/>
+          </a:xfrm>
+          <a:prstGeom prst="ellipse">
+            <a:avLst/>
+          </a:prstGeom>
+          <a:solidFill>
+            <a:srgbClr val="F2B233"/>
+          </a:solidFill>
+          <a:ln/>
+        </p:spPr>
+      </p:sp>
+      <p:sp>
+        <p:nvSpPr>
+          <p:cNvPr id="7" name="Shape 5"/>
+          <p:cNvSpPr/>
+          <p:nvPr/>
+        </p:nvSpPr>
+        <p:spPr>
+          <a:xfrm>
+            <a:off x="841248" y="1307592"/>
+            <a:ext cx="64008" cy="64008"/>
+          </a:xfrm>
+          <a:prstGeom prst="ellipse">
+            <a:avLst/>
+          </a:prstGeom>
+          <a:solidFill>
+            <a:srgbClr val="5BBB63"/>
+          </a:solidFill>
+          <a:ln/>
+        </p:spPr>
+      </p:sp>
+      <p:sp>
+        <p:nvSpPr>
+          <p:cNvPr id="8" name="Text 6"/>
+          <p:cNvSpPr/>
+          <p:nvPr/>
+        </p:nvSpPr>
+        <p:spPr>
+          <a:xfrm>
+            <a:off x="621792" y="1463040"/>
+            <a:ext cx="3968496" cy="1216152"/>
           </a:xfrm>
           <a:prstGeom prst="rect">
             <a:avLst/>
@@ -43500,107 +43896,142 @@
           <a:ln/>
         </p:spPr>
         <p:txBody>
-          <a:bodyPr wrap="square" lIns="0" tIns="0" rIns="0" bIns="0" rtlCol="0" anchor="ctr"/>
-          <a:lstStyle/>
-          <a:p>
-            <a:pPr algn="ctr" indent="0" marL="0">
-              <a:buNone/>
-            </a:pPr>
-            <a:r>
-              <a:rPr lang="en-US" sz="1300" b="1" dirty="0">
-                <a:solidFill>
-                  <a:srgbClr val="FFFFFF"/>
-                </a:solidFill>
-                <a:latin typeface="Calibri" pitchFamily="34" charset="0"/>
-                <a:ea typeface="Calibri" pitchFamily="34" charset="-122"/>
-                <a:cs typeface="Calibri" pitchFamily="34" charset="-120"/>
-              </a:rPr>
-              <a:t>1</a:t>
-            </a:r>
-            <a:endParaRPr lang="en-US" sz="1300" dirty="0"/>
-          </a:p>
-        </p:txBody>
-      </p:sp>
-      <p:sp>
-        <p:nvSpPr>
-          <p:cNvPr id="7" name="Text 5"/>
-          <p:cNvSpPr/>
-          <p:nvPr/>
-        </p:nvSpPr>
-        <p:spPr>
-          <a:xfrm>
-            <a:off x="1005840" y="1261872"/>
-            <a:ext cx="3401568" cy="685800"/>
-          </a:xfrm>
-          <a:prstGeom prst="rect">
-            <a:avLst/>
-          </a:prstGeom>
-          <a:noFill/>
-          <a:ln/>
-        </p:spPr>
-        <p:txBody>
           <a:bodyPr wrap="square" lIns="0" tIns="0" rIns="0" bIns="0" rtlCol="0" anchor="t"/>
           <a:lstStyle/>
           <a:p>
             <a:pPr indent="0" marL="0">
               <a:lnSpc>
-                <a:spcPct val="105000"/>
-              </a:lnSpc>
-              <a:buNone/>
-            </a:pPr>
-            <a:r>
-              <a:rPr lang="en-US" sz="950" b="1" dirty="0">
-                <a:solidFill>
-                  <a:srgbClr val="1E2761"/>
+                <a:spcPct val="112000"/>
+              </a:lnSpc>
+              <a:buNone/>
+            </a:pPr>
+            <a:r>
+              <a:rPr lang="en-US" sz="950" dirty="0">
+                <a:solidFill>
+                  <a:srgbClr val="DCE7FA"/>
                 </a:solidFill>
                 <a:latin typeface="Courier New" pitchFamily="34" charset="0"/>
                 <a:ea typeface="Courier New" pitchFamily="34" charset="-122"/>
                 <a:cs typeface="Courier New" pitchFamily="34" charset="-120"/>
               </a:rPr>
-              <a:t>fit(X_test, y_test)</a:t>
+              <a:t>x = torch.tensor(2.0, requires_grad=True)</a:t>
             </a:r>
             <a:endParaRPr lang="en-US" sz="950" dirty="0"/>
           </a:p>
           <a:p>
             <a:pPr indent="0" marL="0">
               <a:lnSpc>
-                <a:spcPct val="105000"/>
-              </a:lnSpc>
-              <a:buNone/>
-            </a:pPr>
-            <a:r>
-              <a:rPr lang="en-US" sz="900" dirty="0">
-                <a:solidFill>
-                  <a:srgbClr val="2A3550"/>
-                </a:solidFill>
-                <a:latin typeface="Calibri" pitchFamily="34" charset="0"/>
-                <a:ea typeface="Calibri" pitchFamily="34" charset="-122"/>
-                <a:cs typeface="Calibri" pitchFamily="34" charset="-120"/>
-              </a:rPr>
-              <a:t>entraîné sur le test = l'élève avec les corrigés (S2_P3)</a:t>
+                <a:spcPct val="112000"/>
+              </a:lnSpc>
+              <a:buNone/>
+            </a:pPr>
+            <a:r>
+              <a:rPr lang="en-US" sz="950" dirty="0">
+                <a:solidFill>
+                  <a:srgbClr val="DCE7FA"/>
+                </a:solidFill>
+                <a:latin typeface="Courier New" pitchFamily="34" charset="0"/>
+                <a:ea typeface="Courier New" pitchFamily="34" charset="-122"/>
+                <a:cs typeface="Courier New" pitchFamily="34" charset="-120"/>
+              </a:rPr>
+              <a:t>y = x**2 + 3*x + 1</a:t>
             </a:r>
             <a:endParaRPr lang="en-US" sz="950" dirty="0"/>
           </a:p>
-        </p:txBody>
-      </p:sp>
-      <p:sp>
-        <p:nvSpPr>
-          <p:cNvPr id="8" name="Shape 6"/>
-          <p:cNvSpPr/>
-          <p:nvPr/>
-        </p:nvSpPr>
-        <p:spPr>
-          <a:xfrm>
-            <a:off x="4681728" y="1188720"/>
-            <a:ext cx="4041648" cy="804672"/>
+          <a:p>
+            <a:pPr indent="0" marL="0">
+              <a:lnSpc>
+                <a:spcPct val="112000"/>
+              </a:lnSpc>
+              <a:buNone/>
+            </a:pPr>
+            <a:r>
+              <a:rPr lang="en-US" sz="950" dirty="0">
+                <a:solidFill>
+                  <a:srgbClr val="DCE7FA"/>
+                </a:solidFill>
+                <a:latin typeface="Courier New" pitchFamily="34" charset="0"/>
+                <a:ea typeface="Courier New" pitchFamily="34" charset="-122"/>
+                <a:cs typeface="Courier New" pitchFamily="34" charset="-120"/>
+              </a:rPr>
+              <a:t>y.backward()      </a:t>
+            </a:r>
+            <a:pPr indent="0" marL="0">
+              <a:lnSpc>
+                <a:spcPct val="112000"/>
+              </a:lnSpc>
+              <a:buNone/>
+            </a:pPr>
+            <a:r>
+              <a:rPr lang="en-US" sz="950" dirty="0">
+                <a:solidFill>
+                  <a:srgbClr val="7C93C4"/>
+                </a:solidFill>
+                <a:latin typeface="Courier New" pitchFamily="34" charset="0"/>
+                <a:ea typeface="Courier New" pitchFamily="34" charset="-122"/>
+                <a:cs typeface="Courier New" pitchFamily="34" charset="-120"/>
+              </a:rPr>
+              <a:t># remonte le graphe</a:t>
+            </a:r>
+            <a:endParaRPr lang="en-US" sz="950" dirty="0"/>
+          </a:p>
+          <a:p>
+            <a:pPr indent="0" marL="0">
+              <a:lnSpc>
+                <a:spcPct val="112000"/>
+              </a:lnSpc>
+              <a:buNone/>
+            </a:pPr>
+            <a:r>
+              <a:rPr lang="en-US" sz="950" dirty="0">
+                <a:solidFill>
+                  <a:srgbClr val="DCE7FA"/>
+                </a:solidFill>
+                <a:latin typeface="Courier New" pitchFamily="34" charset="0"/>
+                <a:ea typeface="Courier New" pitchFamily="34" charset="-122"/>
+                <a:cs typeface="Courier New" pitchFamily="34" charset="-120"/>
+              </a:rPr>
+              <a:t>x.grad.item()     </a:t>
+            </a:r>
+            <a:pPr indent="0" marL="0">
+              <a:lnSpc>
+                <a:spcPct val="112000"/>
+              </a:lnSpc>
+              <a:buNone/>
+            </a:pPr>
+            <a:r>
+              <a:rPr lang="en-US" sz="950" dirty="0">
+                <a:solidFill>
+                  <a:srgbClr val="8AE6C8"/>
+                </a:solidFill>
+                <a:latin typeface="Courier New" pitchFamily="34" charset="0"/>
+                <a:ea typeface="Courier New" pitchFamily="34" charset="-122"/>
+                <a:cs typeface="Courier New" pitchFamily="34" charset="-120"/>
+              </a:rPr>
+              <a:t># -&gt; 7.0</a:t>
+            </a:r>
+            <a:endParaRPr lang="en-US" sz="950" dirty="0"/>
+          </a:p>
+        </p:txBody>
+      </p:sp>
+      <p:sp>
+        <p:nvSpPr>
+          <p:cNvPr id="9" name="Shape 7"/>
+          <p:cNvSpPr/>
+          <p:nvPr/>
+        </p:nvSpPr>
+        <p:spPr>
+          <a:xfrm>
+            <a:off x="457200" y="2971800"/>
+            <a:ext cx="4297680" cy="1828800"/>
           </a:xfrm>
           <a:prstGeom prst="roundRect">
             <a:avLst>
-              <a:gd name="adj" fmla="val 6818"/>
+              <a:gd name="adj" fmla="val 3000"/>
             </a:avLst>
           </a:prstGeom>
           <a:solidFill>
-            <a:srgbClr val="EEF4FE"/>
+            <a:srgbClr val="E9FAF5"/>
           </a:solidFill>
           <a:ln/>
           <a:effectLst>
@@ -43614,34 +44045,14 @@
       </p:sp>
       <p:sp>
         <p:nvSpPr>
-          <p:cNvPr id="9" name="Shape 7"/>
-          <p:cNvSpPr/>
-          <p:nvPr/>
-        </p:nvSpPr>
-        <p:spPr>
-          <a:xfrm>
-            <a:off x="4791456" y="1426464"/>
-            <a:ext cx="329184" cy="329184"/>
-          </a:xfrm>
-          <a:prstGeom prst="ellipse">
-            <a:avLst/>
-          </a:prstGeom>
-          <a:solidFill>
-            <a:srgbClr val="D64550"/>
-          </a:solidFill>
-          <a:ln/>
-        </p:spPr>
-      </p:sp>
-      <p:sp>
-        <p:nvSpPr>
           <p:cNvPr id="10" name="Text 8"/>
           <p:cNvSpPr/>
           <p:nvPr/>
         </p:nvSpPr>
         <p:spPr>
           <a:xfrm>
-            <a:off x="4791456" y="1417320"/>
-            <a:ext cx="329184" cy="329184"/>
+            <a:off x="603504" y="3081528"/>
+            <a:ext cx="4005072" cy="274320"/>
           </a:xfrm>
           <a:prstGeom prst="rect">
             <a:avLst/>
@@ -43653,21 +44064,21 @@
           <a:bodyPr wrap="square" lIns="0" tIns="0" rIns="0" bIns="0" rtlCol="0" anchor="ctr"/>
           <a:lstStyle/>
           <a:p>
-            <a:pPr algn="ctr" indent="0" marL="0">
-              <a:buNone/>
-            </a:pPr>
-            <a:r>
-              <a:rPr lang="en-US" sz="1300" b="1" dirty="0">
-                <a:solidFill>
-                  <a:srgbClr val="FFFFFF"/>
-                </a:solidFill>
-                <a:latin typeface="Calibri" pitchFamily="34" charset="0"/>
-                <a:ea typeface="Calibri" pitchFamily="34" charset="-122"/>
-                <a:cs typeface="Calibri" pitchFamily="34" charset="-120"/>
-              </a:rPr>
-              <a:t>2</a:t>
-            </a:r>
-            <a:endParaRPr lang="en-US" sz="1300" dirty="0"/>
+            <a:pPr indent="0" marL="0">
+              <a:buNone/>
+            </a:pPr>
+            <a:r>
+              <a:rPr lang="en-US" sz="1250" b="1" dirty="0">
+                <a:solidFill>
+                  <a:srgbClr val="1E2761"/>
+                </a:solidFill>
+                <a:latin typeface="Calibri" pitchFamily="34" charset="0"/>
+                <a:ea typeface="Calibri" pitchFamily="34" charset="-122"/>
+                <a:cs typeface="Calibri" pitchFamily="34" charset="-120"/>
+              </a:rPr>
+              <a:t>⭐ L'autograd : LA raison d'être de PyTorch</a:t>
+            </a:r>
+            <a:endParaRPr lang="en-US" sz="1250" dirty="0"/>
           </a:p>
         </p:txBody>
       </p:sp>
@@ -43679,8 +44090,8 @@
         </p:nvSpPr>
         <p:spPr>
           <a:xfrm>
-            <a:off x="5230368" y="1261872"/>
-            <a:ext cx="3401568" cy="685800"/>
+            <a:off x="603504" y="3374136"/>
+            <a:ext cx="4005072" cy="1316736"/>
           </a:xfrm>
           <a:prstGeom prst="rect">
             <a:avLst/>
@@ -43694,42 +44105,62 @@
           <a:p>
             <a:pPr indent="0" marL="0">
               <a:lnSpc>
-                <a:spcPct val="105000"/>
+                <a:spcPct val="106000"/>
+              </a:lnSpc>
+              <a:buNone/>
+            </a:pPr>
+            <a:r>
+              <a:rPr lang="en-US" sz="950" dirty="0">
+                <a:solidFill>
+                  <a:srgbClr val="2A3550"/>
+                </a:solidFill>
+                <a:latin typeface="Calibri" pitchFamily="34" charset="0"/>
+                <a:ea typeface="Calibri" pitchFamily="34" charset="-122"/>
+                <a:cs typeface="Calibri" pitchFamily="34" charset="-120"/>
+              </a:rPr>
+              <a:t>y' = 2x + 3, en x = 2 → 7. PyTorch affiche 7.0 ✅</a:t>
+            </a:r>
+            <a:endParaRPr lang="en-US" sz="1050" dirty="0"/>
+          </a:p>
+          <a:p>
+            <a:pPr indent="0" marL="0">
+              <a:lnSpc>
+                <a:spcPct val="106000"/>
+              </a:lnSpc>
+              <a:buNone/>
+            </a:pPr>
+            <a:r>
+              <a:rPr lang="en-US" sz="950" dirty="0">
+                <a:solidFill>
+                  <a:srgbClr val="2A3550"/>
+                </a:solidFill>
+                <a:latin typeface="Calibri" pitchFamily="34" charset="0"/>
+                <a:ea typeface="Calibri" pitchFamily="34" charset="-122"/>
+                <a:cs typeface="Calibri" pitchFamily="34" charset="-120"/>
+              </a:rPr>
+              <a:t>Et il n'a JAMAIS vu la formule de la dérivée : il l'a reconstruite depuis le graphe des opérations.</a:t>
+            </a:r>
+            <a:endParaRPr lang="en-US" sz="1050" dirty="0"/>
+          </a:p>
+          <a:p>
+            <a:pPr indent="0" marL="0">
+              <a:lnSpc>
+                <a:spcPct val="106000"/>
               </a:lnSpc>
               <a:buNone/>
             </a:pPr>
             <a:r>
               <a:rPr lang="en-US" sz="950" b="1" dirty="0">
                 <a:solidFill>
-                  <a:srgbClr val="1E2761"/>
-                </a:solidFill>
-                <a:latin typeface="Courier New" pitchFamily="34" charset="0"/>
-                <a:ea typeface="Courier New" pitchFamily="34" charset="-122"/>
-                <a:cs typeface="Courier New" pitchFamily="34" charset="-120"/>
-              </a:rPr>
-              <a:t>classification_report(y_pred, y_test)</a:t>
-            </a:r>
-            <a:endParaRPr lang="en-US" sz="950" dirty="0"/>
-          </a:p>
-          <a:p>
-            <a:pPr indent="0" marL="0">
-              <a:lnSpc>
-                <a:spcPct val="105000"/>
-              </a:lnSpc>
-              <a:buNone/>
-            </a:pPr>
-            <a:r>
-              <a:rPr lang="en-US" sz="900" dirty="0">
-                <a:solidFill>
                   <a:srgbClr val="2A3550"/>
                 </a:solidFill>
                 <a:latin typeface="Calibri" pitchFamily="34" charset="0"/>
                 <a:ea typeface="Calibri" pitchFamily="34" charset="-122"/>
                 <a:cs typeface="Calibri" pitchFamily="34" charset="-120"/>
               </a:rPr>
-              <a:t>ordre inversé → précision et rappel ÉCHANGÉS (S3)</a:t>
-            </a:r>
-            <a:endParaRPr lang="en-US" sz="950" dirty="0"/>
+              <a:t>C'est ce qui rend le deep learning praticable : dériver des millions de paramètres à la main est impossible.</a:t>
+            </a:r>
+            <a:endParaRPr lang="en-US" sz="1050" dirty="0"/>
           </a:p>
         </p:txBody>
       </p:sp>
@@ -43741,16 +44172,16 @@
         </p:nvSpPr>
         <p:spPr>
           <a:xfrm>
-            <a:off x="457200" y="2103120"/>
-            <a:ext cx="4041648" cy="804672"/>
+            <a:off x="4937760" y="1188720"/>
+            <a:ext cx="3785616" cy="1600200"/>
           </a:xfrm>
           <a:prstGeom prst="roundRect">
             <a:avLst>
-              <a:gd name="adj" fmla="val 6818"/>
+              <a:gd name="adj" fmla="val 4000"/>
             </a:avLst>
           </a:prstGeom>
           <a:solidFill>
-            <a:srgbClr val="EEF4FE"/>
+            <a:srgbClr val="141E3C"/>
           </a:solidFill>
           <a:ln/>
           <a:effectLst>
@@ -43770,28 +44201,68 @@
         </p:nvSpPr>
         <p:spPr>
           <a:xfrm>
-            <a:off x="566928" y="2340864"/>
-            <a:ext cx="329184" cy="329184"/>
+            <a:off x="5065776" y="1307592"/>
+            <a:ext cx="64008" cy="64008"/>
           </a:xfrm>
           <a:prstGeom prst="ellipse">
             <a:avLst/>
           </a:prstGeom>
           <a:solidFill>
-            <a:srgbClr val="D64550"/>
+            <a:srgbClr val="E8604C"/>
           </a:solidFill>
           <a:ln/>
         </p:spPr>
       </p:sp>
       <p:sp>
         <p:nvSpPr>
-          <p:cNvPr id="14" name="Text 12"/>
-          <p:cNvSpPr/>
-          <p:nvPr/>
-        </p:nvSpPr>
-        <p:spPr>
-          <a:xfrm>
-            <a:off x="566928" y="2331720"/>
-            <a:ext cx="329184" cy="329184"/>
+          <p:cNvPr id="14" name="Shape 12"/>
+          <p:cNvSpPr/>
+          <p:nvPr/>
+        </p:nvSpPr>
+        <p:spPr>
+          <a:xfrm>
+            <a:off x="5193792" y="1307592"/>
+            <a:ext cx="64008" cy="64008"/>
+          </a:xfrm>
+          <a:prstGeom prst="ellipse">
+            <a:avLst/>
+          </a:prstGeom>
+          <a:solidFill>
+            <a:srgbClr val="F2B233"/>
+          </a:solidFill>
+          <a:ln/>
+        </p:spPr>
+      </p:sp>
+      <p:sp>
+        <p:nvSpPr>
+          <p:cNvPr id="15" name="Shape 13"/>
+          <p:cNvSpPr/>
+          <p:nvPr/>
+        </p:nvSpPr>
+        <p:spPr>
+          <a:xfrm>
+            <a:off x="5321808" y="1307592"/>
+            <a:ext cx="64008" cy="64008"/>
+          </a:xfrm>
+          <a:prstGeom prst="ellipse">
+            <a:avLst/>
+          </a:prstGeom>
+          <a:solidFill>
+            <a:srgbClr val="5BBB63"/>
+          </a:solidFill>
+          <a:ln/>
+        </p:spPr>
+      </p:sp>
+      <p:sp>
+        <p:nvSpPr>
+          <p:cNvPr id="16" name="Text 14"/>
+          <p:cNvSpPr/>
+          <p:nvPr/>
+        </p:nvSpPr>
+        <p:spPr>
+          <a:xfrm>
+            <a:off x="5102352" y="1463040"/>
+            <a:ext cx="3456432" cy="1216152"/>
           </a:xfrm>
           <a:prstGeom prst="rect">
             <a:avLst/>
@@ -43800,107 +44271,213 @@
           <a:ln/>
         </p:spPr>
         <p:txBody>
-          <a:bodyPr wrap="square" lIns="0" tIns="0" rIns="0" bIns="0" rtlCol="0" anchor="ctr"/>
-          <a:lstStyle/>
-          <a:p>
-            <a:pPr algn="ctr" indent="0" marL="0">
-              <a:buNone/>
-            </a:pPr>
-            <a:r>
-              <a:rPr lang="en-US" sz="1300" b="1" dirty="0">
-                <a:solidFill>
-                  <a:srgbClr val="FFFFFF"/>
-                </a:solidFill>
-                <a:latin typeface="Calibri" pitchFamily="34" charset="0"/>
-                <a:ea typeface="Calibri" pitchFamily="34" charset="-122"/>
-                <a:cs typeface="Calibri" pitchFamily="34" charset="-120"/>
-              </a:rPr>
-              <a:t>3</a:t>
-            </a:r>
-            <a:endParaRPr lang="en-US" sz="1300" dirty="0"/>
-          </a:p>
-        </p:txBody>
-      </p:sp>
-      <p:sp>
-        <p:nvSpPr>
-          <p:cNvPr id="15" name="Text 13"/>
-          <p:cNvSpPr/>
-          <p:nvPr/>
-        </p:nvSpPr>
-        <p:spPr>
-          <a:xfrm>
-            <a:off x="1005840" y="2176272"/>
-            <a:ext cx="3401568" cy="685800"/>
-          </a:xfrm>
-          <a:prstGeom prst="rect">
-            <a:avLst/>
-          </a:prstGeom>
-          <a:noFill/>
-          <a:ln/>
-        </p:spPr>
-        <p:txBody>
           <a:bodyPr wrap="square" lIns="0" tIns="0" rIns="0" bIns="0" rtlCol="0" anchor="t"/>
           <a:lstStyle/>
           <a:p>
             <a:pPr indent="0" marL="0">
               <a:lnSpc>
-                <a:spcPct val="105000"/>
-              </a:lnSpc>
-              <a:buNone/>
-            </a:pPr>
-            <a:r>
-              <a:rPr lang="en-US" sz="950" b="1" dirty="0">
-                <a:solidFill>
-                  <a:srgbClr val="1E2761"/>
+                <a:spcPct val="112000"/>
+              </a:lnSpc>
+              <a:buNone/>
+            </a:pPr>
+            <a:r>
+              <a:rPr lang="en-US" sz="900" dirty="0">
+                <a:solidFill>
+                  <a:srgbClr val="DCE7FA"/>
                 </a:solidFill>
                 <a:latin typeface="Courier New" pitchFamily="34" charset="0"/>
                 <a:ea typeface="Courier New" pitchFamily="34" charset="-122"/>
                 <a:cs typeface="Courier New" pitchFamily="34" charset="-120"/>
               </a:rPr>
-              <a:t>Le kernel qui « sauve »</a:t>
-            </a:r>
-            <a:endParaRPr lang="en-US" sz="950" dirty="0"/>
-          </a:p>
-          <a:p>
-            <a:pPr indent="0" marL="0">
-              <a:lnSpc>
-                <a:spcPct val="105000"/>
+              <a:t>pred = model(batch_x)     </a:t>
+            </a:r>
+            <a:pPr indent="0" marL="0">
+              <a:lnSpc>
+                <a:spcPct val="112000"/>
               </a:lnSpc>
               <a:buNone/>
             </a:pPr>
             <a:r>
               <a:rPr lang="en-US" sz="900" dirty="0">
                 <a:solidFill>
-                  <a:srgbClr val="2A3550"/>
-                </a:solidFill>
-                <a:latin typeface="Calibri" pitchFamily="34" charset="0"/>
-                <a:ea typeface="Calibri" pitchFamily="34" charset="-122"/>
-                <a:cs typeface="Calibri" pitchFamily="34" charset="-120"/>
-              </a:rPr>
-              <a:t>imports supprimés mais encore en mémoire → Restart &amp; Run All ! (S3_P4)</a:t>
-            </a:r>
-            <a:endParaRPr lang="en-US" sz="950" dirty="0"/>
-          </a:p>
-        </p:txBody>
-      </p:sp>
-      <p:sp>
-        <p:nvSpPr>
-          <p:cNvPr id="16" name="Shape 14"/>
-          <p:cNvSpPr/>
-          <p:nvPr/>
-        </p:nvSpPr>
-        <p:spPr>
-          <a:xfrm>
-            <a:off x="4681728" y="2103120"/>
-            <a:ext cx="4041648" cy="804672"/>
+                  <a:srgbClr val="7C93C4"/>
+                </a:solidFill>
+                <a:latin typeface="Courier New" pitchFamily="34" charset="0"/>
+                <a:ea typeface="Courier New" pitchFamily="34" charset="-122"/>
+                <a:cs typeface="Courier New" pitchFamily="34" charset="-120"/>
+              </a:rPr>
+              <a:t># forward</a:t>
+            </a:r>
+            <a:endParaRPr lang="en-US" sz="900" dirty="0"/>
+          </a:p>
+          <a:p>
+            <a:pPr indent="0" marL="0">
+              <a:lnSpc>
+                <a:spcPct val="112000"/>
+              </a:lnSpc>
+              <a:buNone/>
+            </a:pPr>
+            <a:r>
+              <a:rPr lang="en-US" sz="900" dirty="0">
+                <a:solidFill>
+                  <a:srgbClr val="DCE7FA"/>
+                </a:solidFill>
+                <a:latin typeface="Courier New" pitchFamily="34" charset="0"/>
+                <a:ea typeface="Courier New" pitchFamily="34" charset="-122"/>
+                <a:cs typeface="Courier New" pitchFamily="34" charset="-120"/>
+              </a:rPr>
+              <a:t>loss = loss_fn(pred, y)   </a:t>
+            </a:r>
+            <a:pPr indent="0" marL="0">
+              <a:lnSpc>
+                <a:spcPct val="112000"/>
+              </a:lnSpc>
+              <a:buNone/>
+            </a:pPr>
+            <a:r>
+              <a:rPr lang="en-US" sz="900" dirty="0">
+                <a:solidFill>
+                  <a:srgbClr val="7C93C4"/>
+                </a:solidFill>
+                <a:latin typeface="Courier New" pitchFamily="34" charset="0"/>
+                <a:ea typeface="Courier New" pitchFamily="34" charset="-122"/>
+                <a:cs typeface="Courier New" pitchFamily="34" charset="-120"/>
+              </a:rPr>
+              <a:t># erreur</a:t>
+            </a:r>
+            <a:endParaRPr lang="en-US" sz="900" dirty="0"/>
+          </a:p>
+          <a:p>
+            <a:pPr indent="0" marL="0">
+              <a:lnSpc>
+                <a:spcPct val="112000"/>
+              </a:lnSpc>
+              <a:buNone/>
+            </a:pPr>
+            <a:r>
+              <a:rPr lang="en-US" sz="900" dirty="0">
+                <a:solidFill>
+                  <a:srgbClr val="DCE7FA"/>
+                </a:solidFill>
+                <a:latin typeface="Courier New" pitchFamily="34" charset="0"/>
+                <a:ea typeface="Courier New" pitchFamily="34" charset="-122"/>
+                <a:cs typeface="Courier New" pitchFamily="34" charset="-120"/>
+              </a:rPr>
+              <a:t>optimizer.zero_grad()     </a:t>
+            </a:r>
+            <a:pPr indent="0" marL="0">
+              <a:lnSpc>
+                <a:spcPct val="112000"/>
+              </a:lnSpc>
+              <a:buNone/>
+            </a:pPr>
+            <a:r>
+              <a:rPr lang="en-US" sz="900" dirty="0">
+                <a:solidFill>
+                  <a:srgbClr val="FF9B8E"/>
+                </a:solidFill>
+                <a:latin typeface="Courier New" pitchFamily="34" charset="0"/>
+                <a:ea typeface="Courier New" pitchFamily="34" charset="-122"/>
+                <a:cs typeface="Courier New" pitchFamily="34" charset="-120"/>
+              </a:rPr>
+              <a:t># RAZ !</a:t>
+            </a:r>
+            <a:endParaRPr lang="en-US" sz="900" dirty="0"/>
+          </a:p>
+          <a:p>
+            <a:pPr indent="0" marL="0">
+              <a:lnSpc>
+                <a:spcPct val="112000"/>
+              </a:lnSpc>
+              <a:buNone/>
+            </a:pPr>
+            <a:r>
+              <a:rPr lang="en-US" sz="900" dirty="0">
+                <a:solidFill>
+                  <a:srgbClr val="DCE7FA"/>
+                </a:solidFill>
+                <a:latin typeface="Courier New" pitchFamily="34" charset="0"/>
+                <a:ea typeface="Courier New" pitchFamily="34" charset="-122"/>
+                <a:cs typeface="Courier New" pitchFamily="34" charset="-120"/>
+              </a:rPr>
+              <a:t>loss.backward()           </a:t>
+            </a:r>
+            <a:pPr indent="0" marL="0">
+              <a:lnSpc>
+                <a:spcPct val="112000"/>
+              </a:lnSpc>
+              <a:buNone/>
+            </a:pPr>
+            <a:r>
+              <a:rPr lang="en-US" sz="900" dirty="0">
+                <a:solidFill>
+                  <a:srgbClr val="7C93C4"/>
+                </a:solidFill>
+                <a:latin typeface="Courier New" pitchFamily="34" charset="0"/>
+                <a:ea typeface="Courier New" pitchFamily="34" charset="-122"/>
+                <a:cs typeface="Courier New" pitchFamily="34" charset="-120"/>
+              </a:rPr>
+              <a:t># derivees</a:t>
+            </a:r>
+            <a:endParaRPr lang="en-US" sz="900" dirty="0"/>
+          </a:p>
+          <a:p>
+            <a:pPr indent="0" marL="0">
+              <a:lnSpc>
+                <a:spcPct val="112000"/>
+              </a:lnSpc>
+              <a:buNone/>
+            </a:pPr>
+            <a:r>
+              <a:rPr lang="en-US" sz="900" dirty="0">
+                <a:solidFill>
+                  <a:srgbClr val="DCE7FA"/>
+                </a:solidFill>
+                <a:latin typeface="Courier New" pitchFamily="34" charset="0"/>
+                <a:ea typeface="Courier New" pitchFamily="34" charset="-122"/>
+                <a:cs typeface="Courier New" pitchFamily="34" charset="-120"/>
+              </a:rPr>
+              <a:t>optimizer.step()          </a:t>
+            </a:r>
+            <a:pPr indent="0" marL="0">
+              <a:lnSpc>
+                <a:spcPct val="112000"/>
+              </a:lnSpc>
+              <a:buNone/>
+            </a:pPr>
+            <a:r>
+              <a:rPr lang="en-US" sz="900" dirty="0">
+                <a:solidFill>
+                  <a:srgbClr val="7C93C4"/>
+                </a:solidFill>
+                <a:latin typeface="Courier New" pitchFamily="34" charset="0"/>
+                <a:ea typeface="Courier New" pitchFamily="34" charset="-122"/>
+                <a:cs typeface="Courier New" pitchFamily="34" charset="-120"/>
+              </a:rPr>
+              <a:t># ajuster</a:t>
+            </a:r>
+            <a:endParaRPr lang="en-US" sz="900" dirty="0"/>
+          </a:p>
+        </p:txBody>
+      </p:sp>
+      <p:sp>
+        <p:nvSpPr>
+          <p:cNvPr id="17" name="Shape 15"/>
+          <p:cNvSpPr/>
+          <p:nvPr/>
+        </p:nvSpPr>
+        <p:spPr>
+          <a:xfrm>
+            <a:off x="4937760" y="2971800"/>
+            <a:ext cx="3785616" cy="1828800"/>
           </a:xfrm>
           <a:prstGeom prst="roundRect">
             <a:avLst>
-              <a:gd name="adj" fmla="val 6818"/>
+              <a:gd name="adj" fmla="val 3000"/>
             </a:avLst>
           </a:prstGeom>
           <a:solidFill>
-            <a:srgbClr val="EEF4FE"/>
+            <a:srgbClr val="E9FAF5"/>
           </a:solidFill>
           <a:ln/>
           <a:effectLst>
@@ -43914,34 +44491,14 @@
       </p:sp>
       <p:sp>
         <p:nvSpPr>
-          <p:cNvPr id="17" name="Shape 15"/>
-          <p:cNvSpPr/>
-          <p:nvPr/>
-        </p:nvSpPr>
-        <p:spPr>
-          <a:xfrm>
-            <a:off x="4791456" y="2340864"/>
-            <a:ext cx="329184" cy="329184"/>
-          </a:xfrm>
-          <a:prstGeom prst="ellipse">
-            <a:avLst/>
-          </a:prstGeom>
-          <a:solidFill>
-            <a:srgbClr val="D64550"/>
-          </a:solidFill>
-          <a:ln/>
-        </p:spPr>
-      </p:sp>
-      <p:sp>
-        <p:nvSpPr>
           <p:cNvPr id="18" name="Text 16"/>
           <p:cNvSpPr/>
           <p:nvPr/>
         </p:nvSpPr>
         <p:spPr>
           <a:xfrm>
-            <a:off x="4791456" y="2331720"/>
-            <a:ext cx="329184" cy="329184"/>
+            <a:off x="5084064" y="3081528"/>
+            <a:ext cx="3493008" cy="274320"/>
           </a:xfrm>
           <a:prstGeom prst="rect">
             <a:avLst/>
@@ -43953,21 +44510,21 @@
           <a:bodyPr wrap="square" lIns="0" tIns="0" rIns="0" bIns="0" rtlCol="0" anchor="ctr"/>
           <a:lstStyle/>
           <a:p>
-            <a:pPr algn="ctr" indent="0" marL="0">
-              <a:buNone/>
-            </a:pPr>
-            <a:r>
-              <a:rPr lang="en-US" sz="1300" b="1" dirty="0">
-                <a:solidFill>
-                  <a:srgbClr val="FFFFFF"/>
-                </a:solidFill>
-                <a:latin typeface="Calibri" pitchFamily="34" charset="0"/>
-                <a:ea typeface="Calibri" pitchFamily="34" charset="-122"/>
-                <a:cs typeface="Calibri" pitchFamily="34" charset="-120"/>
-              </a:rPr>
-              <a:t>4</a:t>
-            </a:r>
-            <a:endParaRPr lang="en-US" sz="1300" dirty="0"/>
+            <a:pPr indent="0" marL="0">
+              <a:buNone/>
+            </a:pPr>
+            <a:r>
+              <a:rPr lang="en-US" sz="1250" b="1" dirty="0">
+                <a:solidFill>
+                  <a:srgbClr val="1E2761"/>
+                </a:solidFill>
+                <a:latin typeface="Calibri" pitchFamily="34" charset="0"/>
+                <a:ea typeface="Calibri" pitchFamily="34" charset="-122"/>
+                <a:cs typeface="Calibri" pitchFamily="34" charset="-120"/>
+              </a:rPr>
+              <a:t>⭐ Les 5 lignes qui font TOUT le deep learning</a:t>
+            </a:r>
+            <a:endParaRPr lang="en-US" sz="1250" dirty="0"/>
           </a:p>
         </p:txBody>
       </p:sp>
@@ -43979,8 +44536,8 @@
         </p:nvSpPr>
         <p:spPr>
           <a:xfrm>
-            <a:off x="5230368" y="2176272"/>
-            <a:ext cx="3401568" cy="685800"/>
+            <a:off x="5084064" y="3374136"/>
+            <a:ext cx="3493008" cy="1316736"/>
           </a:xfrm>
           <a:prstGeom prst="rect">
             <a:avLst/>
@@ -43994,12 +44551,12 @@
           <a:p>
             <a:pPr indent="0" marL="0">
               <a:lnSpc>
-                <a:spcPct val="105000"/>
-              </a:lnSpc>
-              <a:buNone/>
-            </a:pPr>
-            <a:r>
-              <a:rPr lang="en-US" sz="950" b="1" dirty="0">
+                <a:spcPct val="106000"/>
+              </a:lnSpc>
+              <a:buNone/>
+            </a:pPr>
+            <a:r>
+              <a:rPr lang="en-US" sz="1000" b="1" dirty="0">
                 <a:solidFill>
                   <a:srgbClr val="1E2761"/>
                 </a:solidFill>
@@ -44007,19 +44564,19 @@
                 <a:ea typeface="Courier New" pitchFamily="34" charset="-122"/>
                 <a:cs typeface="Courier New" pitchFamily="34" charset="-120"/>
               </a:rPr>
-              <a:t>price / 1e6 exécuté 2 fois</a:t>
-            </a:r>
-            <a:endParaRPr lang="en-US" sz="950" dirty="0"/>
-          </a:p>
-          <a:p>
-            <a:pPr indent="0" marL="0">
-              <a:lnSpc>
-                <a:spcPct val="105000"/>
-              </a:lnSpc>
-              <a:buNone/>
-            </a:pPr>
-            <a:r>
-              <a:rPr lang="en-US" sz="900" dirty="0">
+              <a:t>w  ←  w  −  lr × (∂L/∂w)</a:t>
+            </a:r>
+            <a:endParaRPr lang="en-US" sz="1050" dirty="0"/>
+          </a:p>
+          <a:p>
+            <a:pPr indent="0" marL="0">
+              <a:lnSpc>
+                <a:spcPct val="106000"/>
+              </a:lnSpc>
+              <a:buNone/>
+            </a:pPr>
+            <a:r>
+              <a:rPr lang="en-US" sz="950" dirty="0">
                 <a:solidFill>
                   <a:srgbClr val="2A3550"/>
                 </a:solidFill>
@@ -44027,149 +44584,19 @@
                 <a:ea typeface="Calibri" pitchFamily="34" charset="-122"/>
                 <a:cs typeface="Calibri" pitchFamily="34" charset="-120"/>
               </a:rPr>
-              <a:t>cellule non-idempotente → tous les résultats faussés (S1_P2)</a:t>
-            </a:r>
-            <a:endParaRPr lang="en-US" sz="950" dirty="0"/>
-          </a:p>
-        </p:txBody>
-      </p:sp>
-      <p:sp>
-        <p:nvSpPr>
-          <p:cNvPr id="20" name="Shape 18"/>
-          <p:cNvSpPr/>
-          <p:nvPr/>
-        </p:nvSpPr>
-        <p:spPr>
-          <a:xfrm>
-            <a:off x="457200" y="3017520"/>
-            <a:ext cx="4041648" cy="804672"/>
-          </a:xfrm>
-          <a:prstGeom prst="roundRect">
-            <a:avLst>
-              <a:gd name="adj" fmla="val 6818"/>
-            </a:avLst>
-          </a:prstGeom>
-          <a:solidFill>
-            <a:srgbClr val="EEF4FE"/>
-          </a:solidFill>
-          <a:ln/>
-          <a:effectLst>
-            <a:outerShdw sx="100000" sy="100000" kx="0" ky="0" algn="bl" rotWithShape="0" blurRad="88900" dist="25400" dir="2700000">
-              <a:srgbClr val="000000">
-                <a:alpha val="14000"/>
-              </a:srgbClr>
-            </a:outerShdw>
-          </a:effectLst>
-        </p:spPr>
-      </p:sp>
-      <p:sp>
-        <p:nvSpPr>
-          <p:cNvPr id="21" name="Shape 19"/>
-          <p:cNvSpPr/>
-          <p:nvPr/>
-        </p:nvSpPr>
-        <p:spPr>
-          <a:xfrm>
-            <a:off x="566928" y="3255264"/>
-            <a:ext cx="329184" cy="329184"/>
-          </a:xfrm>
-          <a:prstGeom prst="ellipse">
-            <a:avLst/>
-          </a:prstGeom>
-          <a:solidFill>
-            <a:srgbClr val="D64550"/>
-          </a:solidFill>
-          <a:ln/>
-        </p:spPr>
-      </p:sp>
-      <p:sp>
-        <p:nvSpPr>
-          <p:cNvPr id="22" name="Text 20"/>
-          <p:cNvSpPr/>
-          <p:nvPr/>
-        </p:nvSpPr>
-        <p:spPr>
-          <a:xfrm>
-            <a:off x="566928" y="3246120"/>
-            <a:ext cx="329184" cy="329184"/>
-          </a:xfrm>
-          <a:prstGeom prst="rect">
-            <a:avLst/>
-          </a:prstGeom>
-          <a:noFill/>
-          <a:ln/>
-        </p:spPr>
-        <p:txBody>
-          <a:bodyPr wrap="square" lIns="0" tIns="0" rIns="0" bIns="0" rtlCol="0" anchor="ctr"/>
-          <a:lstStyle/>
-          <a:p>
-            <a:pPr algn="ctr" indent="0" marL="0">
-              <a:buNone/>
-            </a:pPr>
-            <a:r>
-              <a:rPr lang="en-US" sz="1300" b="1" dirty="0">
-                <a:solidFill>
-                  <a:srgbClr val="FFFFFF"/>
-                </a:solidFill>
-                <a:latin typeface="Calibri" pitchFamily="34" charset="0"/>
-                <a:ea typeface="Calibri" pitchFamily="34" charset="-122"/>
-                <a:cs typeface="Calibri" pitchFamily="34" charset="-120"/>
-              </a:rPr>
-              <a:t>5</a:t>
-            </a:r>
-            <a:endParaRPr lang="en-US" sz="1300" dirty="0"/>
-          </a:p>
-        </p:txBody>
-      </p:sp>
-      <p:sp>
-        <p:nvSpPr>
-          <p:cNvPr id="23" name="Text 21"/>
-          <p:cNvSpPr/>
-          <p:nvPr/>
-        </p:nvSpPr>
-        <p:spPr>
-          <a:xfrm>
-            <a:off x="1005840" y="3090672"/>
-            <a:ext cx="3401568" cy="685800"/>
-          </a:xfrm>
-          <a:prstGeom prst="rect">
-            <a:avLst/>
-          </a:prstGeom>
-          <a:noFill/>
-          <a:ln/>
-        </p:spPr>
-        <p:txBody>
-          <a:bodyPr wrap="square" lIns="0" tIns="0" rIns="0" bIns="0" rtlCol="0" anchor="t"/>
-          <a:lstStyle/>
-          <a:p>
-            <a:pPr indent="0" marL="0">
-              <a:lnSpc>
-                <a:spcPct val="105000"/>
-              </a:lnSpc>
-              <a:buNone/>
-            </a:pPr>
-            <a:r>
-              <a:rPr lang="en-US" sz="950" b="1" dirty="0">
-                <a:solidFill>
-                  <a:srgbClr val="1E2761"/>
-                </a:solidFill>
-                <a:latin typeface="Courier New" pitchFamily="34" charset="0"/>
-                <a:ea typeface="Courier New" pitchFamily="34" charset="-122"/>
-                <a:cs typeface="Courier New" pitchFamily="34" charset="-120"/>
-              </a:rPr>
-              <a:t>b = a  sur une liste</a:t>
-            </a:r>
-            <a:endParaRPr lang="en-US" sz="950" dirty="0"/>
-          </a:p>
-          <a:p>
-            <a:pPr indent="0" marL="0">
-              <a:lnSpc>
-                <a:spcPct val="105000"/>
-              </a:lnSpc>
-              <a:buNone/>
-            </a:pPr>
-            <a:r>
-              <a:rPr lang="en-US" sz="900" dirty="0">
+              <a:t>Lightning les écrit pour toi. Mais le jour où ça n'apprend pas, c'est LÀ que tu iras chercher.</a:t>
+            </a:r>
+            <a:endParaRPr lang="en-US" sz="1050" dirty="0"/>
+          </a:p>
+          <a:p>
+            <a:pPr indent="0" marL="0">
+              <a:lnSpc>
+                <a:spcPct val="106000"/>
+              </a:lnSpc>
+              <a:buNone/>
+            </a:pPr>
+            <a:r>
+              <a:rPr lang="en-US" sz="950" dirty="0">
                 <a:solidFill>
                   <a:srgbClr val="2A3550"/>
                 </a:solidFill>
@@ -44177,459 +44604,9 @@
                 <a:ea typeface="Calibri" pitchFamily="34" charset="-122"/>
                 <a:cs typeface="Calibri" pitchFamily="34" charset="-120"/>
               </a:rPr>
-              <a:t>pas une copie ! .copy() sinon modifications partagées (day2)</a:t>
-            </a:r>
-            <a:endParaRPr lang="en-US" sz="950" dirty="0"/>
-          </a:p>
-        </p:txBody>
-      </p:sp>
-      <p:sp>
-        <p:nvSpPr>
-          <p:cNvPr id="24" name="Shape 22"/>
-          <p:cNvSpPr/>
-          <p:nvPr/>
-        </p:nvSpPr>
-        <p:spPr>
-          <a:xfrm>
-            <a:off x="4681728" y="3017520"/>
-            <a:ext cx="4041648" cy="804672"/>
-          </a:xfrm>
-          <a:prstGeom prst="roundRect">
-            <a:avLst>
-              <a:gd name="adj" fmla="val 6818"/>
-            </a:avLst>
-          </a:prstGeom>
-          <a:solidFill>
-            <a:srgbClr val="EEF4FE"/>
-          </a:solidFill>
-          <a:ln/>
-          <a:effectLst>
-            <a:outerShdw sx="100000" sy="100000" kx="0" ky="0" algn="bl" rotWithShape="0" blurRad="88900" dist="25400" dir="2700000">
-              <a:srgbClr val="000000">
-                <a:alpha val="14000"/>
-              </a:srgbClr>
-            </a:outerShdw>
-          </a:effectLst>
-        </p:spPr>
-      </p:sp>
-      <p:sp>
-        <p:nvSpPr>
-          <p:cNvPr id="25" name="Shape 23"/>
-          <p:cNvSpPr/>
-          <p:nvPr/>
-        </p:nvSpPr>
-        <p:spPr>
-          <a:xfrm>
-            <a:off x="4791456" y="3255264"/>
-            <a:ext cx="329184" cy="329184"/>
-          </a:xfrm>
-          <a:prstGeom prst="ellipse">
-            <a:avLst/>
-          </a:prstGeom>
-          <a:solidFill>
-            <a:srgbClr val="D64550"/>
-          </a:solidFill>
-          <a:ln/>
-        </p:spPr>
-      </p:sp>
-      <p:sp>
-        <p:nvSpPr>
-          <p:cNvPr id="26" name="Text 24"/>
-          <p:cNvSpPr/>
-          <p:nvPr/>
-        </p:nvSpPr>
-        <p:spPr>
-          <a:xfrm>
-            <a:off x="4791456" y="3246120"/>
-            <a:ext cx="329184" cy="329184"/>
-          </a:xfrm>
-          <a:prstGeom prst="rect">
-            <a:avLst/>
-          </a:prstGeom>
-          <a:noFill/>
-          <a:ln/>
-        </p:spPr>
-        <p:txBody>
-          <a:bodyPr wrap="square" lIns="0" tIns="0" rIns="0" bIns="0" rtlCol="0" anchor="ctr"/>
-          <a:lstStyle/>
-          <a:p>
-            <a:pPr algn="ctr" indent="0" marL="0">
-              <a:buNone/>
-            </a:pPr>
-            <a:r>
-              <a:rPr lang="en-US" sz="1300" b="1" dirty="0">
-                <a:solidFill>
-                  <a:srgbClr val="FFFFFF"/>
-                </a:solidFill>
-                <a:latin typeface="Calibri" pitchFamily="34" charset="0"/>
-                <a:ea typeface="Calibri" pitchFamily="34" charset="-122"/>
-                <a:cs typeface="Calibri" pitchFamily="34" charset="-120"/>
-              </a:rPr>
-              <a:t>6</a:t>
-            </a:r>
-            <a:endParaRPr lang="en-US" sz="1300" dirty="0"/>
-          </a:p>
-        </p:txBody>
-      </p:sp>
-      <p:sp>
-        <p:nvSpPr>
-          <p:cNvPr id="27" name="Text 25"/>
-          <p:cNvSpPr/>
-          <p:nvPr/>
-        </p:nvSpPr>
-        <p:spPr>
-          <a:xfrm>
-            <a:off x="5230368" y="3090672"/>
-            <a:ext cx="3401568" cy="685800"/>
-          </a:xfrm>
-          <a:prstGeom prst="rect">
-            <a:avLst/>
-          </a:prstGeom>
-          <a:noFill/>
-          <a:ln/>
-        </p:spPr>
-        <p:txBody>
-          <a:bodyPr wrap="square" lIns="0" tIns="0" rIns="0" bIns="0" rtlCol="0" anchor="t"/>
-          <a:lstStyle/>
-          <a:p>
-            <a:pPr indent="0" marL="0">
-              <a:lnSpc>
-                <a:spcPct val="105000"/>
-              </a:lnSpc>
-              <a:buNone/>
-            </a:pPr>
-            <a:r>
-              <a:rPr lang="en-US" sz="950" b="1" dirty="0">
-                <a:solidFill>
-                  <a:srgbClr val="1E2761"/>
-                </a:solidFill>
-                <a:latin typeface="Courier New" pitchFamily="34" charset="0"/>
-                <a:ea typeface="Courier New" pitchFamily="34" charset="-122"/>
-                <a:cs typeface="Courier New" pitchFamily="34" charset="-120"/>
-              </a:rPr>
-              <a:t>hypot(a**2 + b**2)</a:t>
-            </a:r>
-            <a:endParaRPr lang="en-US" sz="950" dirty="0"/>
-          </a:p>
-          <a:p>
-            <a:pPr indent="0" marL="0">
-              <a:lnSpc>
-                <a:spcPct val="105000"/>
-              </a:lnSpc>
-              <a:buNone/>
-            </a:pPr>
-            <a:r>
-              <a:rPr lang="en-US" sz="900" dirty="0">
-                <a:solidFill>
-                  <a:srgbClr val="2A3550"/>
-                </a:solidFill>
-                <a:latin typeface="Calibri" pitchFamily="34" charset="0"/>
-                <a:ea typeface="Calibri" pitchFamily="34" charset="-122"/>
-                <a:cs typeface="Calibri" pitchFamily="34" charset="-120"/>
-              </a:rPr>
-              <a:t>hypoténuse de 767 km — vérifier la SIGNATURE (fonction?) (day1)</a:t>
-            </a:r>
-            <a:endParaRPr lang="en-US" sz="950" dirty="0"/>
-          </a:p>
-        </p:txBody>
-      </p:sp>
-      <p:sp>
-        <p:nvSpPr>
-          <p:cNvPr id="28" name="Shape 26"/>
-          <p:cNvSpPr/>
-          <p:nvPr/>
-        </p:nvSpPr>
-        <p:spPr>
-          <a:xfrm>
-            <a:off x="457200" y="3931920"/>
-            <a:ext cx="4041648" cy="804672"/>
-          </a:xfrm>
-          <a:prstGeom prst="roundRect">
-            <a:avLst>
-              <a:gd name="adj" fmla="val 6818"/>
-            </a:avLst>
-          </a:prstGeom>
-          <a:solidFill>
-            <a:srgbClr val="EEF4FE"/>
-          </a:solidFill>
-          <a:ln/>
-          <a:effectLst>
-            <a:outerShdw sx="100000" sy="100000" kx="0" ky="0" algn="bl" rotWithShape="0" blurRad="88900" dist="25400" dir="2700000">
-              <a:srgbClr val="000000">
-                <a:alpha val="14000"/>
-              </a:srgbClr>
-            </a:outerShdw>
-          </a:effectLst>
-        </p:spPr>
-      </p:sp>
-      <p:sp>
-        <p:nvSpPr>
-          <p:cNvPr id="29" name="Shape 27"/>
-          <p:cNvSpPr/>
-          <p:nvPr/>
-        </p:nvSpPr>
-        <p:spPr>
-          <a:xfrm>
-            <a:off x="566928" y="4169664"/>
-            <a:ext cx="329184" cy="329184"/>
-          </a:xfrm>
-          <a:prstGeom prst="ellipse">
-            <a:avLst/>
-          </a:prstGeom>
-          <a:solidFill>
-            <a:srgbClr val="D64550"/>
-          </a:solidFill>
-          <a:ln/>
-        </p:spPr>
-      </p:sp>
-      <p:sp>
-        <p:nvSpPr>
-          <p:cNvPr id="30" name="Text 28"/>
-          <p:cNvSpPr/>
-          <p:nvPr/>
-        </p:nvSpPr>
-        <p:spPr>
-          <a:xfrm>
-            <a:off x="566928" y="4160520"/>
-            <a:ext cx="329184" cy="329184"/>
-          </a:xfrm>
-          <a:prstGeom prst="rect">
-            <a:avLst/>
-          </a:prstGeom>
-          <a:noFill/>
-          <a:ln/>
-        </p:spPr>
-        <p:txBody>
-          <a:bodyPr wrap="square" lIns="0" tIns="0" rIns="0" bIns="0" rtlCol="0" anchor="ctr"/>
-          <a:lstStyle/>
-          <a:p>
-            <a:pPr algn="ctr" indent="0" marL="0">
-              <a:buNone/>
-            </a:pPr>
-            <a:r>
-              <a:rPr lang="en-US" sz="1300" b="1" dirty="0">
-                <a:solidFill>
-                  <a:srgbClr val="FFFFFF"/>
-                </a:solidFill>
-                <a:latin typeface="Calibri" pitchFamily="34" charset="0"/>
-                <a:ea typeface="Calibri" pitchFamily="34" charset="-122"/>
-                <a:cs typeface="Calibri" pitchFamily="34" charset="-120"/>
-              </a:rPr>
-              <a:t>7</a:t>
-            </a:r>
-            <a:endParaRPr lang="en-US" sz="1300" dirty="0"/>
-          </a:p>
-        </p:txBody>
-      </p:sp>
-      <p:sp>
-        <p:nvSpPr>
-          <p:cNvPr id="31" name="Text 29"/>
-          <p:cNvSpPr/>
-          <p:nvPr/>
-        </p:nvSpPr>
-        <p:spPr>
-          <a:xfrm>
-            <a:off x="1005840" y="4005072"/>
-            <a:ext cx="3401568" cy="685800"/>
-          </a:xfrm>
-          <a:prstGeom prst="rect">
-            <a:avLst/>
-          </a:prstGeom>
-          <a:noFill/>
-          <a:ln/>
-        </p:spPr>
-        <p:txBody>
-          <a:bodyPr wrap="square" lIns="0" tIns="0" rIns="0" bIns="0" rtlCol="0" anchor="t"/>
-          <a:lstStyle/>
-          <a:p>
-            <a:pPr indent="0" marL="0">
-              <a:lnSpc>
-                <a:spcPct val="105000"/>
-              </a:lnSpc>
-              <a:buNone/>
-            </a:pPr>
-            <a:r>
-              <a:rPr lang="en-US" sz="950" b="1" dirty="0">
-                <a:solidFill>
-                  <a:srgbClr val="1E2761"/>
-                </a:solidFill>
-                <a:latin typeface="Courier New" pitchFamily="34" charset="0"/>
-                <a:ea typeface="Courier New" pitchFamily="34" charset="-122"/>
-                <a:cs typeface="Courier New" pitchFamily="34" charset="-120"/>
-              </a:rPr>
-              <a:t>Accuracy 84 % sur du 85/15</a:t>
-            </a:r>
-            <a:endParaRPr lang="en-US" sz="950" dirty="0"/>
-          </a:p>
-          <a:p>
-            <a:pPr indent="0" marL="0">
-              <a:lnSpc>
-                <a:spcPct val="105000"/>
-              </a:lnSpc>
-              <a:buNone/>
-            </a:pPr>
-            <a:r>
-              <a:rPr lang="en-US" sz="900" dirty="0">
-                <a:solidFill>
-                  <a:srgbClr val="2A3550"/>
-                </a:solidFill>
-                <a:latin typeface="Calibri" pitchFamily="34" charset="0"/>
-                <a:ea typeface="Calibri" pitchFamily="34" charset="-122"/>
-                <a:cs typeface="Calibri" pitchFamily="34" charset="-120"/>
-              </a:rPr>
-              <a:t>pire que l'idiot « toujours Deny » — baseline d'abord ! (S3_P1)</a:t>
-            </a:r>
-            <a:endParaRPr lang="en-US" sz="950" dirty="0"/>
-          </a:p>
-        </p:txBody>
-      </p:sp>
-      <p:sp>
-        <p:nvSpPr>
-          <p:cNvPr id="32" name="Shape 30"/>
-          <p:cNvSpPr/>
-          <p:nvPr/>
-        </p:nvSpPr>
-        <p:spPr>
-          <a:xfrm>
-            <a:off x="4681728" y="3931920"/>
-            <a:ext cx="4041648" cy="804672"/>
-          </a:xfrm>
-          <a:prstGeom prst="roundRect">
-            <a:avLst>
-              <a:gd name="adj" fmla="val 6818"/>
-            </a:avLst>
-          </a:prstGeom>
-          <a:solidFill>
-            <a:srgbClr val="EEF4FE"/>
-          </a:solidFill>
-          <a:ln/>
-          <a:effectLst>
-            <a:outerShdw sx="100000" sy="100000" kx="0" ky="0" algn="bl" rotWithShape="0" blurRad="88900" dist="25400" dir="2700000">
-              <a:srgbClr val="000000">
-                <a:alpha val="14000"/>
-              </a:srgbClr>
-            </a:outerShdw>
-          </a:effectLst>
-        </p:spPr>
-      </p:sp>
-      <p:sp>
-        <p:nvSpPr>
-          <p:cNvPr id="33" name="Shape 31"/>
-          <p:cNvSpPr/>
-          <p:nvPr/>
-        </p:nvSpPr>
-        <p:spPr>
-          <a:xfrm>
-            <a:off x="4791456" y="4169664"/>
-            <a:ext cx="329184" cy="329184"/>
-          </a:xfrm>
-          <a:prstGeom prst="ellipse">
-            <a:avLst/>
-          </a:prstGeom>
-          <a:solidFill>
-            <a:srgbClr val="D64550"/>
-          </a:solidFill>
-          <a:ln/>
-        </p:spPr>
-      </p:sp>
-      <p:sp>
-        <p:nvSpPr>
-          <p:cNvPr id="34" name="Text 32"/>
-          <p:cNvSpPr/>
-          <p:nvPr/>
-        </p:nvSpPr>
-        <p:spPr>
-          <a:xfrm>
-            <a:off x="4791456" y="4160520"/>
-            <a:ext cx="329184" cy="329184"/>
-          </a:xfrm>
-          <a:prstGeom prst="rect">
-            <a:avLst/>
-          </a:prstGeom>
-          <a:noFill/>
-          <a:ln/>
-        </p:spPr>
-        <p:txBody>
-          <a:bodyPr wrap="square" lIns="0" tIns="0" rIns="0" bIns="0" rtlCol="0" anchor="ctr"/>
-          <a:lstStyle/>
-          <a:p>
-            <a:pPr algn="ctr" indent="0" marL="0">
-              <a:buNone/>
-            </a:pPr>
-            <a:r>
-              <a:rPr lang="en-US" sz="1300" b="1" dirty="0">
-                <a:solidFill>
-                  <a:srgbClr val="FFFFFF"/>
-                </a:solidFill>
-                <a:latin typeface="Calibri" pitchFamily="34" charset="0"/>
-                <a:ea typeface="Calibri" pitchFamily="34" charset="-122"/>
-                <a:cs typeface="Calibri" pitchFamily="34" charset="-120"/>
-              </a:rPr>
-              <a:t>8</a:t>
-            </a:r>
-            <a:endParaRPr lang="en-US" sz="1300" dirty="0"/>
-          </a:p>
-        </p:txBody>
-      </p:sp>
-      <p:sp>
-        <p:nvSpPr>
-          <p:cNvPr id="35" name="Text 33"/>
-          <p:cNvSpPr/>
-          <p:nvPr/>
-        </p:nvSpPr>
-        <p:spPr>
-          <a:xfrm>
-            <a:off x="5230368" y="4005072"/>
-            <a:ext cx="3401568" cy="685800"/>
-          </a:xfrm>
-          <a:prstGeom prst="rect">
-            <a:avLst/>
-          </a:prstGeom>
-          <a:noFill/>
-          <a:ln/>
-        </p:spPr>
-        <p:txBody>
-          <a:bodyPr wrap="square" lIns="0" tIns="0" rIns="0" bIns="0" rtlCol="0" anchor="t"/>
-          <a:lstStyle/>
-          <a:p>
-            <a:pPr indent="0" marL="0">
-              <a:lnSpc>
-                <a:spcPct val="105000"/>
-              </a:lnSpc>
-              <a:buNone/>
-            </a:pPr>
-            <a:r>
-              <a:rPr lang="en-US" sz="950" b="1" dirty="0">
-                <a:solidFill>
-                  <a:srgbClr val="1E2761"/>
-                </a:solidFill>
-                <a:latin typeface="Courier New" pitchFamily="34" charset="0"/>
-                <a:ea typeface="Courier New" pitchFamily="34" charset="-122"/>
-                <a:cs typeface="Courier New" pitchFamily="34" charset="-120"/>
-              </a:rPr>
-              <a:t>idxmin() → indice, pas valeur</a:t>
-            </a:r>
-            <a:endParaRPr lang="en-US" sz="950" dirty="0"/>
-          </a:p>
-          <a:p>
-            <a:pPr indent="0" marL="0">
-              <a:lnSpc>
-                <a:spcPct val="105000"/>
-              </a:lnSpc>
-              <a:buNone/>
-            </a:pPr>
-            <a:r>
-              <a:rPr lang="en-US" sz="900" dirty="0">
-                <a:solidFill>
-                  <a:srgbClr val="2A3550"/>
-                </a:solidFill>
-                <a:latin typeface="Calibri" pitchFamily="34" charset="0"/>
-                <a:ea typeface="Calibri" pitchFamily="34" charset="-122"/>
-                <a:cs typeface="Calibri" pitchFamily="34" charset="-120"/>
-              </a:rPr>
-              <a:t>ligne 2 = k 3 : le meilleur k n'était pas 2 ! (S4_P1)</a:t>
-            </a:r>
-            <a:endParaRPr lang="en-US" sz="950" dirty="0"/>
+              <a:t>zero_grad oublié → les gradients s'additionnent · step oublié → les poids ne bougent jamais.</a:t>
+            </a:r>
+            <a:endParaRPr lang="en-US" sz="1050" dirty="0"/>
           </a:p>
         </p:txBody>
       </p:sp>
@@ -44647,7 +44624,7 @@
     <p:bg>
       <p:bgPr>
         <a:solidFill>
-          <a:srgbClr val="1E2761"/>
+          <a:srgbClr val="FFFFFF"/>
         </a:solidFill>
       </p:bgPr>
     </p:bg>
@@ -44673,8 +44650,8 @@
         </p:nvSpPr>
         <p:spPr>
           <a:xfrm>
-            <a:off x="640080" y="685800"/>
-            <a:ext cx="7863840" cy="320040"/>
+            <a:off x="457200" y="201168"/>
+            <a:ext cx="8229600" cy="256032"/>
           </a:xfrm>
           <a:prstGeom prst="rect">
             <a:avLst/>
@@ -44690,17 +44667,17 @@
               <a:buNone/>
             </a:pPr>
             <a:r>
-              <a:rPr lang="en-US" sz="1300" b="1" spc="300" kern="0" dirty="0">
-                <a:solidFill>
-                  <a:srgbClr val="02C39A"/>
-                </a:solidFill>
-                <a:latin typeface="Calibri" pitchFamily="34" charset="0"/>
-                <a:ea typeface="Calibri" pitchFamily="34" charset="-122"/>
-                <a:cs typeface="Calibri" pitchFamily="34" charset="-120"/>
-              </a:rPr>
-              <a:t>LE VOYAGE EST COMPLET</a:t>
-            </a:r>
-            <a:endParaRPr lang="en-US" sz="1300" dirty="0"/>
+              <a:rPr lang="en-US" sz="1100" b="1" spc="200" kern="0" dirty="0">
+                <a:solidFill>
+                  <a:srgbClr val="017A61"/>
+                </a:solidFill>
+                <a:latin typeface="Calibri" pitchFamily="34" charset="0"/>
+                <a:ea typeface="Calibri" pitchFamily="34" charset="-122"/>
+                <a:cs typeface="Calibri" pitchFamily="34" charset="-120"/>
+              </a:rPr>
+              <a:t>S9_P4 · DEEP_LEARNING/</a:t>
+            </a:r>
+            <a:endParaRPr lang="en-US" sz="1100" dirty="0"/>
           </a:p>
         </p:txBody>
       </p:sp>
@@ -44712,8 +44689,8 @@
         </p:nvSpPr>
         <p:spPr>
           <a:xfrm>
-            <a:off x="640080" y="1005840"/>
-            <a:ext cx="7863840" cy="685800"/>
+            <a:off x="457200" y="438912"/>
+            <a:ext cx="8229600" cy="566928"/>
           </a:xfrm>
           <a:prstGeom prst="rect">
             <a:avLst/>
@@ -44729,17 +44706,17 @@
               <a:buNone/>
             </a:pPr>
             <a:r>
-              <a:rPr lang="en-US" sz="3000" b="1" dirty="0">
-                <a:solidFill>
-                  <a:srgbClr val="FFFFFF"/>
-                </a:solidFill>
-                <a:latin typeface="Calibri" pitchFamily="34" charset="0"/>
-                <a:ea typeface="Calibri" pitchFamily="34" charset="-122"/>
-                <a:cs typeface="Calibri" pitchFamily="34" charset="-120"/>
-              </a:rPr>
-              <a:t>De  a = 3  à  model.predict(X_test)</a:t>
-            </a:r>
-            <a:endParaRPr lang="en-US" sz="3000" dirty="0"/>
+              <a:rPr lang="en-US" sz="2700" b="1" dirty="0">
+                <a:solidFill>
+                  <a:srgbClr val="1E2761"/>
+                </a:solidFill>
+                <a:latin typeface="Calibri" pitchFamily="34" charset="0"/>
+                <a:ea typeface="Calibri" pitchFamily="34" charset="-122"/>
+                <a:cs typeface="Calibri" pitchFamily="34" charset="-120"/>
+              </a:rPr>
+              <a:t>Le pipeline Lightning : le squelette de TOUT projet</a:t>
+            </a:r>
+            <a:endParaRPr lang="en-US" sz="2700" dirty="0"/>
           </a:p>
         </p:txBody>
       </p:sp>
@@ -44751,30 +44728,97 @@
         </p:nvSpPr>
         <p:spPr>
           <a:xfrm>
-            <a:off x="640080" y="1965960"/>
-            <a:ext cx="3840480" cy="804672"/>
+            <a:off x="457200" y="1188720"/>
+            <a:ext cx="4663440" cy="3611880"/>
           </a:xfrm>
           <a:prstGeom prst="roundRect">
             <a:avLst>
-              <a:gd name="adj" fmla="val 7955"/>
+              <a:gd name="adj" fmla="val 1772"/>
             </a:avLst>
           </a:prstGeom>
           <a:solidFill>
-            <a:srgbClr val="273672"/>
+            <a:srgbClr val="141E3C"/>
           </a:solidFill>
           <a:ln/>
-        </p:spPr>
-      </p:sp>
-      <p:sp>
-        <p:nvSpPr>
-          <p:cNvPr id="5" name="Text 3"/>
-          <p:cNvSpPr/>
-          <p:nvPr/>
-        </p:nvSpPr>
-        <p:spPr>
-          <a:xfrm>
-            <a:off x="822960" y="2057400"/>
-            <a:ext cx="3520440" cy="640080"/>
+          <a:effectLst>
+            <a:outerShdw sx="100000" sy="100000" kx="0" ky="0" algn="bl" rotWithShape="0" blurRad="88900" dist="25400" dir="2700000">
+              <a:srgbClr val="000000">
+                <a:alpha val="14000"/>
+              </a:srgbClr>
+            </a:outerShdw>
+          </a:effectLst>
+        </p:spPr>
+      </p:sp>
+      <p:sp>
+        <p:nvSpPr>
+          <p:cNvPr id="5" name="Shape 3"/>
+          <p:cNvSpPr/>
+          <p:nvPr/>
+        </p:nvSpPr>
+        <p:spPr>
+          <a:xfrm>
+            <a:off x="585216" y="1307592"/>
+            <a:ext cx="64008" cy="64008"/>
+          </a:xfrm>
+          <a:prstGeom prst="ellipse">
+            <a:avLst/>
+          </a:prstGeom>
+          <a:solidFill>
+            <a:srgbClr val="E8604C"/>
+          </a:solidFill>
+          <a:ln/>
+        </p:spPr>
+      </p:sp>
+      <p:sp>
+        <p:nvSpPr>
+          <p:cNvPr id="6" name="Shape 4"/>
+          <p:cNvSpPr/>
+          <p:nvPr/>
+        </p:nvSpPr>
+        <p:spPr>
+          <a:xfrm>
+            <a:off x="713232" y="1307592"/>
+            <a:ext cx="64008" cy="64008"/>
+          </a:xfrm>
+          <a:prstGeom prst="ellipse">
+            <a:avLst/>
+          </a:prstGeom>
+          <a:solidFill>
+            <a:srgbClr val="F2B233"/>
+          </a:solidFill>
+          <a:ln/>
+        </p:spPr>
+      </p:sp>
+      <p:sp>
+        <p:nvSpPr>
+          <p:cNvPr id="7" name="Shape 5"/>
+          <p:cNvSpPr/>
+          <p:nvPr/>
+        </p:nvSpPr>
+        <p:spPr>
+          <a:xfrm>
+            <a:off x="841248" y="1307592"/>
+            <a:ext cx="64008" cy="64008"/>
+          </a:xfrm>
+          <a:prstGeom prst="ellipse">
+            <a:avLst/>
+          </a:prstGeom>
+          <a:solidFill>
+            <a:srgbClr val="5BBB63"/>
+          </a:solidFill>
+          <a:ln/>
+        </p:spPr>
+      </p:sp>
+      <p:sp>
+        <p:nvSpPr>
+          <p:cNvPr id="8" name="Text 6"/>
+          <p:cNvSpPr/>
+          <p:nvPr/>
+        </p:nvSpPr>
+        <p:spPr>
+          <a:xfrm>
+            <a:off x="621792" y="1463040"/>
+            <a:ext cx="4334256" cy="3227832"/>
           </a:xfrm>
           <a:prstGeom prst="rect">
             <a:avLst/>
@@ -44788,77 +44832,414 @@
           <a:p>
             <a:pPr indent="0" marL="0">
               <a:lnSpc>
-                <a:spcPct val="115000"/>
-              </a:lnSpc>
-              <a:buNone/>
-            </a:pPr>
-            <a:r>
-              <a:rPr lang="en-US" sz="1100" b="1" dirty="0">
-                <a:solidFill>
-                  <a:srgbClr val="FFD43B"/>
-                </a:solidFill>
-                <a:latin typeface="Calibri" pitchFamily="34" charset="0"/>
-                <a:ea typeface="Calibri" pitchFamily="34" charset="-122"/>
-                <a:cs typeface="Calibri" pitchFamily="34" charset="-120"/>
-              </a:rPr>
-              <a:t>PYTHON</a:t>
-            </a:r>
-            <a:endParaRPr lang="en-US" sz="1100" dirty="0"/>
-          </a:p>
-          <a:p>
-            <a:pPr indent="0" marL="0">
-              <a:lnSpc>
-                <a:spcPct val="115000"/>
-              </a:lnSpc>
-              <a:buNone/>
-            </a:pPr>
-            <a:r>
-              <a:rPr lang="en-US" sz="1050" dirty="0">
-                <a:solidFill>
-                  <a:srgbClr val="CADCFC"/>
-                </a:solidFill>
-                <a:latin typeface="Calibri" pitchFamily="34" charset="0"/>
-                <a:ea typeface="Calibri" pitchFamily="34" charset="-122"/>
-                <a:cs typeface="Calibri" pitchFamily="34" charset="-120"/>
-              </a:rPr>
-              <a:t>types · listes · fonctions · POO · pandas</a:t>
-            </a:r>
-            <a:endParaRPr lang="en-US" sz="1100" dirty="0"/>
-          </a:p>
-        </p:txBody>
-      </p:sp>
-      <p:sp>
-        <p:nvSpPr>
-          <p:cNvPr id="6" name="Shape 4"/>
-          <p:cNvSpPr/>
-          <p:nvPr/>
-        </p:nvSpPr>
-        <p:spPr>
-          <a:xfrm>
-            <a:off x="4709160" y="1965960"/>
-            <a:ext cx="3840480" cy="804672"/>
+                <a:spcPct val="112000"/>
+              </a:lnSpc>
+              <a:buNone/>
+            </a:pPr>
+            <a:r>
+              <a:rPr lang="en-US" sz="950" dirty="0">
+                <a:solidFill>
+                  <a:srgbClr val="DCE7FA"/>
+                </a:solidFill>
+                <a:latin typeface="Courier New" pitchFamily="34" charset="0"/>
+                <a:ea typeface="Courier New" pitchFamily="34" charset="-122"/>
+                <a:cs typeface="Courier New" pitchFamily="34" charset="-120"/>
+              </a:rPr>
+              <a:t>1.  donnees        </a:t>
+            </a:r>
+            <a:pPr indent="0" marL="0">
+              <a:lnSpc>
+                <a:spcPct val="112000"/>
+              </a:lnSpc>
+              <a:buNone/>
+            </a:pPr>
+            <a:r>
+              <a:rPr lang="en-US" sz="950" dirty="0">
+                <a:solidFill>
+                  <a:srgbClr val="7C93C4"/>
+                </a:solidFill>
+                <a:latin typeface="Courier New" pitchFamily="34" charset="0"/>
+                <a:ea typeface="Courier New" pitchFamily="34" charset="-122"/>
+                <a:cs typeface="Courier New" pitchFamily="34" charset="-120"/>
+              </a:rPr>
+              <a:t># connaitre la verite</a:t>
+            </a:r>
+            <a:endParaRPr lang="en-US" sz="950" dirty="0"/>
+          </a:p>
+          <a:p>
+            <a:pPr indent="0" marL="0">
+              <a:lnSpc>
+                <a:spcPct val="112000"/>
+              </a:lnSpc>
+              <a:buNone/>
+            </a:pPr>
+            <a:r>
+              <a:rPr lang="en-US" sz="950" dirty="0">
+                <a:solidFill>
+                  <a:srgbClr val="DCE7FA"/>
+                </a:solidFill>
+                <a:latin typeface="Courier New" pitchFamily="34" charset="0"/>
+                <a:ea typeface="Courier New" pitchFamily="34" charset="-122"/>
+                <a:cs typeface="Courier New" pitchFamily="34" charset="-120"/>
+              </a:rPr>
+              <a:t>2.  split          </a:t>
+            </a:r>
+            <a:pPr indent="0" marL="0">
+              <a:lnSpc>
+                <a:spcPct val="112000"/>
+              </a:lnSpc>
+              <a:buNone/>
+            </a:pPr>
+            <a:r>
+              <a:rPr lang="en-US" sz="950" dirty="0">
+                <a:solidFill>
+                  <a:srgbClr val="7C93C4"/>
+                </a:solidFill>
+                <a:latin typeface="Courier New" pitchFamily="34" charset="0"/>
+                <a:ea typeface="Courier New" pitchFamily="34" charset="-122"/>
+                <a:cs typeface="Courier New" pitchFamily="34" charset="-120"/>
+              </a:rPr>
+              <a:t># AVANT tout le reste</a:t>
+            </a:r>
+            <a:endParaRPr lang="en-US" sz="950" dirty="0"/>
+          </a:p>
+          <a:p>
+            <a:pPr indent="0" marL="0">
+              <a:lnSpc>
+                <a:spcPct val="112000"/>
+              </a:lnSpc>
+              <a:buNone/>
+            </a:pPr>
+            <a:r>
+              <a:rPr lang="en-US" sz="950" dirty="0">
+                <a:solidFill>
+                  <a:srgbClr val="DCE7FA"/>
+                </a:solidFill>
+                <a:latin typeface="Courier New" pitchFamily="34" charset="0"/>
+                <a:ea typeface="Courier New" pitchFamily="34" charset="-122"/>
+                <a:cs typeface="Courier New" pitchFamily="34" charset="-120"/>
+              </a:rPr>
+              <a:t>3.  scaler         </a:t>
+            </a:r>
+            <a:pPr indent="0" marL="0">
+              <a:lnSpc>
+                <a:spcPct val="112000"/>
+              </a:lnSpc>
+              <a:buNone/>
+            </a:pPr>
+            <a:r>
+              <a:rPr lang="en-US" sz="950" dirty="0">
+                <a:solidFill>
+                  <a:srgbClr val="FF9B8E"/>
+                </a:solidFill>
+                <a:latin typeface="Courier New" pitchFamily="34" charset="0"/>
+                <a:ea typeface="Courier New" pitchFamily="34" charset="-122"/>
+                <a:cs typeface="Courier New" pitchFamily="34" charset="-120"/>
+              </a:rPr>
+              <a:t># fit sur le TRAIN seul</a:t>
+            </a:r>
+            <a:endParaRPr lang="en-US" sz="950" dirty="0"/>
+          </a:p>
+          <a:p>
+            <a:pPr indent="0" marL="0">
+              <a:lnSpc>
+                <a:spcPct val="112000"/>
+              </a:lnSpc>
+              <a:buNone/>
+            </a:pPr>
+            <a:r>
+              <a:rPr lang="en-US" sz="950" dirty="0">
+                <a:solidFill>
+                  <a:srgbClr val="DCE7FA"/>
+                </a:solidFill>
+                <a:latin typeface="Courier New" pitchFamily="34" charset="0"/>
+                <a:ea typeface="Courier New" pitchFamily="34" charset="-122"/>
+                <a:cs typeface="Courier New" pitchFamily="34" charset="-120"/>
+              </a:rPr>
+              <a:t>4.  tenseurs       </a:t>
+            </a:r>
+            <a:pPr indent="0" marL="0">
+              <a:lnSpc>
+                <a:spcPct val="112000"/>
+              </a:lnSpc>
+              <a:buNone/>
+            </a:pPr>
+            <a:r>
+              <a:rPr lang="en-US" sz="950" dirty="0">
+                <a:solidFill>
+                  <a:srgbClr val="7C93C4"/>
+                </a:solidFill>
+                <a:latin typeface="Courier New" pitchFamily="34" charset="0"/>
+                <a:ea typeface="Courier New" pitchFamily="34" charset="-122"/>
+                <a:cs typeface="Courier New" pitchFamily="34" charset="-120"/>
+              </a:rPr>
+              <a:t># float32, (n, feat)</a:t>
+            </a:r>
+            <a:endParaRPr lang="en-US" sz="950" dirty="0"/>
+          </a:p>
+          <a:p>
+            <a:pPr indent="0" marL="0">
+              <a:lnSpc>
+                <a:spcPct val="112000"/>
+              </a:lnSpc>
+              <a:buNone/>
+            </a:pPr>
+            <a:r>
+              <a:rPr lang="en-US" sz="950" dirty="0">
+                <a:solidFill>
+                  <a:srgbClr val="DCE7FA"/>
+                </a:solidFill>
+                <a:latin typeface="Courier New" pitchFamily="34" charset="0"/>
+                <a:ea typeface="Courier New" pitchFamily="34" charset="-122"/>
+                <a:cs typeface="Courier New" pitchFamily="34" charset="-120"/>
+              </a:rPr>
+              <a:t>5.  Dataset        </a:t>
+            </a:r>
+            <a:pPr indent="0" marL="0">
+              <a:lnSpc>
+                <a:spcPct val="112000"/>
+              </a:lnSpc>
+              <a:buNone/>
+            </a:pPr>
+            <a:r>
+              <a:rPr lang="en-US" sz="950" dirty="0">
+                <a:solidFill>
+                  <a:srgbClr val="7C93C4"/>
+                </a:solidFill>
+                <a:latin typeface="Courier New" pitchFamily="34" charset="0"/>
+                <a:ea typeface="Courier New" pitchFamily="34" charset="-122"/>
+                <a:cs typeface="Courier New" pitchFamily="34" charset="-120"/>
+              </a:rPr>
+              <a:t># __len__/__getitem__</a:t>
+            </a:r>
+            <a:endParaRPr lang="en-US" sz="950" dirty="0"/>
+          </a:p>
+          <a:p>
+            <a:pPr indent="0" marL="0">
+              <a:lnSpc>
+                <a:spcPct val="112000"/>
+              </a:lnSpc>
+              <a:buNone/>
+            </a:pPr>
+            <a:r>
+              <a:rPr lang="en-US" sz="950" dirty="0">
+                <a:solidFill>
+                  <a:srgbClr val="DCE7FA"/>
+                </a:solidFill>
+                <a:latin typeface="Courier New" pitchFamily="34" charset="0"/>
+                <a:ea typeface="Courier New" pitchFamily="34" charset="-122"/>
+                <a:cs typeface="Courier New" pitchFamily="34" charset="-120"/>
+              </a:rPr>
+              <a:t>6.  DataLoader     </a:t>
+            </a:r>
+            <a:pPr indent="0" marL="0">
+              <a:lnSpc>
+                <a:spcPct val="112000"/>
+              </a:lnSpc>
+              <a:buNone/>
+            </a:pPr>
+            <a:r>
+              <a:rPr lang="en-US" sz="950" dirty="0">
+                <a:solidFill>
+                  <a:srgbClr val="7C93C4"/>
+                </a:solidFill>
+                <a:latin typeface="Courier New" pitchFamily="34" charset="0"/>
+                <a:ea typeface="Courier New" pitchFamily="34" charset="-122"/>
+                <a:cs typeface="Courier New" pitchFamily="34" charset="-120"/>
+              </a:rPr>
+              <a:t># shuffle T / F</a:t>
+            </a:r>
+            <a:endParaRPr lang="en-US" sz="950" dirty="0"/>
+          </a:p>
+          <a:p>
+            <a:pPr indent="0" marL="0">
+              <a:lnSpc>
+                <a:spcPct val="112000"/>
+              </a:lnSpc>
+              <a:buNone/>
+            </a:pPr>
+            <a:r>
+              <a:rPr lang="en-US" sz="950" dirty="0">
+                <a:solidFill>
+                  <a:srgbClr val="DCE7FA"/>
+                </a:solidFill>
+                <a:latin typeface="Courier New" pitchFamily="34" charset="0"/>
+                <a:ea typeface="Courier New" pitchFamily="34" charset="-122"/>
+                <a:cs typeface="Courier New" pitchFamily="34" charset="-120"/>
+              </a:rPr>
+              <a:t>7.  LightningModule</a:t>
+            </a:r>
+            <a:pPr indent="0" marL="0">
+              <a:lnSpc>
+                <a:spcPct val="112000"/>
+              </a:lnSpc>
+              <a:buNone/>
+            </a:pPr>
+            <a:r>
+              <a:rPr lang="en-US" sz="950" dirty="0">
+                <a:solidFill>
+                  <a:srgbClr val="FF9B8E"/>
+                </a:solidFill>
+                <a:latin typeface="Courier New" pitchFamily="34" charset="0"/>
+                <a:ea typeface="Courier New" pitchFamily="34" charset="-122"/>
+                <a:cs typeface="Courier New" pitchFamily="34" charset="-120"/>
+              </a:rPr>
+              <a:t> # RETURN LOSS</a:t>
+            </a:r>
+            <a:endParaRPr lang="en-US" sz="950" dirty="0"/>
+          </a:p>
+          <a:p>
+            <a:pPr indent="0" marL="0">
+              <a:lnSpc>
+                <a:spcPct val="112000"/>
+              </a:lnSpc>
+              <a:buNone/>
+            </a:pPr>
+            <a:r>
+              <a:rPr lang="en-US" sz="950" dirty="0">
+                <a:solidFill>
+                  <a:srgbClr val="DCE7FA"/>
+                </a:solidFill>
+                <a:latin typeface="Courier New" pitchFamily="34" charset="0"/>
+                <a:ea typeface="Courier New" pitchFamily="34" charset="-122"/>
+                <a:cs typeface="Courier New" pitchFamily="34" charset="-120"/>
+              </a:rPr>
+              <a:t>8.  Trainer        </a:t>
+            </a:r>
+            <a:pPr indent="0" marL="0">
+              <a:lnSpc>
+                <a:spcPct val="112000"/>
+              </a:lnSpc>
+              <a:buNone/>
+            </a:pPr>
+            <a:r>
+              <a:rPr lang="en-US" sz="950" dirty="0">
+                <a:solidFill>
+                  <a:srgbClr val="7C93C4"/>
+                </a:solidFill>
+                <a:latin typeface="Courier New" pitchFamily="34" charset="0"/>
+                <a:ea typeface="Courier New" pitchFamily="34" charset="-122"/>
+                <a:cs typeface="Courier New" pitchFamily="34" charset="-120"/>
+              </a:rPr>
+              <a:t># un objet neuf / run</a:t>
+            </a:r>
+            <a:endParaRPr lang="en-US" sz="950" dirty="0"/>
+          </a:p>
+          <a:p>
+            <a:pPr indent="0" marL="0">
+              <a:lnSpc>
+                <a:spcPct val="112000"/>
+              </a:lnSpc>
+              <a:buNone/>
+            </a:pPr>
+            <a:r>
+              <a:rPr lang="en-US" sz="950" dirty="0">
+                <a:solidFill>
+                  <a:srgbClr val="DCE7FA"/>
+                </a:solidFill>
+                <a:latin typeface="Courier New" pitchFamily="34" charset="0"/>
+                <a:ea typeface="Courier New" pitchFamily="34" charset="-122"/>
+                <a:cs typeface="Courier New" pitchFamily="34" charset="-120"/>
+              </a:rPr>
+              <a:t>9.  courbes        </a:t>
+            </a:r>
+            <a:pPr indent="0" marL="0">
+              <a:lnSpc>
+                <a:spcPct val="112000"/>
+              </a:lnSpc>
+              <a:buNone/>
+            </a:pPr>
+            <a:r>
+              <a:rPr lang="en-US" sz="950" dirty="0">
+                <a:solidFill>
+                  <a:srgbClr val="7C93C4"/>
+                </a:solidFill>
+                <a:latin typeface="Courier New" pitchFamily="34" charset="0"/>
+                <a:ea typeface="Courier New" pitchFamily="34" charset="-122"/>
+                <a:cs typeface="Courier New" pitchFamily="34" charset="-120"/>
+              </a:rPr>
+              <a:t># train vs val</a:t>
+            </a:r>
+            <a:endParaRPr lang="en-US" sz="950" dirty="0"/>
+          </a:p>
+          <a:p>
+            <a:pPr indent="0" marL="0">
+              <a:lnSpc>
+                <a:spcPct val="112000"/>
+              </a:lnSpc>
+              <a:buNone/>
+            </a:pPr>
+            <a:r>
+              <a:rPr lang="en-US" sz="950" dirty="0">
+                <a:solidFill>
+                  <a:srgbClr val="DCE7FA"/>
+                </a:solidFill>
+                <a:latin typeface="Courier New" pitchFamily="34" charset="0"/>
+                <a:ea typeface="Courier New" pitchFamily="34" charset="-122"/>
+                <a:cs typeface="Courier New" pitchFamily="34" charset="-120"/>
+              </a:rPr>
+              <a:t>10. evaluer        </a:t>
+            </a:r>
+            <a:pPr indent="0" marL="0">
+              <a:lnSpc>
+                <a:spcPct val="112000"/>
+              </a:lnSpc>
+              <a:buNone/>
+            </a:pPr>
+            <a:r>
+              <a:rPr lang="en-US" sz="950" dirty="0">
+                <a:solidFill>
+                  <a:srgbClr val="7C93C4"/>
+                </a:solidFill>
+                <a:latin typeface="Courier New" pitchFamily="34" charset="0"/>
+                <a:ea typeface="Courier New" pitchFamily="34" charset="-122"/>
+                <a:cs typeface="Courier New" pitchFamily="34" charset="-120"/>
+              </a:rPr>
+              <a:t># eval + no_grad</a:t>
+            </a:r>
+            <a:endParaRPr lang="en-US" sz="950" dirty="0"/>
+          </a:p>
+        </p:txBody>
+      </p:sp>
+      <p:sp>
+        <p:nvSpPr>
+          <p:cNvPr id="9" name="Shape 7"/>
+          <p:cNvSpPr/>
+          <p:nvPr/>
+        </p:nvSpPr>
+        <p:spPr>
+          <a:xfrm>
+            <a:off x="5303520" y="1188720"/>
+            <a:ext cx="3419856" cy="1371600"/>
           </a:xfrm>
           <a:prstGeom prst="roundRect">
             <a:avLst>
-              <a:gd name="adj" fmla="val 7955"/>
+              <a:gd name="adj" fmla="val 4000"/>
             </a:avLst>
           </a:prstGeom>
           <a:solidFill>
-            <a:srgbClr val="273672"/>
+            <a:srgbClr val="E9FAF5"/>
           </a:solidFill>
           <a:ln/>
-        </p:spPr>
-      </p:sp>
-      <p:sp>
-        <p:nvSpPr>
-          <p:cNvPr id="7" name="Text 5"/>
-          <p:cNvSpPr/>
-          <p:nvPr/>
-        </p:nvSpPr>
-        <p:spPr>
-          <a:xfrm>
-            <a:off x="4892040" y="2057400"/>
-            <a:ext cx="3520440" cy="640080"/>
+          <a:effectLst>
+            <a:outerShdw sx="100000" sy="100000" kx="0" ky="0" algn="bl" rotWithShape="0" blurRad="88900" dist="25400" dir="2700000">
+              <a:srgbClr val="000000">
+                <a:alpha val="14000"/>
+              </a:srgbClr>
+            </a:outerShdw>
+          </a:effectLst>
+        </p:spPr>
+      </p:sp>
+      <p:sp>
+        <p:nvSpPr>
+          <p:cNvPr id="10" name="Text 8"/>
+          <p:cNvSpPr/>
+          <p:nvPr/>
+        </p:nvSpPr>
+        <p:spPr>
+          <a:xfrm>
+            <a:off x="5449824" y="1298448"/>
+            <a:ext cx="3127248" cy="274320"/>
           </a:xfrm>
           <a:prstGeom prst="rect">
             <a:avLst/>
@@ -44867,82 +45248,108 @@
           <a:ln/>
         </p:spPr>
         <p:txBody>
+          <a:bodyPr wrap="square" lIns="0" tIns="0" rIns="0" bIns="0" rtlCol="0" anchor="ctr"/>
+          <a:lstStyle/>
+          <a:p>
+            <a:pPr indent="0" marL="0">
+              <a:buNone/>
+            </a:pPr>
+            <a:r>
+              <a:rPr lang="en-US" sz="1250" b="1" dirty="0">
+                <a:solidFill>
+                  <a:srgbClr val="1E2761"/>
+                </a:solidFill>
+                <a:latin typeface="Calibri" pitchFamily="34" charset="0"/>
+                <a:ea typeface="Calibri" pitchFamily="34" charset="-122"/>
+                <a:cs typeface="Calibri" pitchFamily="34" charset="-120"/>
+              </a:rPr>
+              <a:t>Change les données, pas la structure</a:t>
+            </a:r>
+            <a:endParaRPr lang="en-US" sz="1250" dirty="0"/>
+          </a:p>
+        </p:txBody>
+      </p:sp>
+      <p:sp>
+        <p:nvSpPr>
+          <p:cNvPr id="11" name="Text 9"/>
+          <p:cNvSpPr/>
+          <p:nvPr/>
+        </p:nvSpPr>
+        <p:spPr>
+          <a:xfrm>
+            <a:off x="5449824" y="1591056"/>
+            <a:ext cx="3127248" cy="859536"/>
+          </a:xfrm>
+          <a:prstGeom prst="rect">
+            <a:avLst/>
+          </a:prstGeom>
+          <a:noFill/>
+          <a:ln/>
+        </p:spPr>
+        <p:txBody>
           <a:bodyPr wrap="square" lIns="0" tIns="0" rIns="0" bIns="0" rtlCol="0" anchor="t"/>
           <a:lstStyle/>
           <a:p>
             <a:pPr indent="0" marL="0">
               <a:lnSpc>
-                <a:spcPct val="115000"/>
-              </a:lnSpc>
-              <a:buNone/>
-            </a:pPr>
-            <a:r>
-              <a:rPr lang="en-US" sz="1100" b="1" dirty="0">
-                <a:solidFill>
-                  <a:srgbClr val="02C39A"/>
-                </a:solidFill>
-                <a:latin typeface="Calibri" pitchFamily="34" charset="0"/>
-                <a:ea typeface="Calibri" pitchFamily="34" charset="-122"/>
-                <a:cs typeface="Calibri" pitchFamily="34" charset="-120"/>
-              </a:rPr>
-              <a:t>RÉGRESSION</a:t>
-            </a:r>
-            <a:endParaRPr lang="en-US" sz="1100" dirty="0"/>
-          </a:p>
-          <a:p>
-            <a:pPr indent="0" marL="0">
-              <a:lnSpc>
-                <a:spcPct val="115000"/>
-              </a:lnSpc>
-              <a:buNone/>
-            </a:pPr>
-            <a:r>
-              <a:rPr lang="en-US" sz="1050" dirty="0">
-                <a:solidFill>
-                  <a:srgbClr val="CADCFC"/>
-                </a:solidFill>
-                <a:latin typeface="Calibri" pitchFamily="34" charset="0"/>
-                <a:ea typeface="Calibri" pitchFamily="34" charset="-122"/>
-                <a:cs typeface="Calibri" pitchFamily="34" charset="-120"/>
-              </a:rPr>
-              <a:t>moindres carrés · MAE / RMSE · multiple</a:t>
-            </a:r>
-            <a:endParaRPr lang="en-US" sz="1100" dirty="0"/>
-          </a:p>
-        </p:txBody>
-      </p:sp>
-      <p:sp>
-        <p:nvSpPr>
-          <p:cNvPr id="8" name="Shape 6"/>
-          <p:cNvSpPr/>
-          <p:nvPr/>
-        </p:nvSpPr>
-        <p:spPr>
-          <a:xfrm>
-            <a:off x="640080" y="2926080"/>
-            <a:ext cx="3840480" cy="804672"/>
+                <a:spcPct val="106000"/>
+              </a:lnSpc>
+              <a:buNone/>
+            </a:pPr>
+            <a:r>
+              <a:rPr lang="en-US" sz="930" dirty="0">
+                <a:solidFill>
+                  <a:srgbClr val="2A3550"/>
+                </a:solidFill>
+                <a:latin typeface="Calibri" pitchFamily="34" charset="0"/>
+                <a:ea typeface="Calibri" pitchFamily="34" charset="-122"/>
+                <a:cs typeface="Calibri" pitchFamily="34" charset="-120"/>
+              </a:rPr>
+              <a:t>Régression sur 1200 points ou vision sur 1 million d'images : ce sont les mêmes 10 étapes. C'est ÇA qu'il faut mémoriser.</a:t>
+            </a:r>
+            <a:endParaRPr lang="en-US" sz="1050" dirty="0"/>
+          </a:p>
+        </p:txBody>
+      </p:sp>
+      <p:sp>
+        <p:nvSpPr>
+          <p:cNvPr id="12" name="Shape 10"/>
+          <p:cNvSpPr/>
+          <p:nvPr/>
+        </p:nvSpPr>
+        <p:spPr>
+          <a:xfrm>
+            <a:off x="5303520" y="2697480"/>
+            <a:ext cx="3419856" cy="1051560"/>
           </a:xfrm>
           <a:prstGeom prst="roundRect">
             <a:avLst>
-              <a:gd name="adj" fmla="val 7955"/>
+              <a:gd name="adj" fmla="val 5217"/>
             </a:avLst>
           </a:prstGeom>
           <a:solidFill>
-            <a:srgbClr val="273672"/>
+            <a:srgbClr val="E9FAF5"/>
           </a:solidFill>
           <a:ln/>
-        </p:spPr>
-      </p:sp>
-      <p:sp>
-        <p:nvSpPr>
-          <p:cNvPr id="9" name="Text 7"/>
-          <p:cNvSpPr/>
-          <p:nvPr/>
-        </p:nvSpPr>
-        <p:spPr>
-          <a:xfrm>
-            <a:off x="822960" y="3017520"/>
-            <a:ext cx="3520440" cy="640080"/>
+          <a:effectLst>
+            <a:outerShdw sx="100000" sy="100000" kx="0" ky="0" algn="bl" rotWithShape="0" blurRad="88900" dist="25400" dir="2700000">
+              <a:srgbClr val="000000">
+                <a:alpha val="14000"/>
+              </a:srgbClr>
+            </a:outerShdw>
+          </a:effectLst>
+        </p:spPr>
+      </p:sp>
+      <p:sp>
+        <p:nvSpPr>
+          <p:cNvPr id="13" name="Text 11"/>
+          <p:cNvSpPr/>
+          <p:nvPr/>
+        </p:nvSpPr>
+        <p:spPr>
+          <a:xfrm>
+            <a:off x="5449824" y="2807208"/>
+            <a:ext cx="3127248" cy="274320"/>
           </a:xfrm>
           <a:prstGeom prst="rect">
             <a:avLst/>
@@ -44951,71 +45358,573 @@
           <a:ln/>
         </p:spPr>
         <p:txBody>
+          <a:bodyPr wrap="square" lIns="0" tIns="0" rIns="0" bIns="0" rtlCol="0" anchor="ctr"/>
+          <a:lstStyle/>
+          <a:p>
+            <a:pPr indent="0" marL="0">
+              <a:buNone/>
+            </a:pPr>
+            <a:r>
+              <a:rPr lang="en-US" sz="1250" b="1" dirty="0">
+                <a:solidFill>
+                  <a:srgbClr val="1E2761"/>
+                </a:solidFill>
+                <a:latin typeface="Calibri" pitchFamily="34" charset="0"/>
+                <a:ea typeface="Calibri" pitchFamily="34" charset="-122"/>
+                <a:cs typeface="Calibri" pitchFamily="34" charset="-120"/>
+              </a:rPr>
+              <a:t>Les courbes train vs val</a:t>
+            </a:r>
+            <a:endParaRPr lang="en-US" sz="1250" dirty="0"/>
+          </a:p>
+        </p:txBody>
+      </p:sp>
+      <p:sp>
+        <p:nvSpPr>
+          <p:cNvPr id="14" name="Text 12"/>
+          <p:cNvSpPr/>
+          <p:nvPr/>
+        </p:nvSpPr>
+        <p:spPr>
+          <a:xfrm>
+            <a:off x="5449824" y="3099816"/>
+            <a:ext cx="3127248" cy="539496"/>
+          </a:xfrm>
+          <a:prstGeom prst="rect">
+            <a:avLst/>
+          </a:prstGeom>
+          <a:noFill/>
+          <a:ln/>
+        </p:spPr>
+        <p:txBody>
           <a:bodyPr wrap="square" lIns="0" tIns="0" rIns="0" bIns="0" rtlCol="0" anchor="t"/>
           <a:lstStyle/>
           <a:p>
             <a:pPr indent="0" marL="0">
               <a:lnSpc>
-                <a:spcPct val="115000"/>
-              </a:lnSpc>
-              <a:buNone/>
-            </a:pPr>
-            <a:r>
-              <a:rPr lang="en-US" sz="1100" b="1" dirty="0">
-                <a:solidFill>
-                  <a:srgbClr val="02C39A"/>
-                </a:solidFill>
-                <a:latin typeface="Calibri" pitchFamily="34" charset="0"/>
-                <a:ea typeface="Calibri" pitchFamily="34" charset="-122"/>
-                <a:cs typeface="Calibri" pitchFamily="34" charset="-120"/>
-              </a:rPr>
-              <a:t>CLASSIFICATION</a:t>
-            </a:r>
-            <a:endParaRPr lang="en-US" sz="1100" dirty="0"/>
-          </a:p>
-          <a:p>
-            <a:pPr indent="0" marL="0">
-              <a:lnSpc>
-                <a:spcPct val="115000"/>
-              </a:lnSpc>
-              <a:buNone/>
-            </a:pPr>
-            <a:r>
-              <a:rPr lang="en-US" sz="1050" dirty="0">
-                <a:solidFill>
-                  <a:srgbClr val="CADCFC"/>
-                </a:solidFill>
-                <a:latin typeface="Calibri" pitchFamily="34" charset="0"/>
-                <a:ea typeface="Calibri" pitchFamily="34" charset="-122"/>
-                <a:cs typeface="Calibri" pitchFamily="34" charset="-120"/>
-              </a:rPr>
-              <a:t>sigmoïde · confusion · précision / rappel</a:t>
-            </a:r>
-            <a:endParaRPr lang="en-US" sz="1100" dirty="0"/>
-          </a:p>
-        </p:txBody>
-      </p:sp>
-      <p:sp>
-        <p:nvSpPr>
-          <p:cNvPr id="10" name="Shape 8"/>
-          <p:cNvSpPr/>
-          <p:nvPr/>
-        </p:nvSpPr>
-        <p:spPr>
-          <a:xfrm>
-            <a:off x="4709160" y="2926080"/>
-            <a:ext cx="3840480" cy="804672"/>
+                <a:spcPct val="106000"/>
+              </a:lnSpc>
+              <a:buNone/>
+            </a:pPr>
+            <a:r>
+              <a:rPr lang="en-US" sz="930" dirty="0">
+                <a:solidFill>
+                  <a:srgbClr val="2A3550"/>
+                </a:solidFill>
+                <a:latin typeface="Calibri" pitchFamily="34" charset="0"/>
+                <a:ea typeface="Calibri" pitchFamily="34" charset="-122"/>
+                <a:cs typeface="Calibri" pitchFamily="34" charset="-120"/>
+              </a:rPr>
+              <a:t>Le croisement (train ↓ pendant que val ↑) = le surapprentissage. C'est le seul diagnostic qui compte.</a:t>
+            </a:r>
+            <a:endParaRPr lang="en-US" sz="1050" dirty="0"/>
+          </a:p>
+        </p:txBody>
+      </p:sp>
+      <p:sp>
+        <p:nvSpPr>
+          <p:cNvPr id="15" name="Shape 13"/>
+          <p:cNvSpPr/>
+          <p:nvPr/>
+        </p:nvSpPr>
+        <p:spPr>
+          <a:xfrm>
+            <a:off x="5303520" y="3886200"/>
+            <a:ext cx="3419856" cy="914400"/>
           </a:xfrm>
           <a:prstGeom prst="roundRect">
             <a:avLst>
-              <a:gd name="adj" fmla="val 7955"/>
+              <a:gd name="adj" fmla="val 6000"/>
             </a:avLst>
           </a:prstGeom>
           <a:solidFill>
-            <a:srgbClr val="273672"/>
+            <a:srgbClr val="FFF6DD"/>
           </a:solidFill>
           <a:ln/>
-        </p:spPr>
+          <a:effectLst>
+            <a:outerShdw sx="100000" sy="100000" kx="0" ky="0" algn="bl" rotWithShape="0" blurRad="88900" dist="25400" dir="2700000">
+              <a:srgbClr val="000000">
+                <a:alpha val="14000"/>
+              </a:srgbClr>
+            </a:outerShdw>
+          </a:effectLst>
+        </p:spPr>
+      </p:sp>
+      <p:sp>
+        <p:nvSpPr>
+          <p:cNvPr id="16" name="Text 14"/>
+          <p:cNvSpPr/>
+          <p:nvPr/>
+        </p:nvSpPr>
+        <p:spPr>
+          <a:xfrm>
+            <a:off x="5449824" y="3995928"/>
+            <a:ext cx="3127248" cy="274320"/>
+          </a:xfrm>
+          <a:prstGeom prst="rect">
+            <a:avLst/>
+          </a:prstGeom>
+          <a:noFill/>
+          <a:ln/>
+        </p:spPr>
+        <p:txBody>
+          <a:bodyPr wrap="square" lIns="0" tIns="0" rIns="0" bIns="0" rtlCol="0" anchor="ctr"/>
+          <a:lstStyle/>
+          <a:p>
+            <a:pPr indent="0" marL="0">
+              <a:buNone/>
+            </a:pPr>
+            <a:r>
+              <a:rPr lang="en-US" sz="1250" b="1" dirty="0">
+                <a:solidFill>
+                  <a:srgbClr val="1E2761"/>
+                </a:solidFill>
+                <a:latin typeface="Calibri" pitchFamily="34" charset="0"/>
+                <a:ea typeface="Calibri" pitchFamily="34" charset="-122"/>
+                <a:cs typeface="Calibri" pitchFamily="34" charset="-120"/>
+              </a:rPr>
+              <a:t>🎯 Un GPU ne va pas vite, il va LARGE</a:t>
+            </a:r>
+            <a:endParaRPr lang="en-US" sz="1250" dirty="0"/>
+          </a:p>
+        </p:txBody>
+      </p:sp>
+      <p:sp>
+        <p:nvSpPr>
+          <p:cNvPr id="17" name="Text 15"/>
+          <p:cNvSpPr/>
+          <p:nvPr/>
+        </p:nvSpPr>
+        <p:spPr>
+          <a:xfrm>
+            <a:off x="5449824" y="4288536"/>
+            <a:ext cx="3127248" cy="402336"/>
+          </a:xfrm>
+          <a:prstGeom prst="rect">
+            <a:avLst/>
+          </a:prstGeom>
+          <a:noFill/>
+          <a:ln/>
+        </p:spPr>
+        <p:txBody>
+          <a:bodyPr wrap="square" lIns="0" tIns="0" rIns="0" bIns="0" rtlCol="0" anchor="t"/>
+          <a:lstStyle/>
+          <a:p>
+            <a:pPr indent="0" marL="0">
+              <a:lnSpc>
+                <a:spcPct val="106000"/>
+              </a:lnSpc>
+              <a:buNone/>
+            </a:pPr>
+            <a:r>
+              <a:rPr lang="en-US" sz="930" b="1" dirty="0">
+                <a:solidFill>
+                  <a:srgbClr val="2A3550"/>
+                </a:solidFill>
+                <a:latin typeface="Calibri" pitchFamily="34" charset="0"/>
+                <a:ea typeface="Calibri" pitchFamily="34" charset="-122"/>
+                <a:cs typeface="Calibri" pitchFamily="34" charset="-120"/>
+              </a:rPr>
+              <a:t>Sur 1,2 K paramètres, mesuré : GPU 2,6× PLUS LENT que le CPU.</a:t>
+            </a:r>
+            <a:endParaRPr lang="en-US" sz="1050" dirty="0"/>
+          </a:p>
+        </p:txBody>
+      </p:sp>
+    </p:spTree>
+  </p:cSld>
+  <p:clrMapOvr>
+    <a:masterClrMapping/>
+  </p:clrMapOvr>
+</p:sld>
+</file>
+
+<file path=ppt/slides/slide48.xml><?xml version="1.0" encoding="utf-8"?>
+<p:sld xmlns:a="http://schemas.openxmlformats.org/drawingml/2006/main" xmlns:r="http://schemas.openxmlformats.org/officeDocument/2006/relationships" xmlns:p="http://schemas.openxmlformats.org/presentationml/2006/main">
+  <p:cSld name="Slide 48">
+    <p:bg>
+      <p:bgPr>
+        <a:solidFill>
+          <a:srgbClr val="FFFFFF"/>
+        </a:solidFill>
+      </p:bgPr>
+    </p:bg>
+    <p:spTree>
+      <p:nvGrpSpPr>
+        <p:cNvPr id="1" name=""/>
+        <p:cNvGrpSpPr/>
+        <p:nvPr/>
+      </p:nvGrpSpPr>
+      <p:grpSpPr>
+        <a:xfrm>
+          <a:off x="0" y="0"/>
+          <a:ext cx="0" cy="0"/>
+          <a:chOff x="0" y="0"/>
+          <a:chExt cx="0" cy="0"/>
+        </a:xfrm>
+      </p:grpSpPr>
+      <p:sp>
+        <p:nvSpPr>
+          <p:cNvPr id="2" name="Text 0"/>
+          <p:cNvSpPr/>
+          <p:nvPr/>
+        </p:nvSpPr>
+        <p:spPr>
+          <a:xfrm>
+            <a:off x="457200" y="201168"/>
+            <a:ext cx="8229600" cy="256032"/>
+          </a:xfrm>
+          <a:prstGeom prst="rect">
+            <a:avLst/>
+          </a:prstGeom>
+          <a:noFill/>
+          <a:ln/>
+        </p:spPr>
+        <p:txBody>
+          <a:bodyPr wrap="square" lIns="0" tIns="0" rIns="0" bIns="0" rtlCol="0" anchor="ctr"/>
+          <a:lstStyle/>
+          <a:p>
+            <a:pPr indent="0" marL="0">
+              <a:buNone/>
+            </a:pPr>
+            <a:r>
+              <a:rPr lang="en-US" sz="1100" b="1" spc="200" kern="0" dirty="0">
+                <a:solidFill>
+                  <a:srgbClr val="9C7A00"/>
+                </a:solidFill>
+                <a:latin typeface="Calibri" pitchFamily="34" charset="0"/>
+                <a:ea typeface="Calibri" pitchFamily="34" charset="-122"/>
+                <a:cs typeface="Calibri" pitchFamily="34" charset="-120"/>
+              </a:rPr>
+              <a:t>S9_P5 · DEEP_LEARNING/</a:t>
+            </a:r>
+            <a:endParaRPr lang="en-US" sz="1100" dirty="0"/>
+          </a:p>
+        </p:txBody>
+      </p:sp>
+      <p:sp>
+        <p:nvSpPr>
+          <p:cNvPr id="3" name="Text 1"/>
+          <p:cNvSpPr/>
+          <p:nvPr/>
+        </p:nvSpPr>
+        <p:spPr>
+          <a:xfrm>
+            <a:off x="457200" y="438912"/>
+            <a:ext cx="8229600" cy="566928"/>
+          </a:xfrm>
+          <a:prstGeom prst="rect">
+            <a:avLst/>
+          </a:prstGeom>
+          <a:noFill/>
+          <a:ln/>
+        </p:spPr>
+        <p:txBody>
+          <a:bodyPr wrap="square" lIns="0" tIns="0" rIns="0" bIns="0" rtlCol="0" anchor="ctr"/>
+          <a:lstStyle/>
+          <a:p>
+            <a:pPr indent="0" marL="0">
+              <a:buNone/>
+            </a:pPr>
+            <a:r>
+              <a:rPr lang="en-US" sz="2700" b="1" dirty="0">
+                <a:solidFill>
+                  <a:srgbClr val="1E2761"/>
+                </a:solidFill>
+                <a:latin typeface="Calibri" pitchFamily="34" charset="0"/>
+                <a:ea typeface="Calibri" pitchFamily="34" charset="-122"/>
+                <a:cs typeface="Calibri" pitchFamily="34" charset="-120"/>
+              </a:rPr>
+              <a:t>Vraies données : le nettoyage EST le travail</a:t>
+            </a:r>
+            <a:endParaRPr lang="en-US" sz="2700" dirty="0"/>
+          </a:p>
+        </p:txBody>
+      </p:sp>
+      <p:sp>
+        <p:nvSpPr>
+          <p:cNvPr id="4" name="Shape 2"/>
+          <p:cNvSpPr/>
+          <p:nvPr/>
+        </p:nvSpPr>
+        <p:spPr>
+          <a:xfrm>
+            <a:off x="457200" y="1188720"/>
+            <a:ext cx="4663440" cy="1600200"/>
+          </a:xfrm>
+          <a:prstGeom prst="roundRect">
+            <a:avLst>
+              <a:gd name="adj" fmla="val 4000"/>
+            </a:avLst>
+          </a:prstGeom>
+          <a:solidFill>
+            <a:srgbClr val="141E3C"/>
+          </a:solidFill>
+          <a:ln/>
+          <a:effectLst>
+            <a:outerShdw sx="100000" sy="100000" kx="0" ky="0" algn="bl" rotWithShape="0" blurRad="88900" dist="25400" dir="2700000">
+              <a:srgbClr val="000000">
+                <a:alpha val="14000"/>
+              </a:srgbClr>
+            </a:outerShdw>
+          </a:effectLst>
+        </p:spPr>
+      </p:sp>
+      <p:sp>
+        <p:nvSpPr>
+          <p:cNvPr id="5" name="Shape 3"/>
+          <p:cNvSpPr/>
+          <p:nvPr/>
+        </p:nvSpPr>
+        <p:spPr>
+          <a:xfrm>
+            <a:off x="585216" y="1307592"/>
+            <a:ext cx="64008" cy="64008"/>
+          </a:xfrm>
+          <a:prstGeom prst="ellipse">
+            <a:avLst/>
+          </a:prstGeom>
+          <a:solidFill>
+            <a:srgbClr val="E8604C"/>
+          </a:solidFill>
+          <a:ln/>
+        </p:spPr>
+      </p:sp>
+      <p:sp>
+        <p:nvSpPr>
+          <p:cNvPr id="6" name="Shape 4"/>
+          <p:cNvSpPr/>
+          <p:nvPr/>
+        </p:nvSpPr>
+        <p:spPr>
+          <a:xfrm>
+            <a:off x="713232" y="1307592"/>
+            <a:ext cx="64008" cy="64008"/>
+          </a:xfrm>
+          <a:prstGeom prst="ellipse">
+            <a:avLst/>
+          </a:prstGeom>
+          <a:solidFill>
+            <a:srgbClr val="F2B233"/>
+          </a:solidFill>
+          <a:ln/>
+        </p:spPr>
+      </p:sp>
+      <p:sp>
+        <p:nvSpPr>
+          <p:cNvPr id="7" name="Shape 5"/>
+          <p:cNvSpPr/>
+          <p:nvPr/>
+        </p:nvSpPr>
+        <p:spPr>
+          <a:xfrm>
+            <a:off x="841248" y="1307592"/>
+            <a:ext cx="64008" cy="64008"/>
+          </a:xfrm>
+          <a:prstGeom prst="ellipse">
+            <a:avLst/>
+          </a:prstGeom>
+          <a:solidFill>
+            <a:srgbClr val="5BBB63"/>
+          </a:solidFill>
+          <a:ln/>
+        </p:spPr>
+      </p:sp>
+      <p:sp>
+        <p:nvSpPr>
+          <p:cNvPr id="8" name="Text 6"/>
+          <p:cNvSpPr/>
+          <p:nvPr/>
+        </p:nvSpPr>
+        <p:spPr>
+          <a:xfrm>
+            <a:off x="621792" y="1463040"/>
+            <a:ext cx="4334256" cy="1216152"/>
+          </a:xfrm>
+          <a:prstGeom prst="rect">
+            <a:avLst/>
+          </a:prstGeom>
+          <a:noFill/>
+          <a:ln/>
+        </p:spPr>
+        <p:txBody>
+          <a:bodyPr wrap="square" lIns="0" tIns="0" rIns="0" bIns="0" rtlCol="0" anchor="t"/>
+          <a:lstStyle/>
+          <a:p>
+            <a:pPr indent="0" marL="0">
+              <a:lnSpc>
+                <a:spcPct val="112000"/>
+              </a:lnSpc>
+              <a:buNone/>
+            </a:pPr>
+            <a:r>
+              <a:rPr lang="en-US" sz="930" dirty="0">
+                <a:solidFill>
+                  <a:srgbClr val="DCE7FA"/>
+                </a:solidFill>
+                <a:latin typeface="Courier New" pitchFamily="34" charset="0"/>
+                <a:ea typeface="Courier New" pitchFamily="34" charset="-122"/>
+                <a:cs typeface="Courier New" pitchFamily="34" charset="-120"/>
+              </a:rPr>
+              <a:t>df = pd.read_csv(path, sep=';', decimal=',')</a:t>
+            </a:r>
+            <a:endParaRPr lang="en-US" sz="930" dirty="0"/>
+          </a:p>
+          <a:p>
+            <a:pPr indent="0" marL="0">
+              <a:lnSpc>
+                <a:spcPct val="112000"/>
+              </a:lnSpc>
+              <a:buNone/>
+            </a:pPr>
+            <a:r>
+              <a:rPr lang="en-US" sz="930" dirty="0">
+                <a:solidFill>
+                  <a:srgbClr val="DCE7FA"/>
+                </a:solidFill>
+                <a:latin typeface="Courier New" pitchFamily="34" charset="0"/>
+                <a:ea typeface="Courier New" pitchFamily="34" charset="-122"/>
+                <a:cs typeface="Courier New" pitchFamily="34" charset="-120"/>
+              </a:rPr>
+              <a:t>df = df.dropna()   </a:t>
+            </a:r>
+            <a:pPr indent="0" marL="0">
+              <a:lnSpc>
+                <a:spcPct val="112000"/>
+              </a:lnSpc>
+              <a:buNone/>
+            </a:pPr>
+            <a:r>
+              <a:rPr lang="en-US" sz="930" dirty="0">
+                <a:solidFill>
+                  <a:srgbClr val="7C93C4"/>
+                </a:solidFill>
+                <a:latin typeface="Courier New" pitchFamily="34" charset="0"/>
+                <a:ea typeface="Courier New" pitchFamily="34" charset="-122"/>
+                <a:cs typeface="Courier New" pitchFamily="34" charset="-120"/>
+              </a:rPr>
+              <a:t># 114 lignes vides</a:t>
+            </a:r>
+            <a:endParaRPr lang="en-US" sz="930" dirty="0"/>
+          </a:p>
+          <a:p>
+            <a:pPr indent="0" marL="0">
+              <a:lnSpc>
+                <a:spcPct val="112000"/>
+              </a:lnSpc>
+              <a:buNone/>
+            </a:pPr>
+            <a:endParaRPr lang="en-US" sz="930" dirty="0"/>
+          </a:p>
+          <a:p>
+            <a:pPr indent="0" marL="0">
+              <a:lnSpc>
+                <a:spcPct val="112000"/>
+              </a:lnSpc>
+              <a:buNone/>
+            </a:pPr>
+            <a:r>
+              <a:rPr lang="en-US" sz="930" dirty="0">
+                <a:solidFill>
+                  <a:srgbClr val="FF9B8E"/>
+                </a:solidFill>
+                <a:latin typeface="Courier New" pitchFamily="34" charset="0"/>
+                <a:ea typeface="Courier New" pitchFamily="34" charset="-122"/>
+                <a:cs typeface="Courier New" pitchFamily="34" charset="-120"/>
+              </a:rPr>
+              <a:t># ...et il reste 16 701 manquants !</a:t>
+            </a:r>
+            <a:endParaRPr lang="en-US" sz="930" dirty="0"/>
+          </a:p>
+          <a:p>
+            <a:pPr indent="0" marL="0">
+              <a:lnSpc>
+                <a:spcPct val="112000"/>
+              </a:lnSpc>
+              <a:buNone/>
+            </a:pPr>
+            <a:r>
+              <a:rPr lang="en-US" sz="930" dirty="0">
+                <a:solidFill>
+                  <a:srgbClr val="FF9B8E"/>
+                </a:solidFill>
+                <a:latin typeface="Courier New" pitchFamily="34" charset="0"/>
+                <a:ea typeface="Courier New" pitchFamily="34" charset="-122"/>
+                <a:cs typeface="Courier New" pitchFamily="34" charset="-120"/>
+              </a:rPr>
+              <a:t># ils sont codes -200, pas NaN</a:t>
+            </a:r>
+            <a:endParaRPr lang="en-US" sz="930" dirty="0"/>
+          </a:p>
+        </p:txBody>
+      </p:sp>
+      <p:sp>
+        <p:nvSpPr>
+          <p:cNvPr id="9" name="Shape 7"/>
+          <p:cNvSpPr/>
+          <p:nvPr/>
+        </p:nvSpPr>
+        <p:spPr>
+          <a:xfrm>
+            <a:off x="457200" y="2971800"/>
+            <a:ext cx="4663440" cy="1828800"/>
+          </a:xfrm>
+          <a:prstGeom prst="roundRect">
+            <a:avLst>
+              <a:gd name="adj" fmla="val 3000"/>
+            </a:avLst>
+          </a:prstGeom>
+          <a:solidFill>
+            <a:srgbClr val="FFF6DD"/>
+          </a:solidFill>
+          <a:ln/>
+          <a:effectLst>
+            <a:outerShdw sx="100000" sy="100000" kx="0" ky="0" algn="bl" rotWithShape="0" blurRad="88900" dist="25400" dir="2700000">
+              <a:srgbClr val="000000">
+                <a:alpha val="14000"/>
+              </a:srgbClr>
+            </a:outerShdw>
+          </a:effectLst>
+        </p:spPr>
+      </p:sp>
+      <p:sp>
+        <p:nvSpPr>
+          <p:cNvPr id="10" name="Text 8"/>
+          <p:cNvSpPr/>
+          <p:nvPr/>
+        </p:nvSpPr>
+        <p:spPr>
+          <a:xfrm>
+            <a:off x="603504" y="3081528"/>
+            <a:ext cx="4370832" cy="274320"/>
+          </a:xfrm>
+          <a:prstGeom prst="rect">
+            <a:avLst/>
+          </a:prstGeom>
+          <a:noFill/>
+          <a:ln/>
+        </p:spPr>
+        <p:txBody>
+          <a:bodyPr wrap="square" lIns="0" tIns="0" rIns="0" bIns="0" rtlCol="0" anchor="ctr"/>
+          <a:lstStyle/>
+          <a:p>
+            <a:pPr indent="0" marL="0">
+              <a:buNone/>
+            </a:pPr>
+            <a:r>
+              <a:rPr lang="en-US" sz="1250" b="1" dirty="0">
+                <a:solidFill>
+                  <a:srgbClr val="1E2761"/>
+                </a:solidFill>
+                <a:latin typeface="Calibri" pitchFamily="34" charset="0"/>
+                <a:ea typeface="Calibri" pitchFamily="34" charset="-122"/>
+                <a:cs typeface="Calibri" pitchFamily="34" charset="-120"/>
+              </a:rPr>
+              <a:t>🔴 dropna() te donne une FAUSSE propreté</a:t>
+            </a:r>
+            <a:endParaRPr lang="en-US" sz="1250" dirty="0"/>
+          </a:p>
+        </p:txBody>
       </p:sp>
       <p:sp>
         <p:nvSpPr>
@@ -45025,8 +45934,8 @@
         </p:nvSpPr>
         <p:spPr>
           <a:xfrm>
-            <a:off x="4892040" y="3017520"/>
-            <a:ext cx="3520440" cy="640080"/>
+            <a:off x="603504" y="3374136"/>
+            <a:ext cx="4370832" cy="1316736"/>
           </a:xfrm>
           <a:prstGeom prst="rect">
             <a:avLst/>
@@ -45040,55 +45949,516 @@
           <a:p>
             <a:pPr indent="0" marL="0">
               <a:lnSpc>
-                <a:spcPct val="115000"/>
-              </a:lnSpc>
-              <a:buNone/>
-            </a:pPr>
-            <a:r>
-              <a:rPr lang="en-US" sz="1100" b="1" dirty="0">
-                <a:solidFill>
-                  <a:srgbClr val="02C39A"/>
-                </a:solidFill>
-                <a:latin typeface="Calibri" pitchFamily="34" charset="0"/>
-                <a:ea typeface="Calibri" pitchFamily="34" charset="-122"/>
-                <a:cs typeface="Calibri" pitchFamily="34" charset="-120"/>
-              </a:rPr>
-              <a:t>MODÈLES</a:t>
+                <a:spcPct val="106000"/>
+              </a:lnSpc>
+              <a:buNone/>
+            </a:pPr>
+            <a:r>
+              <a:rPr lang="en-US" sz="940" dirty="0">
+                <a:solidFill>
+                  <a:srgbClr val="2A3550"/>
+                </a:solidFill>
+                <a:latin typeface="Calibri" pitchFamily="34" charset="0"/>
+                <a:ea typeface="Calibri" pitchFamily="34" charset="-122"/>
+                <a:cs typeface="Calibri" pitchFamily="34" charset="-120"/>
+              </a:rPr>
+              <a:t>Dans ce dataset, une valeur manquante n'est pas un NaN : c'est un −200. dropna() cherche des NaN. Il ne voit RIEN.</a:t>
+            </a:r>
+            <a:endParaRPr lang="en-US" sz="1050" dirty="0"/>
+          </a:p>
+          <a:p>
+            <a:pPr indent="0" marL="0">
+              <a:lnSpc>
+                <a:spcPct val="106000"/>
+              </a:lnSpc>
+              <a:buNone/>
+            </a:pPr>
+            <a:r>
+              <a:rPr lang="en-US" sz="860" b="1" dirty="0">
+                <a:solidFill>
+                  <a:srgbClr val="1E2761"/>
+                </a:solidFill>
+                <a:latin typeface="Courier New" pitchFamily="34" charset="0"/>
+                <a:ea typeface="Courier New" pitchFamily="34" charset="-122"/>
+                <a:cs typeface="Courier New" pitchFamily="34" charset="-120"/>
+              </a:rPr>
+              <a:t>NMHC(GT) : 90,2 % de −200  ·  CO(GT) : 18 %</a:t>
+            </a:r>
+            <a:endParaRPr lang="en-US" sz="1050" dirty="0"/>
+          </a:p>
+          <a:p>
+            <a:pPr indent="0" marL="0">
+              <a:lnSpc>
+                <a:spcPct val="106000"/>
+              </a:lnSpc>
+              <a:buNone/>
+            </a:pPr>
+            <a:r>
+              <a:rPr lang="en-US" sz="940" b="1" dirty="0">
+                <a:solidFill>
+                  <a:srgbClr val="2A3550"/>
+                </a:solidFill>
+                <a:latin typeface="Calibri" pitchFamily="34" charset="0"/>
+                <a:ea typeface="Calibri" pitchFamily="34" charset="-122"/>
+                <a:cs typeface="Calibri" pitchFamily="34" charset="-120"/>
+              </a:rPr>
+              <a:t>Une concentration de gaz ne peut PAS être négative. Ton scaler serait faussé, ton modèle apprendrait que −200 est normal — et RIEN ne planterait.</a:t>
+            </a:r>
+            <a:endParaRPr lang="en-US" sz="1050" dirty="0"/>
+          </a:p>
+        </p:txBody>
+      </p:sp>
+      <p:sp>
+        <p:nvSpPr>
+          <p:cNvPr id="12" name="Shape 10"/>
+          <p:cNvSpPr/>
+          <p:nvPr/>
+        </p:nvSpPr>
+        <p:spPr>
+          <a:xfrm>
+            <a:off x="5303520" y="1188720"/>
+            <a:ext cx="3419856" cy="1463040"/>
+          </a:xfrm>
+          <a:prstGeom prst="roundRect">
+            <a:avLst>
+              <a:gd name="adj" fmla="val 3750"/>
+            </a:avLst>
+          </a:prstGeom>
+          <a:solidFill>
+            <a:srgbClr val="EEF4FE"/>
+          </a:solidFill>
+          <a:ln/>
+          <a:effectLst>
+            <a:outerShdw sx="100000" sy="100000" kx="0" ky="0" algn="bl" rotWithShape="0" blurRad="88900" dist="25400" dir="2700000">
+              <a:srgbClr val="000000">
+                <a:alpha val="14000"/>
+              </a:srgbClr>
+            </a:outerShdw>
+          </a:effectLst>
+        </p:spPr>
+      </p:sp>
+      <p:sp>
+        <p:nvSpPr>
+          <p:cNvPr id="13" name="Text 11"/>
+          <p:cNvSpPr/>
+          <p:nvPr/>
+        </p:nvSpPr>
+        <p:spPr>
+          <a:xfrm>
+            <a:off x="5449824" y="1298448"/>
+            <a:ext cx="3127248" cy="274320"/>
+          </a:xfrm>
+          <a:prstGeom prst="rect">
+            <a:avLst/>
+          </a:prstGeom>
+          <a:noFill/>
+          <a:ln/>
+        </p:spPr>
+        <p:txBody>
+          <a:bodyPr wrap="square" lIns="0" tIns="0" rIns="0" bIns="0" rtlCol="0" anchor="ctr"/>
+          <a:lstStyle/>
+          <a:p>
+            <a:pPr indent="0" marL="0">
+              <a:buNone/>
+            </a:pPr>
+            <a:r>
+              <a:rPr lang="en-US" sz="1250" b="1" dirty="0">
+                <a:solidFill>
+                  <a:srgbClr val="1E2761"/>
+                </a:solidFill>
+                <a:latin typeface="Calibri" pitchFamily="34" charset="0"/>
+                <a:ea typeface="Calibri" pitchFamily="34" charset="-122"/>
+                <a:cs typeface="Calibri" pitchFamily="34" charset="-120"/>
+              </a:rPr>
+              <a:t>🎭 Le fichier qui ment</a:t>
+            </a:r>
+            <a:endParaRPr lang="en-US" sz="1250" dirty="0"/>
+          </a:p>
+        </p:txBody>
+      </p:sp>
+      <p:sp>
+        <p:nvSpPr>
+          <p:cNvPr id="14" name="Text 12"/>
+          <p:cNvSpPr/>
+          <p:nvPr/>
+        </p:nvSpPr>
+        <p:spPr>
+          <a:xfrm>
+            <a:off x="5449824" y="1591056"/>
+            <a:ext cx="3127248" cy="950976"/>
+          </a:xfrm>
+          <a:prstGeom prst="rect">
+            <a:avLst/>
+          </a:prstGeom>
+          <a:noFill/>
+          <a:ln/>
+        </p:spPr>
+        <p:txBody>
+          <a:bodyPr wrap="square" lIns="0" tIns="0" rIns="0" bIns="0" rtlCol="0" anchor="t"/>
+          <a:lstStyle/>
+          <a:p>
+            <a:pPr indent="0" marL="0">
+              <a:lnSpc>
+                <a:spcPct val="106000"/>
+              </a:lnSpc>
+              <a:buNone/>
+            </a:pPr>
+            <a:r>
+              <a:rPr lang="en-US" sz="920" dirty="0">
+                <a:solidFill>
+                  <a:srgbClr val="2A3550"/>
+                </a:solidFill>
+                <a:latin typeface="Calibri" pitchFamily="34" charset="0"/>
+                <a:ea typeface="Calibri" pitchFamily="34" charset="-122"/>
+                <a:cs typeface="Calibri" pitchFamily="34" charset="-120"/>
+              </a:rPr>
+              <a:t>AirQuality.xls n'est PAS un Excel : ses premiers octets sont « Date;Tim ». C'est du texte brut, seule l'extension ment.</a:t>
+            </a:r>
+            <a:endParaRPr lang="en-US" sz="1050" dirty="0"/>
+          </a:p>
+          <a:p>
+            <a:pPr indent="0" marL="0">
+              <a:lnSpc>
+                <a:spcPct val="106000"/>
+              </a:lnSpc>
+              <a:buNone/>
+            </a:pPr>
+            <a:r>
+              <a:rPr lang="en-US" sz="920" b="1" dirty="0">
+                <a:solidFill>
+                  <a:srgbClr val="2A3550"/>
+                </a:solidFill>
+                <a:latin typeface="Calibri" pitchFamily="34" charset="0"/>
+                <a:ea typeface="Calibri" pitchFamily="34" charset="-122"/>
+                <a:cs typeface="Calibri" pitchFamily="34" charset="-120"/>
+              </a:rPr>
+              <a:t>→ read_csv, pas read_excel. Ne fais jamais confiance à une extension.</a:t>
+            </a:r>
+            <a:endParaRPr lang="en-US" sz="1050" dirty="0"/>
+          </a:p>
+        </p:txBody>
+      </p:sp>
+      <p:sp>
+        <p:nvSpPr>
+          <p:cNvPr id="15" name="Shape 13"/>
+          <p:cNvSpPr/>
+          <p:nvPr/>
+        </p:nvSpPr>
+        <p:spPr>
+          <a:xfrm>
+            <a:off x="5303520" y="2788920"/>
+            <a:ext cx="3419856" cy="1051560"/>
+          </a:xfrm>
+          <a:prstGeom prst="roundRect">
+            <a:avLst>
+              <a:gd name="adj" fmla="val 5217"/>
+            </a:avLst>
+          </a:prstGeom>
+          <a:solidFill>
+            <a:srgbClr val="E9FAF5"/>
+          </a:solidFill>
+          <a:ln/>
+          <a:effectLst>
+            <a:outerShdw sx="100000" sy="100000" kx="0" ky="0" algn="bl" rotWithShape="0" blurRad="88900" dist="25400" dir="2700000">
+              <a:srgbClr val="000000">
+                <a:alpha val="14000"/>
+              </a:srgbClr>
+            </a:outerShdw>
+          </a:effectLst>
+        </p:spPr>
+      </p:sp>
+      <p:sp>
+        <p:nvSpPr>
+          <p:cNvPr id="16" name="Text 14"/>
+          <p:cNvSpPr/>
+          <p:nvPr/>
+        </p:nvSpPr>
+        <p:spPr>
+          <a:xfrm>
+            <a:off x="5449824" y="2898648"/>
+            <a:ext cx="3127248" cy="274320"/>
+          </a:xfrm>
+          <a:prstGeom prst="rect">
+            <a:avLst/>
+          </a:prstGeom>
+          <a:noFill/>
+          <a:ln/>
+        </p:spPr>
+        <p:txBody>
+          <a:bodyPr wrap="square" lIns="0" tIns="0" rIns="0" bIns="0" rtlCol="0" anchor="ctr"/>
+          <a:lstStyle/>
+          <a:p>
+            <a:pPr indent="0" marL="0">
+              <a:buNone/>
+            </a:pPr>
+            <a:r>
+              <a:rPr lang="en-US" sz="1250" b="1" dirty="0">
+                <a:solidFill>
+                  <a:srgbClr val="1E2761"/>
+                </a:solidFill>
+                <a:latin typeface="Calibri" pitchFamily="34" charset="0"/>
+                <a:ea typeface="Calibri" pitchFamily="34" charset="-122"/>
+                <a:cs typeface="Calibri" pitchFamily="34" charset="-120"/>
+              </a:rPr>
+              <a:t>✅ La correction</a:t>
+            </a:r>
+            <a:endParaRPr lang="en-US" sz="1250" dirty="0"/>
+          </a:p>
+        </p:txBody>
+      </p:sp>
+      <p:sp>
+        <p:nvSpPr>
+          <p:cNvPr id="17" name="Text 15"/>
+          <p:cNvSpPr/>
+          <p:nvPr/>
+        </p:nvSpPr>
+        <p:spPr>
+          <a:xfrm>
+            <a:off x="5449824" y="3191256"/>
+            <a:ext cx="3127248" cy="539496"/>
+          </a:xfrm>
+          <a:prstGeom prst="rect">
+            <a:avLst/>
+          </a:prstGeom>
+          <a:noFill/>
+          <a:ln/>
+        </p:spPr>
+        <p:txBody>
+          <a:bodyPr wrap="square" lIns="0" tIns="0" rIns="0" bIns="0" rtlCol="0" anchor="t"/>
+          <a:lstStyle/>
+          <a:p>
+            <a:pPr indent="0" marL="0">
+              <a:lnSpc>
+                <a:spcPct val="106000"/>
+              </a:lnSpc>
+              <a:buNone/>
+            </a:pPr>
+            <a:r>
+              <a:rPr lang="en-US" sz="840" dirty="0">
+                <a:solidFill>
+                  <a:srgbClr val="1E2761"/>
+                </a:solidFill>
+                <a:latin typeface="Courier New" pitchFamily="34" charset="0"/>
+                <a:ea typeface="Courier New" pitchFamily="34" charset="-122"/>
+                <a:cs typeface="Courier New" pitchFamily="34" charset="-120"/>
+              </a:rPr>
+              <a:t>df.replace(-200, np.nan).dropna()</a:t>
+            </a:r>
+            <a:endParaRPr lang="en-US" sz="1050" dirty="0"/>
+          </a:p>
+          <a:p>
+            <a:pPr indent="0" marL="0">
+              <a:lnSpc>
+                <a:spcPct val="106000"/>
+              </a:lnSpc>
+              <a:buNone/>
+            </a:pPr>
+            <a:r>
+              <a:rPr lang="en-US" sz="900" dirty="0">
+                <a:solidFill>
+                  <a:srgbClr val="2A3550"/>
+                </a:solidFill>
+                <a:latin typeface="Calibri" pitchFamily="34" charset="0"/>
+                <a:ea typeface="Calibri" pitchFamily="34" charset="-122"/>
+                <a:cs typeface="Calibri" pitchFamily="34" charset="-120"/>
+              </a:rPr>
+              <a:t>+ drop de NMHC(GT) : 90 % de vide, sinon tu perds 90 % de tes lignes.</a:t>
+            </a:r>
+            <a:endParaRPr lang="en-US" sz="1050" dirty="0"/>
+          </a:p>
+        </p:txBody>
+      </p:sp>
+      <p:sp>
+        <p:nvSpPr>
+          <p:cNvPr id="18" name="Shape 16"/>
+          <p:cNvSpPr/>
+          <p:nvPr/>
+        </p:nvSpPr>
+        <p:spPr>
+          <a:xfrm>
+            <a:off x="5303520" y="3977640"/>
+            <a:ext cx="3419856" cy="822960"/>
+          </a:xfrm>
+          <a:prstGeom prst="roundRect">
+            <a:avLst>
+              <a:gd name="adj" fmla="val 6667"/>
+            </a:avLst>
+          </a:prstGeom>
+          <a:solidFill>
+            <a:srgbClr val="E9FAF5"/>
+          </a:solidFill>
+          <a:ln/>
+          <a:effectLst>
+            <a:outerShdw sx="100000" sy="100000" kx="0" ky="0" algn="bl" rotWithShape="0" blurRad="88900" dist="25400" dir="2700000">
+              <a:srgbClr val="000000">
+                <a:alpha val="14000"/>
+              </a:srgbClr>
+            </a:outerShdw>
+          </a:effectLst>
+        </p:spPr>
+      </p:sp>
+      <p:sp>
+        <p:nvSpPr>
+          <p:cNvPr id="19" name="Text 17"/>
+          <p:cNvSpPr/>
+          <p:nvPr/>
+        </p:nvSpPr>
+        <p:spPr>
+          <a:xfrm>
+            <a:off x="5449824" y="4087368"/>
+            <a:ext cx="3127248" cy="274320"/>
+          </a:xfrm>
+          <a:prstGeom prst="rect">
+            <a:avLst/>
+          </a:prstGeom>
+          <a:noFill/>
+          <a:ln/>
+        </p:spPr>
+        <p:txBody>
+          <a:bodyPr wrap="square" lIns="0" tIns="0" rIns="0" bIns="0" rtlCol="0" anchor="ctr"/>
+          <a:lstStyle/>
+          <a:p>
+            <a:pPr indent="0" marL="0">
+              <a:buNone/>
+            </a:pPr>
+            <a:r>
+              <a:rPr lang="en-US" sz="1250" b="1" dirty="0">
+                <a:solidFill>
+                  <a:srgbClr val="1E2761"/>
+                </a:solidFill>
+                <a:latin typeface="Calibri" pitchFamily="34" charset="0"/>
+                <a:ea typeface="Calibri" pitchFamily="34" charset="-122"/>
+                <a:cs typeface="Calibri" pitchFamily="34" charset="-120"/>
+              </a:rPr>
+              <a:t>📌 Le réflexe</a:t>
+            </a:r>
+            <a:endParaRPr lang="en-US" sz="1250" dirty="0"/>
+          </a:p>
+        </p:txBody>
+      </p:sp>
+      <p:sp>
+        <p:nvSpPr>
+          <p:cNvPr id="20" name="Text 18"/>
+          <p:cNvSpPr/>
+          <p:nvPr/>
+        </p:nvSpPr>
+        <p:spPr>
+          <a:xfrm>
+            <a:off x="5449824" y="4379976"/>
+            <a:ext cx="3127248" cy="310896"/>
+          </a:xfrm>
+          <a:prstGeom prst="rect">
+            <a:avLst/>
+          </a:prstGeom>
+          <a:noFill/>
+          <a:ln/>
+        </p:spPr>
+        <p:txBody>
+          <a:bodyPr wrap="square" lIns="0" tIns="0" rIns="0" bIns="0" rtlCol="0" anchor="t"/>
+          <a:lstStyle/>
+          <a:p>
+            <a:pPr indent="0" marL="0">
+              <a:lnSpc>
+                <a:spcPct val="106000"/>
+              </a:lnSpc>
+              <a:buNone/>
+            </a:pPr>
+            <a:r>
+              <a:rPr lang="en-US" sz="900" b="1" dirty="0">
+                <a:solidFill>
+                  <a:srgbClr val="2A3550"/>
+                </a:solidFill>
+                <a:latin typeface="Calibri" pitchFamily="34" charset="0"/>
+                <a:ea typeface="Calibri" pitchFamily="34" charset="-122"/>
+                <a:cs typeface="Calibri" pitchFamily="34" charset="-120"/>
+              </a:rPr>
+              <a:t>df.describe() juste après le chargement. Un min à −200 saute aux yeux.</a:t>
+            </a:r>
+            <a:endParaRPr lang="en-US" sz="1050" dirty="0"/>
+          </a:p>
+        </p:txBody>
+      </p:sp>
+    </p:spTree>
+  </p:cSld>
+  <p:clrMapOvr>
+    <a:masterClrMapping/>
+  </p:clrMapOvr>
+</p:sld>
+</file>
+
+<file path=ppt/slides/slide49.xml><?xml version="1.0" encoding="utf-8"?>
+<p:sld xmlns:a="http://schemas.openxmlformats.org/drawingml/2006/main" xmlns:r="http://schemas.openxmlformats.org/officeDocument/2006/relationships" xmlns:p="http://schemas.openxmlformats.org/presentationml/2006/main">
+  <p:cSld name="Slide 49">
+    <p:bg>
+      <p:bgPr>
+        <a:solidFill>
+          <a:srgbClr val="FFFFFF"/>
+        </a:solidFill>
+      </p:bgPr>
+    </p:bg>
+    <p:spTree>
+      <p:nvGrpSpPr>
+        <p:cNvPr id="1" name=""/>
+        <p:cNvGrpSpPr/>
+        <p:nvPr/>
+      </p:nvGrpSpPr>
+      <p:grpSpPr>
+        <a:xfrm>
+          <a:off x="0" y="0"/>
+          <a:ext cx="0" cy="0"/>
+          <a:chOff x="0" y="0"/>
+          <a:chExt cx="0" cy="0"/>
+        </a:xfrm>
+      </p:grpSpPr>
+      <p:sp>
+        <p:nvSpPr>
+          <p:cNvPr id="2" name="Text 0"/>
+          <p:cNvSpPr/>
+          <p:nvPr/>
+        </p:nvSpPr>
+        <p:spPr>
+          <a:xfrm>
+            <a:off x="457200" y="201168"/>
+            <a:ext cx="8229600" cy="256032"/>
+          </a:xfrm>
+          <a:prstGeom prst="rect">
+            <a:avLst/>
+          </a:prstGeom>
+          <a:noFill/>
+          <a:ln/>
+        </p:spPr>
+        <p:txBody>
+          <a:bodyPr wrap="square" lIns="0" tIns="0" rIns="0" bIns="0" rtlCol="0" anchor="ctr"/>
+          <a:lstStyle/>
+          <a:p>
+            <a:pPr indent="0" marL="0">
+              <a:buNone/>
+            </a:pPr>
+            <a:r>
+              <a:rPr lang="en-US" sz="1100" b="1" spc="200" kern="0" dirty="0">
+                <a:solidFill>
+                  <a:srgbClr val="D64550"/>
+                </a:solidFill>
+                <a:latin typeface="Calibri" pitchFamily="34" charset="0"/>
+                <a:ea typeface="Calibri" pitchFamily="34" charset="-122"/>
+                <a:cs typeface="Calibri" pitchFamily="34" charset="-120"/>
+              </a:rPr>
+              <a:t>DEEP_LEARNING · LE MUR DE LA HONTE, SAISON 2</a:t>
             </a:r>
             <a:endParaRPr lang="en-US" sz="1100" dirty="0"/>
           </a:p>
-          <a:p>
-            <a:pPr indent="0" marL="0">
-              <a:lnSpc>
-                <a:spcPct val="115000"/>
-              </a:lnSpc>
-              <a:buNone/>
-            </a:pPr>
-            <a:r>
-              <a:rPr lang="en-US" sz="1050" dirty="0">
-                <a:solidFill>
-                  <a:srgbClr val="CADCFC"/>
-                </a:solidFill>
-                <a:latin typeface="Calibri" pitchFamily="34" charset="0"/>
-                <a:ea typeface="Calibri" pitchFamily="34" charset="-122"/>
-                <a:cs typeface="Calibri" pitchFamily="34" charset="-120"/>
-              </a:rPr>
-              <a:t>KNN · NB · arbres · forêts · boosting · clustering</a:t>
-            </a:r>
-            <a:endParaRPr lang="en-US" sz="1100" dirty="0"/>
-          </a:p>
-        </p:txBody>
-      </p:sp>
-      <p:sp>
-        <p:nvSpPr>
-          <p:cNvPr id="12" name="Text 10"/>
-          <p:cNvSpPr/>
-          <p:nvPr/>
-        </p:nvSpPr>
-        <p:spPr>
-          <a:xfrm>
-            <a:off x="640080" y="4114800"/>
-            <a:ext cx="7863840" cy="640080"/>
+        </p:txBody>
+      </p:sp>
+      <p:sp>
+        <p:nvSpPr>
+          <p:cNvPr id="3" name="Text 1"/>
+          <p:cNvSpPr/>
+          <p:nvPr/>
+        </p:nvSpPr>
+        <p:spPr>
+          <a:xfrm>
+            <a:off x="457200" y="438912"/>
+            <a:ext cx="8229600" cy="566928"/>
           </a:xfrm>
           <a:prstGeom prst="rect">
             <a:avLst/>
@@ -45101,40 +46471,1030 @@
           <a:lstStyle/>
           <a:p>
             <a:pPr indent="0" marL="0">
-              <a:lnSpc>
-                <a:spcPct val="120000"/>
-              </a:lnSpc>
+              <a:buNone/>
+            </a:pPr>
+            <a:r>
+              <a:rPr lang="en-US" sz="2700" b="1" dirty="0">
+                <a:solidFill>
+                  <a:srgbClr val="1E2761"/>
+                </a:solidFill>
+                <a:latin typeface="Calibri" pitchFamily="34" charset="0"/>
+                <a:ea typeface="Calibri" pitchFamily="34" charset="-122"/>
+                <a:cs typeface="Calibri" pitchFamily="34" charset="-120"/>
+              </a:rPr>
+              <a:t>Les 6 pièges du Deep Learning 🏆</a:t>
+            </a:r>
+            <a:endParaRPr lang="en-US" sz="2700" dirty="0"/>
+          </a:p>
+        </p:txBody>
+      </p:sp>
+      <p:sp>
+        <p:nvSpPr>
+          <p:cNvPr id="4" name="Shape 2"/>
+          <p:cNvSpPr/>
+          <p:nvPr/>
+        </p:nvSpPr>
+        <p:spPr>
+          <a:xfrm>
+            <a:off x="457200" y="1188720"/>
+            <a:ext cx="4041648" cy="1060704"/>
+          </a:xfrm>
+          <a:prstGeom prst="roundRect">
+            <a:avLst>
+              <a:gd name="adj" fmla="val 5172"/>
+            </a:avLst>
+          </a:prstGeom>
+          <a:solidFill>
+            <a:srgbClr val="EEF4FE"/>
+          </a:solidFill>
+          <a:ln/>
+          <a:effectLst>
+            <a:outerShdw sx="100000" sy="100000" kx="0" ky="0" algn="bl" rotWithShape="0" blurRad="88900" dist="25400" dir="2700000">
+              <a:srgbClr val="000000">
+                <a:alpha val="14000"/>
+              </a:srgbClr>
+            </a:outerShdw>
+          </a:effectLst>
+        </p:spPr>
+      </p:sp>
+      <p:sp>
+        <p:nvSpPr>
+          <p:cNvPr id="5" name="Shape 3"/>
+          <p:cNvSpPr/>
+          <p:nvPr/>
+        </p:nvSpPr>
+        <p:spPr>
+          <a:xfrm>
+            <a:off x="566928" y="1554480"/>
+            <a:ext cx="329184" cy="329184"/>
+          </a:xfrm>
+          <a:prstGeom prst="ellipse">
+            <a:avLst/>
+          </a:prstGeom>
+          <a:solidFill>
+            <a:srgbClr val="D64550"/>
+          </a:solidFill>
+          <a:ln/>
+        </p:spPr>
+      </p:sp>
+      <p:sp>
+        <p:nvSpPr>
+          <p:cNvPr id="6" name="Text 4"/>
+          <p:cNvSpPr/>
+          <p:nvPr/>
+        </p:nvSpPr>
+        <p:spPr>
+          <a:xfrm>
+            <a:off x="566928" y="1545336"/>
+            <a:ext cx="329184" cy="329184"/>
+          </a:xfrm>
+          <a:prstGeom prst="rect">
+            <a:avLst/>
+          </a:prstGeom>
+          <a:noFill/>
+          <a:ln/>
+        </p:spPr>
+        <p:txBody>
+          <a:bodyPr wrap="square" lIns="0" tIns="0" rIns="0" bIns="0" rtlCol="0" anchor="ctr"/>
+          <a:lstStyle/>
+          <a:p>
+            <a:pPr algn="ctr" indent="0" marL="0">
+              <a:buNone/>
+            </a:pPr>
+            <a:r>
+              <a:rPr lang="en-US" sz="1300" b="1" dirty="0">
+                <a:solidFill>
+                  <a:srgbClr val="FFFFFF"/>
+                </a:solidFill>
+                <a:latin typeface="Calibri" pitchFamily="34" charset="0"/>
+                <a:ea typeface="Calibri" pitchFamily="34" charset="-122"/>
+                <a:cs typeface="Calibri" pitchFamily="34" charset="-120"/>
+              </a:rPr>
+              <a:t>1</a:t>
+            </a:r>
+            <a:endParaRPr lang="en-US" sz="1300" dirty="0"/>
+          </a:p>
+        </p:txBody>
+      </p:sp>
+      <p:sp>
+        <p:nvSpPr>
+          <p:cNvPr id="7" name="Text 5"/>
+          <p:cNvSpPr/>
+          <p:nvPr/>
+        </p:nvSpPr>
+        <p:spPr>
+          <a:xfrm>
+            <a:off x="1005840" y="1280160"/>
+            <a:ext cx="3401568" cy="914400"/>
+          </a:xfrm>
+          <a:prstGeom prst="rect">
+            <a:avLst/>
+          </a:prstGeom>
+          <a:noFill/>
+          <a:ln/>
+        </p:spPr>
+        <p:txBody>
+          <a:bodyPr wrap="square" lIns="0" tIns="0" rIns="0" bIns="0" rtlCol="0" anchor="t"/>
+          <a:lstStyle/>
+          <a:p>
+            <a:pPr indent="0" marL="0">
+              <a:lnSpc>
+                <a:spcPct val="105000"/>
+              </a:lnSpc>
+              <a:buNone/>
+            </a:pPr>
+            <a:r>
+              <a:rPr lang="en-US" sz="950" b="1" dirty="0">
+                <a:solidFill>
+                  <a:srgbClr val="1E2761"/>
+                </a:solidFill>
+                <a:latin typeface="Courier New" pitchFamily="34" charset="0"/>
+                <a:ea typeface="Courier New" pitchFamily="34" charset="-122"/>
+                <a:cs typeface="Courier New" pitchFamily="34" charset="-120"/>
+              </a:rPr>
+              <a:t>training_step sans return loss</a:t>
+            </a:r>
+            <a:endParaRPr lang="en-US" sz="950" dirty="0"/>
+          </a:p>
+          <a:p>
+            <a:pPr indent="0" marL="0">
+              <a:lnSpc>
+                <a:spcPct val="105000"/>
+              </a:lnSpc>
+              <a:buNone/>
+            </a:pPr>
+            <a:r>
+              <a:rPr lang="en-US" sz="900" dirty="0">
+                <a:solidFill>
+                  <a:srgbClr val="2A3550"/>
+                </a:solidFill>
+                <a:latin typeface="Calibri" pitchFamily="34" charset="0"/>
+                <a:ea typeface="Calibri" pitchFamily="34" charset="-122"/>
+                <a:cs typeface="Calibri" pitchFamily="34" charset="-120"/>
+              </a:rPr>
+              <a:t>Lightning n'a rien à propager → la perte reste PARFAITEMENT plate (S9_P3)</a:t>
+            </a:r>
+            <a:endParaRPr lang="en-US" sz="950" dirty="0"/>
+          </a:p>
+        </p:txBody>
+      </p:sp>
+      <p:sp>
+        <p:nvSpPr>
+          <p:cNvPr id="8" name="Shape 6"/>
+          <p:cNvSpPr/>
+          <p:nvPr/>
+        </p:nvSpPr>
+        <p:spPr>
+          <a:xfrm>
+            <a:off x="4681728" y="1188720"/>
+            <a:ext cx="4041648" cy="1060704"/>
+          </a:xfrm>
+          <a:prstGeom prst="roundRect">
+            <a:avLst>
+              <a:gd name="adj" fmla="val 5172"/>
+            </a:avLst>
+          </a:prstGeom>
+          <a:solidFill>
+            <a:srgbClr val="EEF4FE"/>
+          </a:solidFill>
+          <a:ln/>
+          <a:effectLst>
+            <a:outerShdw sx="100000" sy="100000" kx="0" ky="0" algn="bl" rotWithShape="0" blurRad="88900" dist="25400" dir="2700000">
+              <a:srgbClr val="000000">
+                <a:alpha val="14000"/>
+              </a:srgbClr>
+            </a:outerShdw>
+          </a:effectLst>
+        </p:spPr>
+      </p:sp>
+      <p:sp>
+        <p:nvSpPr>
+          <p:cNvPr id="9" name="Shape 7"/>
+          <p:cNvSpPr/>
+          <p:nvPr/>
+        </p:nvSpPr>
+        <p:spPr>
+          <a:xfrm>
+            <a:off x="4791456" y="1554480"/>
+            <a:ext cx="329184" cy="329184"/>
+          </a:xfrm>
+          <a:prstGeom prst="ellipse">
+            <a:avLst/>
+          </a:prstGeom>
+          <a:solidFill>
+            <a:srgbClr val="D64550"/>
+          </a:solidFill>
+          <a:ln/>
+        </p:spPr>
+      </p:sp>
+      <p:sp>
+        <p:nvSpPr>
+          <p:cNvPr id="10" name="Text 8"/>
+          <p:cNvSpPr/>
+          <p:nvPr/>
+        </p:nvSpPr>
+        <p:spPr>
+          <a:xfrm>
+            <a:off x="4791456" y="1545336"/>
+            <a:ext cx="329184" cy="329184"/>
+          </a:xfrm>
+          <a:prstGeom prst="rect">
+            <a:avLst/>
+          </a:prstGeom>
+          <a:noFill/>
+          <a:ln/>
+        </p:spPr>
+        <p:txBody>
+          <a:bodyPr wrap="square" lIns="0" tIns="0" rIns="0" bIns="0" rtlCol="0" anchor="ctr"/>
+          <a:lstStyle/>
+          <a:p>
+            <a:pPr algn="ctr" indent="0" marL="0">
+              <a:buNone/>
+            </a:pPr>
+            <a:r>
+              <a:rPr lang="en-US" sz="1300" b="1" dirty="0">
+                <a:solidFill>
+                  <a:srgbClr val="FFFFFF"/>
+                </a:solidFill>
+                <a:latin typeface="Calibri" pitchFamily="34" charset="0"/>
+                <a:ea typeface="Calibri" pitchFamily="34" charset="-122"/>
+                <a:cs typeface="Calibri" pitchFamily="34" charset="-120"/>
+              </a:rPr>
+              <a:t>2</a:t>
+            </a:r>
+            <a:endParaRPr lang="en-US" sz="1300" dirty="0"/>
+          </a:p>
+        </p:txBody>
+      </p:sp>
+      <p:sp>
+        <p:nvSpPr>
+          <p:cNvPr id="11" name="Text 9"/>
+          <p:cNvSpPr/>
+          <p:nvPr/>
+        </p:nvSpPr>
+        <p:spPr>
+          <a:xfrm>
+            <a:off x="5230368" y="1280160"/>
+            <a:ext cx="3401568" cy="914400"/>
+          </a:xfrm>
+          <a:prstGeom prst="rect">
+            <a:avLst/>
+          </a:prstGeom>
+          <a:noFill/>
+          <a:ln/>
+        </p:spPr>
+        <p:txBody>
+          <a:bodyPr wrap="square" lIns="0" tIns="0" rIns="0" bIns="0" rtlCol="0" anchor="t"/>
+          <a:lstStyle/>
+          <a:p>
+            <a:pPr indent="0" marL="0">
+              <a:lnSpc>
+                <a:spcPct val="105000"/>
+              </a:lnSpc>
+              <a:buNone/>
+            </a:pPr>
+            <a:r>
+              <a:rPr lang="en-US" sz="950" b="1" dirty="0">
+                <a:solidFill>
+                  <a:srgbClr val="1E2761"/>
+                </a:solidFill>
+                <a:latin typeface="Courier New" pitchFamily="34" charset="0"/>
+                <a:ea typeface="Courier New" pitchFamily="34" charset="-122"/>
+                <a:cs typeface="Courier New" pitchFamily="34" charset="-120"/>
+              </a:rPr>
+              <a:t>SGD(pure_model.parameters())</a:t>
+            </a:r>
+            <a:endParaRPr lang="en-US" sz="950" dirty="0"/>
+          </a:p>
+          <a:p>
+            <a:pPr indent="0" marL="0">
+              <a:lnSpc>
+                <a:spcPct val="105000"/>
+              </a:lnSpc>
+              <a:buNone/>
+            </a:pPr>
+            <a:r>
+              <a:rPr lang="en-US" sz="900" dirty="0">
+                <a:solidFill>
+                  <a:srgbClr val="2A3550"/>
+                </a:solidFill>
+                <a:latin typeface="Calibri" pitchFamily="34" charset="0"/>
+                <a:ea typeface="Calibri" pitchFamily="34" charset="-122"/>
+                <a:cs typeface="Calibri" pitchFamily="34" charset="-120"/>
+              </a:rPr>
+              <a:t>l'optimiseur met à jour un réseau que Lightning n'utilise pas (S9_P3)</a:t>
+            </a:r>
+            <a:endParaRPr lang="en-US" sz="950" dirty="0"/>
+          </a:p>
+        </p:txBody>
+      </p:sp>
+      <p:sp>
+        <p:nvSpPr>
+          <p:cNvPr id="12" name="Shape 10"/>
+          <p:cNvSpPr/>
+          <p:nvPr/>
+        </p:nvSpPr>
+        <p:spPr>
+          <a:xfrm>
+            <a:off x="457200" y="2359152"/>
+            <a:ext cx="4041648" cy="1060704"/>
+          </a:xfrm>
+          <a:prstGeom prst="roundRect">
+            <a:avLst>
+              <a:gd name="adj" fmla="val 5172"/>
+            </a:avLst>
+          </a:prstGeom>
+          <a:solidFill>
+            <a:srgbClr val="EEF4FE"/>
+          </a:solidFill>
+          <a:ln/>
+          <a:effectLst>
+            <a:outerShdw sx="100000" sy="100000" kx="0" ky="0" algn="bl" rotWithShape="0" blurRad="88900" dist="25400" dir="2700000">
+              <a:srgbClr val="000000">
+                <a:alpha val="14000"/>
+              </a:srgbClr>
+            </a:outerShdw>
+          </a:effectLst>
+        </p:spPr>
+      </p:sp>
+      <p:sp>
+        <p:nvSpPr>
+          <p:cNvPr id="13" name="Shape 11"/>
+          <p:cNvSpPr/>
+          <p:nvPr/>
+        </p:nvSpPr>
+        <p:spPr>
+          <a:xfrm>
+            <a:off x="566928" y="2724912"/>
+            <a:ext cx="329184" cy="329184"/>
+          </a:xfrm>
+          <a:prstGeom prst="ellipse">
+            <a:avLst/>
+          </a:prstGeom>
+          <a:solidFill>
+            <a:srgbClr val="D64550"/>
+          </a:solidFill>
+          <a:ln/>
+        </p:spPr>
+      </p:sp>
+      <p:sp>
+        <p:nvSpPr>
+          <p:cNvPr id="14" name="Text 12"/>
+          <p:cNvSpPr/>
+          <p:nvPr/>
+        </p:nvSpPr>
+        <p:spPr>
+          <a:xfrm>
+            <a:off x="566928" y="2715768"/>
+            <a:ext cx="329184" cy="329184"/>
+          </a:xfrm>
+          <a:prstGeom prst="rect">
+            <a:avLst/>
+          </a:prstGeom>
+          <a:noFill/>
+          <a:ln/>
+        </p:spPr>
+        <p:txBody>
+          <a:bodyPr wrap="square" lIns="0" tIns="0" rIns="0" bIns="0" rtlCol="0" anchor="ctr"/>
+          <a:lstStyle/>
+          <a:p>
+            <a:pPr algn="ctr" indent="0" marL="0">
+              <a:buNone/>
+            </a:pPr>
+            <a:r>
+              <a:rPr lang="en-US" sz="1300" b="1" dirty="0">
+                <a:solidFill>
+                  <a:srgbClr val="FFFFFF"/>
+                </a:solidFill>
+                <a:latin typeface="Calibri" pitchFamily="34" charset="0"/>
+                <a:ea typeface="Calibri" pitchFamily="34" charset="-122"/>
+                <a:cs typeface="Calibri" pitchFamily="34" charset="-120"/>
+              </a:rPr>
+              <a:t>3</a:t>
+            </a:r>
+            <a:endParaRPr lang="en-US" sz="1300" dirty="0"/>
+          </a:p>
+        </p:txBody>
+      </p:sp>
+      <p:sp>
+        <p:nvSpPr>
+          <p:cNvPr id="15" name="Text 13"/>
+          <p:cNvSpPr/>
+          <p:nvPr/>
+        </p:nvSpPr>
+        <p:spPr>
+          <a:xfrm>
+            <a:off x="1005840" y="2450592"/>
+            <a:ext cx="3401568" cy="914400"/>
+          </a:xfrm>
+          <a:prstGeom prst="rect">
+            <a:avLst/>
+          </a:prstGeom>
+          <a:noFill/>
+          <a:ln/>
+        </p:spPr>
+        <p:txBody>
+          <a:bodyPr wrap="square" lIns="0" tIns="0" rIns="0" bIns="0" rtlCol="0" anchor="t"/>
+          <a:lstStyle/>
+          <a:p>
+            <a:pPr indent="0" marL="0">
+              <a:lnSpc>
+                <a:spcPct val="105000"/>
+              </a:lnSpc>
+              <a:buNone/>
+            </a:pPr>
+            <a:r>
+              <a:rPr lang="en-US" sz="950" b="1" dirty="0">
+                <a:solidFill>
+                  <a:srgbClr val="1E2761"/>
+                </a:solidFill>
+                <a:latin typeface="Courier New" pitchFamily="34" charset="0"/>
+                <a:ea typeface="Courier New" pitchFamily="34" charset="-122"/>
+                <a:cs typeface="Courier New" pitchFamily="34" charset="-120"/>
+              </a:rPr>
+              <a:t>val_dataloaders=train_loader</a:t>
+            </a:r>
+            <a:endParaRPr lang="en-US" sz="950" dirty="0"/>
+          </a:p>
+          <a:p>
+            <a:pPr indent="0" marL="0">
+              <a:lnSpc>
+                <a:spcPct val="105000"/>
+              </a:lnSpc>
+              <a:buNone/>
+            </a:pPr>
+            <a:r>
+              <a:rPr lang="en-US" sz="900" dirty="0">
+                <a:solidFill>
+                  <a:srgbClr val="2A3550"/>
+                </a:solidFill>
+                <a:latin typeface="Calibri" pitchFamily="34" charset="0"/>
+                <a:ea typeface="Calibri" pitchFamily="34" charset="-122"/>
+                <a:cs typeface="Calibri" pitchFamily="34" charset="-120"/>
+              </a:rPr>
+              <a:t>tes 2 courbes sont la MÊME courbe → surapprentissage invisible (S9_P4)</a:t>
+            </a:r>
+            <a:endParaRPr lang="en-US" sz="950" dirty="0"/>
+          </a:p>
+        </p:txBody>
+      </p:sp>
+      <p:sp>
+        <p:nvSpPr>
+          <p:cNvPr id="16" name="Shape 14"/>
+          <p:cNvSpPr/>
+          <p:nvPr/>
+        </p:nvSpPr>
+        <p:spPr>
+          <a:xfrm>
+            <a:off x="4681728" y="2359152"/>
+            <a:ext cx="4041648" cy="1060704"/>
+          </a:xfrm>
+          <a:prstGeom prst="roundRect">
+            <a:avLst>
+              <a:gd name="adj" fmla="val 5172"/>
+            </a:avLst>
+          </a:prstGeom>
+          <a:solidFill>
+            <a:srgbClr val="EEF4FE"/>
+          </a:solidFill>
+          <a:ln/>
+          <a:effectLst>
+            <a:outerShdw sx="100000" sy="100000" kx="0" ky="0" algn="bl" rotWithShape="0" blurRad="88900" dist="25400" dir="2700000">
+              <a:srgbClr val="000000">
+                <a:alpha val="14000"/>
+              </a:srgbClr>
+            </a:outerShdw>
+          </a:effectLst>
+        </p:spPr>
+      </p:sp>
+      <p:sp>
+        <p:nvSpPr>
+          <p:cNvPr id="17" name="Shape 15"/>
+          <p:cNvSpPr/>
+          <p:nvPr/>
+        </p:nvSpPr>
+        <p:spPr>
+          <a:xfrm>
+            <a:off x="4791456" y="2724912"/>
+            <a:ext cx="329184" cy="329184"/>
+          </a:xfrm>
+          <a:prstGeom prst="ellipse">
+            <a:avLst/>
+          </a:prstGeom>
+          <a:solidFill>
+            <a:srgbClr val="D64550"/>
+          </a:solidFill>
+          <a:ln/>
+        </p:spPr>
+      </p:sp>
+      <p:sp>
+        <p:nvSpPr>
+          <p:cNvPr id="18" name="Text 16"/>
+          <p:cNvSpPr/>
+          <p:nvPr/>
+        </p:nvSpPr>
+        <p:spPr>
+          <a:xfrm>
+            <a:off x="4791456" y="2715768"/>
+            <a:ext cx="329184" cy="329184"/>
+          </a:xfrm>
+          <a:prstGeom prst="rect">
+            <a:avLst/>
+          </a:prstGeom>
+          <a:noFill/>
+          <a:ln/>
+        </p:spPr>
+        <p:txBody>
+          <a:bodyPr wrap="square" lIns="0" tIns="0" rIns="0" bIns="0" rtlCol="0" anchor="ctr"/>
+          <a:lstStyle/>
+          <a:p>
+            <a:pPr algn="ctr" indent="0" marL="0">
+              <a:buNone/>
+            </a:pPr>
+            <a:r>
+              <a:rPr lang="en-US" sz="1300" b="1" dirty="0">
+                <a:solidFill>
+                  <a:srgbClr val="FFFFFF"/>
+                </a:solidFill>
+                <a:latin typeface="Calibri" pitchFamily="34" charset="0"/>
+                <a:ea typeface="Calibri" pitchFamily="34" charset="-122"/>
+                <a:cs typeface="Calibri" pitchFamily="34" charset="-120"/>
+              </a:rPr>
+              <a:t>4</a:t>
+            </a:r>
+            <a:endParaRPr lang="en-US" sz="1300" dirty="0"/>
+          </a:p>
+        </p:txBody>
+      </p:sp>
+      <p:sp>
+        <p:nvSpPr>
+          <p:cNvPr id="19" name="Text 17"/>
+          <p:cNvSpPr/>
+          <p:nvPr/>
+        </p:nvSpPr>
+        <p:spPr>
+          <a:xfrm>
+            <a:off x="5230368" y="2450592"/>
+            <a:ext cx="3401568" cy="914400"/>
+          </a:xfrm>
+          <a:prstGeom prst="rect">
+            <a:avLst/>
+          </a:prstGeom>
+          <a:noFill/>
+          <a:ln/>
+        </p:spPr>
+        <p:txBody>
+          <a:bodyPr wrap="square" lIns="0" tIns="0" rIns="0" bIns="0" rtlCol="0" anchor="t"/>
+          <a:lstStyle/>
+          <a:p>
+            <a:pPr indent="0" marL="0">
+              <a:lnSpc>
+                <a:spcPct val="105000"/>
+              </a:lnSpc>
+              <a:buNone/>
+            </a:pPr>
+            <a:r>
+              <a:rPr lang="en-US" sz="950" b="1" dirty="0">
+                <a:solidFill>
+                  <a:srgbClr val="1E2761"/>
+                </a:solidFill>
+                <a:latin typeface="Courier New" pitchFamily="34" charset="0"/>
+                <a:ea typeface="Courier New" pitchFamily="34" charset="-122"/>
+                <a:cs typeface="Courier New" pitchFamily="34" charset="-120"/>
+              </a:rPr>
+              <a:t>r2_score(y_pred, y_true)</a:t>
+            </a:r>
+            <a:endParaRPr lang="en-US" sz="950" dirty="0"/>
+          </a:p>
+          <a:p>
+            <a:pPr indent="0" marL="0">
+              <a:lnSpc>
+                <a:spcPct val="105000"/>
+              </a:lnSpc>
+              <a:buNone/>
+            </a:pPr>
+            <a:r>
+              <a:rPr lang="en-US" sz="900" dirty="0">
+                <a:solidFill>
+                  <a:srgbClr val="2A3550"/>
+                </a:solidFill>
+                <a:latin typeface="Calibri" pitchFamily="34" charset="0"/>
+                <a:ea typeface="Calibri" pitchFamily="34" charset="-122"/>
+                <a:cs typeface="Calibri" pitchFamily="34" charset="-120"/>
+              </a:rPr>
+              <a:t>R² n'est PAS symétrique : 0.8233 vs 0.7735 · MAE/RMSE pardonnent, pas lui (S9_P4)</a:t>
+            </a:r>
+            <a:endParaRPr lang="en-US" sz="950" dirty="0"/>
+          </a:p>
+        </p:txBody>
+      </p:sp>
+      <p:sp>
+        <p:nvSpPr>
+          <p:cNvPr id="20" name="Shape 18"/>
+          <p:cNvSpPr/>
+          <p:nvPr/>
+        </p:nvSpPr>
+        <p:spPr>
+          <a:xfrm>
+            <a:off x="457200" y="3529584"/>
+            <a:ext cx="4041648" cy="1060704"/>
+          </a:xfrm>
+          <a:prstGeom prst="roundRect">
+            <a:avLst>
+              <a:gd name="adj" fmla="val 5172"/>
+            </a:avLst>
+          </a:prstGeom>
+          <a:solidFill>
+            <a:srgbClr val="EEF4FE"/>
+          </a:solidFill>
+          <a:ln/>
+          <a:effectLst>
+            <a:outerShdw sx="100000" sy="100000" kx="0" ky="0" algn="bl" rotWithShape="0" blurRad="88900" dist="25400" dir="2700000">
+              <a:srgbClr val="000000">
+                <a:alpha val="14000"/>
+              </a:srgbClr>
+            </a:outerShdw>
+          </a:effectLst>
+        </p:spPr>
+      </p:sp>
+      <p:sp>
+        <p:nvSpPr>
+          <p:cNvPr id="21" name="Shape 19"/>
+          <p:cNvSpPr/>
+          <p:nvPr/>
+        </p:nvSpPr>
+        <p:spPr>
+          <a:xfrm>
+            <a:off x="566928" y="3895344"/>
+            <a:ext cx="329184" cy="329184"/>
+          </a:xfrm>
+          <a:prstGeom prst="ellipse">
+            <a:avLst/>
+          </a:prstGeom>
+          <a:solidFill>
+            <a:srgbClr val="D64550"/>
+          </a:solidFill>
+          <a:ln/>
+        </p:spPr>
+      </p:sp>
+      <p:sp>
+        <p:nvSpPr>
+          <p:cNvPr id="22" name="Text 20"/>
+          <p:cNvSpPr/>
+          <p:nvPr/>
+        </p:nvSpPr>
+        <p:spPr>
+          <a:xfrm>
+            <a:off x="566928" y="3886200"/>
+            <a:ext cx="329184" cy="329184"/>
+          </a:xfrm>
+          <a:prstGeom prst="rect">
+            <a:avLst/>
+          </a:prstGeom>
+          <a:noFill/>
+          <a:ln/>
+        </p:spPr>
+        <p:txBody>
+          <a:bodyPr wrap="square" lIns="0" tIns="0" rIns="0" bIns="0" rtlCol="0" anchor="ctr"/>
+          <a:lstStyle/>
+          <a:p>
+            <a:pPr algn="ctr" indent="0" marL="0">
+              <a:buNone/>
+            </a:pPr>
+            <a:r>
+              <a:rPr lang="en-US" sz="1300" b="1" dirty="0">
+                <a:solidFill>
+                  <a:srgbClr val="FFFFFF"/>
+                </a:solidFill>
+                <a:latin typeface="Calibri" pitchFamily="34" charset="0"/>
+                <a:ea typeface="Calibri" pitchFamily="34" charset="-122"/>
+                <a:cs typeface="Calibri" pitchFamily="34" charset="-120"/>
+              </a:rPr>
+              <a:t>5</a:t>
+            </a:r>
+            <a:endParaRPr lang="en-US" sz="1300" dirty="0"/>
+          </a:p>
+        </p:txBody>
+      </p:sp>
+      <p:sp>
+        <p:nvSpPr>
+          <p:cNvPr id="23" name="Text 21"/>
+          <p:cNvSpPr/>
+          <p:nvPr/>
+        </p:nvSpPr>
+        <p:spPr>
+          <a:xfrm>
+            <a:off x="1005840" y="3621024"/>
+            <a:ext cx="3401568" cy="914400"/>
+          </a:xfrm>
+          <a:prstGeom prst="rect">
+            <a:avLst/>
+          </a:prstGeom>
+          <a:noFill/>
+          <a:ln/>
+        </p:spPr>
+        <p:txBody>
+          <a:bodyPr wrap="square" lIns="0" tIns="0" rIns="0" bIns="0" rtlCol="0" anchor="t"/>
+          <a:lstStyle/>
+          <a:p>
+            <a:pPr indent="0" marL="0">
+              <a:lnSpc>
+                <a:spcPct val="105000"/>
+              </a:lnSpc>
+              <a:buNone/>
+            </a:pPr>
+            <a:r>
+              <a:rPr lang="en-US" sz="950" b="1" dirty="0">
+                <a:solidFill>
+                  <a:srgbClr val="1E2761"/>
+                </a:solidFill>
+                <a:latin typeface="Courier New" pitchFamily="34" charset="0"/>
+                <a:ea typeface="Courier New" pitchFamily="34" charset="-122"/>
+                <a:cs typeface="Courier New" pitchFamily="34" charset="-120"/>
+              </a:rPr>
+              <a:t>fit_transform(X_val)</a:t>
+            </a:r>
+            <a:endParaRPr lang="en-US" sz="950" dirty="0"/>
+          </a:p>
+          <a:p>
+            <a:pPr indent="0" marL="0">
+              <a:lnSpc>
+                <a:spcPct val="105000"/>
+              </a:lnSpc>
+              <a:buNone/>
+            </a:pPr>
+            <a:r>
+              <a:rPr lang="en-US" sz="900" dirty="0">
+                <a:solidFill>
+                  <a:srgbClr val="2A3550"/>
+                </a:solidFill>
+                <a:latin typeface="Calibri" pitchFamily="34" charset="0"/>
+                <a:ea typeface="Calibri" pitchFamily="34" charset="-122"/>
+                <a:cs typeface="Calibri" pitchFamily="34" charset="-120"/>
+              </a:rPr>
+              <a:t>fuite de données + le modèle est évalué dans un autre repère (S9_P4)</a:t>
+            </a:r>
+            <a:endParaRPr lang="en-US" sz="950" dirty="0"/>
+          </a:p>
+        </p:txBody>
+      </p:sp>
+      <p:sp>
+        <p:nvSpPr>
+          <p:cNvPr id="24" name="Shape 22"/>
+          <p:cNvSpPr/>
+          <p:nvPr/>
+        </p:nvSpPr>
+        <p:spPr>
+          <a:xfrm>
+            <a:off x="4681728" y="3529584"/>
+            <a:ext cx="4041648" cy="1060704"/>
+          </a:xfrm>
+          <a:prstGeom prst="roundRect">
+            <a:avLst>
+              <a:gd name="adj" fmla="val 5172"/>
+            </a:avLst>
+          </a:prstGeom>
+          <a:solidFill>
+            <a:srgbClr val="EEF4FE"/>
+          </a:solidFill>
+          <a:ln/>
+          <a:effectLst>
+            <a:outerShdw sx="100000" sy="100000" kx="0" ky="0" algn="bl" rotWithShape="0" blurRad="88900" dist="25400" dir="2700000">
+              <a:srgbClr val="000000">
+                <a:alpha val="14000"/>
+              </a:srgbClr>
+            </a:outerShdw>
+          </a:effectLst>
+        </p:spPr>
+      </p:sp>
+      <p:sp>
+        <p:nvSpPr>
+          <p:cNvPr id="25" name="Shape 23"/>
+          <p:cNvSpPr/>
+          <p:nvPr/>
+        </p:nvSpPr>
+        <p:spPr>
+          <a:xfrm>
+            <a:off x="4791456" y="3895344"/>
+            <a:ext cx="329184" cy="329184"/>
+          </a:xfrm>
+          <a:prstGeom prst="ellipse">
+            <a:avLst/>
+          </a:prstGeom>
+          <a:solidFill>
+            <a:srgbClr val="D64550"/>
+          </a:solidFill>
+          <a:ln/>
+        </p:spPr>
+      </p:sp>
+      <p:sp>
+        <p:nvSpPr>
+          <p:cNvPr id="26" name="Text 24"/>
+          <p:cNvSpPr/>
+          <p:nvPr/>
+        </p:nvSpPr>
+        <p:spPr>
+          <a:xfrm>
+            <a:off x="4791456" y="3886200"/>
+            <a:ext cx="329184" cy="329184"/>
+          </a:xfrm>
+          <a:prstGeom prst="rect">
+            <a:avLst/>
+          </a:prstGeom>
+          <a:noFill/>
+          <a:ln/>
+        </p:spPr>
+        <p:txBody>
+          <a:bodyPr wrap="square" lIns="0" tIns="0" rIns="0" bIns="0" rtlCol="0" anchor="ctr"/>
+          <a:lstStyle/>
+          <a:p>
+            <a:pPr algn="ctr" indent="0" marL="0">
+              <a:buNone/>
+            </a:pPr>
+            <a:r>
+              <a:rPr lang="en-US" sz="1300" b="1" dirty="0">
+                <a:solidFill>
+                  <a:srgbClr val="FFFFFF"/>
+                </a:solidFill>
+                <a:latin typeface="Calibri" pitchFamily="34" charset="0"/>
+                <a:ea typeface="Calibri" pitchFamily="34" charset="-122"/>
+                <a:cs typeface="Calibri" pitchFamily="34" charset="-120"/>
+              </a:rPr>
+              <a:t>6</a:t>
+            </a:r>
+            <a:endParaRPr lang="en-US" sz="1300" dirty="0"/>
+          </a:p>
+        </p:txBody>
+      </p:sp>
+      <p:sp>
+        <p:nvSpPr>
+          <p:cNvPr id="27" name="Text 25"/>
+          <p:cNvSpPr/>
+          <p:nvPr/>
+        </p:nvSpPr>
+        <p:spPr>
+          <a:xfrm>
+            <a:off x="5230368" y="3621024"/>
+            <a:ext cx="3401568" cy="914400"/>
+          </a:xfrm>
+          <a:prstGeom prst="rect">
+            <a:avLst/>
+          </a:prstGeom>
+          <a:noFill/>
+          <a:ln/>
+        </p:spPr>
+        <p:txBody>
+          <a:bodyPr wrap="square" lIns="0" tIns="0" rIns="0" bIns="0" rtlCol="0" anchor="t"/>
+          <a:lstStyle/>
+          <a:p>
+            <a:pPr indent="0" marL="0">
+              <a:lnSpc>
+                <a:spcPct val="105000"/>
+              </a:lnSpc>
+              <a:buNone/>
+            </a:pPr>
+            <a:r>
+              <a:rPr lang="en-US" sz="950" b="1" dirty="0">
+                <a:solidFill>
+                  <a:srgbClr val="1E2761"/>
+                </a:solidFill>
+                <a:latin typeface="Courier New" pitchFamily="34" charset="0"/>
+                <a:ea typeface="Courier New" pitchFamily="34" charset="-122"/>
+                <a:cs typeface="Courier New" pitchFamily="34" charset="-120"/>
+              </a:rPr>
+              <a:t>dropna() sur des −200</a:t>
+            </a:r>
+            <a:endParaRPr lang="en-US" sz="950" dirty="0"/>
+          </a:p>
+          <a:p>
+            <a:pPr indent="0" marL="0">
+              <a:lnSpc>
+                <a:spcPct val="105000"/>
+              </a:lnSpc>
+              <a:buNone/>
+            </a:pPr>
+            <a:r>
+              <a:rPr lang="en-US" sz="900" dirty="0">
+                <a:solidFill>
+                  <a:srgbClr val="2A3550"/>
+                </a:solidFill>
+                <a:latin typeface="Calibri" pitchFamily="34" charset="0"/>
+                <a:ea typeface="Calibri" pitchFamily="34" charset="-122"/>
+                <a:cs typeface="Calibri" pitchFamily="34" charset="-120"/>
+              </a:rPr>
+              <a:t>16 701 manquants déguisés en nombres survivent au nettoyage (S9_P5)</a:t>
+            </a:r>
+            <a:endParaRPr lang="en-US" sz="950" dirty="0"/>
+          </a:p>
+        </p:txBody>
+      </p:sp>
+      <p:sp>
+        <p:nvSpPr>
+          <p:cNvPr id="28" name="Shape 26"/>
+          <p:cNvSpPr/>
+          <p:nvPr/>
+        </p:nvSpPr>
+        <p:spPr>
+          <a:xfrm>
+            <a:off x="457200" y="3840480"/>
+            <a:ext cx="8266176" cy="960120"/>
+          </a:xfrm>
+          <a:prstGeom prst="roundRect">
+            <a:avLst>
+              <a:gd name="adj" fmla="val 5714"/>
+            </a:avLst>
+          </a:prstGeom>
+          <a:solidFill>
+            <a:srgbClr val="FFF6DD"/>
+          </a:solidFill>
+          <a:ln/>
+          <a:effectLst>
+            <a:outerShdw sx="100000" sy="100000" kx="0" ky="0" algn="bl" rotWithShape="0" blurRad="88900" dist="25400" dir="2700000">
+              <a:srgbClr val="000000">
+                <a:alpha val="14000"/>
+              </a:srgbClr>
+            </a:outerShdw>
+          </a:effectLst>
+        </p:spPr>
+      </p:sp>
+      <p:sp>
+        <p:nvSpPr>
+          <p:cNvPr id="29" name="Text 27"/>
+          <p:cNvSpPr/>
+          <p:nvPr/>
+        </p:nvSpPr>
+        <p:spPr>
+          <a:xfrm>
+            <a:off x="603504" y="3950208"/>
+            <a:ext cx="7973568" cy="274320"/>
+          </a:xfrm>
+          <a:prstGeom prst="rect">
+            <a:avLst/>
+          </a:prstGeom>
+          <a:noFill/>
+          <a:ln/>
+        </p:spPr>
+        <p:txBody>
+          <a:bodyPr wrap="square" lIns="0" tIns="0" rIns="0" bIns="0" rtlCol="0" anchor="ctr"/>
+          <a:lstStyle/>
+          <a:p>
+            <a:pPr indent="0" marL="0">
               <a:buNone/>
             </a:pPr>
             <a:r>
               <a:rPr lang="en-US" sz="1250" b="1" dirty="0">
                 <a:solidFill>
-                  <a:srgbClr val="FFFFFF"/>
-                </a:solidFill>
-                <a:latin typeface="Calibri" pitchFamily="34" charset="0"/>
-                <a:ea typeface="Calibri" pitchFamily="34" charset="-122"/>
-                <a:cs typeface="Calibri" pitchFamily="34" charset="-120"/>
-              </a:rPr>
-              <a:t>La suite ? </a:t>
-            </a:r>
-            <a:pPr indent="0" marL="0">
-              <a:lnSpc>
-                <a:spcPct val="120000"/>
-              </a:lnSpc>
-              <a:buNone/>
-            </a:pPr>
-            <a:r>
-              <a:rPr lang="en-US" sz="1250" dirty="0">
-                <a:solidFill>
-                  <a:srgbClr val="CADCFC"/>
-                </a:solidFill>
-                <a:latin typeface="Calibri" pitchFamily="34" charset="0"/>
-                <a:ea typeface="Calibri" pitchFamily="34" charset="-122"/>
-                <a:cs typeface="Calibri" pitchFamily="34" charset="-120"/>
-              </a:rPr>
-              <a:t>Standardiser (StandardScaler) · valider (cross-validation systématique) · forêts aléatoires · et toujours : baseline d'abord, Restart &amp; Run All avant de rendre !</a:t>
+                  <a:srgbClr val="1E2761"/>
+                </a:solidFill>
+                <a:latin typeface="Calibri" pitchFamily="34" charset="0"/>
+                <a:ea typeface="Calibri" pitchFamily="34" charset="-122"/>
+                <a:cs typeface="Calibri" pitchFamily="34" charset="-120"/>
+              </a:rPr>
+              <a:t>Le point commun des 6</a:t>
             </a:r>
             <a:endParaRPr lang="en-US" sz="1250" dirty="0"/>
+          </a:p>
+        </p:txBody>
+      </p:sp>
+      <p:sp>
+        <p:nvSpPr>
+          <p:cNvPr id="30" name="Text 28"/>
+          <p:cNvSpPr/>
+          <p:nvPr/>
+        </p:nvSpPr>
+        <p:spPr>
+          <a:xfrm>
+            <a:off x="603504" y="4242816"/>
+            <a:ext cx="7973568" cy="448056"/>
+          </a:xfrm>
+          <a:prstGeom prst="rect">
+            <a:avLst/>
+          </a:prstGeom>
+          <a:noFill/>
+          <a:ln/>
+        </p:spPr>
+        <p:txBody>
+          <a:bodyPr wrap="square" lIns="0" tIns="0" rIns="0" bIns="0" rtlCol="0" anchor="t"/>
+          <a:lstStyle/>
+          <a:p>
+            <a:pPr indent="0" marL="0">
+              <a:lnSpc>
+                <a:spcPct val="106000"/>
+              </a:lnSpc>
+              <a:buNone/>
+            </a:pPr>
+            <a:r>
+              <a:rPr lang="en-US" sz="1000" b="1" dirty="0">
+                <a:solidFill>
+                  <a:srgbClr val="2A3550"/>
+                </a:solidFill>
+                <a:latin typeface="Calibri" pitchFamily="34" charset="0"/>
+                <a:ea typeface="Calibri" pitchFamily="34" charset="-122"/>
+                <a:cs typeface="Calibri" pitchFamily="34" charset="-120"/>
+              </a:rPr>
+              <a:t>AUCUN ne fait planter ton code. Ça tourne, ça affiche une barre de progression, ça sort un R² qui a l'air correct — et le résultat est faux. En deep learning, l'absence d'erreur ne prouve RIEN.</a:t>
+            </a:r>
+            <a:endParaRPr lang="en-US" sz="1050" dirty="0"/>
           </a:p>
         </p:txBody>
       </p:sp>
@@ -46747,6 +49107,1905 @@
 </p:sld>
 </file>
 
+<file path=ppt/slides/slide50.xml><?xml version="1.0" encoding="utf-8"?>
+<p:sld xmlns:a="http://schemas.openxmlformats.org/drawingml/2006/main" xmlns:r="http://schemas.openxmlformats.org/officeDocument/2006/relationships" xmlns:p="http://schemas.openxmlformats.org/presentationml/2006/main">
+  <p:cSld name="Slide 50">
+    <p:bg>
+      <p:bgPr>
+        <a:solidFill>
+          <a:srgbClr val="FFFFFF"/>
+        </a:solidFill>
+      </p:bgPr>
+    </p:bg>
+    <p:spTree>
+      <p:nvGrpSpPr>
+        <p:cNvPr id="1" name=""/>
+        <p:cNvGrpSpPr/>
+        <p:nvPr/>
+      </p:nvGrpSpPr>
+      <p:grpSpPr>
+        <a:xfrm>
+          <a:off x="0" y="0"/>
+          <a:ext cx="0" cy="0"/>
+          <a:chOff x="0" y="0"/>
+          <a:chExt cx="0" cy="0"/>
+        </a:xfrm>
+      </p:grpSpPr>
+      <p:sp>
+        <p:nvSpPr>
+          <p:cNvPr id="2" name="Text 0"/>
+          <p:cNvSpPr/>
+          <p:nvPr/>
+        </p:nvSpPr>
+        <p:spPr>
+          <a:xfrm>
+            <a:off x="457200" y="201168"/>
+            <a:ext cx="8229600" cy="256032"/>
+          </a:xfrm>
+          <a:prstGeom prst="rect">
+            <a:avLst/>
+          </a:prstGeom>
+          <a:noFill/>
+          <a:ln/>
+        </p:spPr>
+        <p:txBody>
+          <a:bodyPr wrap="square" lIns="0" tIns="0" rIns="0" bIns="0" rtlCol="0" anchor="ctr"/>
+          <a:lstStyle/>
+          <a:p>
+            <a:pPr indent="0" marL="0">
+              <a:buNone/>
+            </a:pPr>
+            <a:r>
+              <a:rPr lang="en-US" sz="1100" b="1" spc="200" kern="0" dirty="0">
+                <a:solidFill>
+                  <a:srgbClr val="017A61"/>
+                </a:solidFill>
+                <a:latin typeface="Calibri" pitchFamily="34" charset="0"/>
+                <a:ea typeface="Calibri" pitchFamily="34" charset="-122"/>
+                <a:cs typeface="Calibri" pitchFamily="34" charset="-120"/>
+              </a:rPr>
+              <a:t>LE MUR DE LA HONTE (ON A TOUS FAIT CES ERREURS)</a:t>
+            </a:r>
+            <a:endParaRPr lang="en-US" sz="1100" dirty="0"/>
+          </a:p>
+        </p:txBody>
+      </p:sp>
+      <p:sp>
+        <p:nvSpPr>
+          <p:cNvPr id="3" name="Text 1"/>
+          <p:cNvSpPr/>
+          <p:nvPr/>
+        </p:nvSpPr>
+        <p:spPr>
+          <a:xfrm>
+            <a:off x="457200" y="438912"/>
+            <a:ext cx="8229600" cy="566928"/>
+          </a:xfrm>
+          <a:prstGeom prst="rect">
+            <a:avLst/>
+          </a:prstGeom>
+          <a:noFill/>
+          <a:ln/>
+        </p:spPr>
+        <p:txBody>
+          <a:bodyPr wrap="square" lIns="0" tIns="0" rIns="0" bIns="0" rtlCol="0" anchor="ctr"/>
+          <a:lstStyle/>
+          <a:p>
+            <a:pPr indent="0" marL="0">
+              <a:buNone/>
+            </a:pPr>
+            <a:r>
+              <a:rPr lang="en-US" sz="2700" b="1" dirty="0">
+                <a:solidFill>
+                  <a:srgbClr val="1E2761"/>
+                </a:solidFill>
+                <a:latin typeface="Calibri" pitchFamily="34" charset="0"/>
+                <a:ea typeface="Calibri" pitchFamily="34" charset="-122"/>
+                <a:cs typeface="Calibri" pitchFamily="34" charset="-120"/>
+              </a:rPr>
+              <a:t>Les 8 pièges célèbres du cours 🏆</a:t>
+            </a:r>
+            <a:endParaRPr lang="en-US" sz="2700" dirty="0"/>
+          </a:p>
+        </p:txBody>
+      </p:sp>
+      <p:sp>
+        <p:nvSpPr>
+          <p:cNvPr id="4" name="Shape 2"/>
+          <p:cNvSpPr/>
+          <p:nvPr/>
+        </p:nvSpPr>
+        <p:spPr>
+          <a:xfrm>
+            <a:off x="457200" y="1188720"/>
+            <a:ext cx="4041648" cy="804672"/>
+          </a:xfrm>
+          <a:prstGeom prst="roundRect">
+            <a:avLst>
+              <a:gd name="adj" fmla="val 6818"/>
+            </a:avLst>
+          </a:prstGeom>
+          <a:solidFill>
+            <a:srgbClr val="EEF4FE"/>
+          </a:solidFill>
+          <a:ln/>
+          <a:effectLst>
+            <a:outerShdw sx="100000" sy="100000" kx="0" ky="0" algn="bl" rotWithShape="0" blurRad="88900" dist="25400" dir="2700000">
+              <a:srgbClr val="000000">
+                <a:alpha val="14000"/>
+              </a:srgbClr>
+            </a:outerShdw>
+          </a:effectLst>
+        </p:spPr>
+      </p:sp>
+      <p:sp>
+        <p:nvSpPr>
+          <p:cNvPr id="5" name="Shape 3"/>
+          <p:cNvSpPr/>
+          <p:nvPr/>
+        </p:nvSpPr>
+        <p:spPr>
+          <a:xfrm>
+            <a:off x="566928" y="1426464"/>
+            <a:ext cx="329184" cy="329184"/>
+          </a:xfrm>
+          <a:prstGeom prst="ellipse">
+            <a:avLst/>
+          </a:prstGeom>
+          <a:solidFill>
+            <a:srgbClr val="D64550"/>
+          </a:solidFill>
+          <a:ln/>
+        </p:spPr>
+      </p:sp>
+      <p:sp>
+        <p:nvSpPr>
+          <p:cNvPr id="6" name="Text 4"/>
+          <p:cNvSpPr/>
+          <p:nvPr/>
+        </p:nvSpPr>
+        <p:spPr>
+          <a:xfrm>
+            <a:off x="566928" y="1417320"/>
+            <a:ext cx="329184" cy="329184"/>
+          </a:xfrm>
+          <a:prstGeom prst="rect">
+            <a:avLst/>
+          </a:prstGeom>
+          <a:noFill/>
+          <a:ln/>
+        </p:spPr>
+        <p:txBody>
+          <a:bodyPr wrap="square" lIns="0" tIns="0" rIns="0" bIns="0" rtlCol="0" anchor="ctr"/>
+          <a:lstStyle/>
+          <a:p>
+            <a:pPr algn="ctr" indent="0" marL="0">
+              <a:buNone/>
+            </a:pPr>
+            <a:r>
+              <a:rPr lang="en-US" sz="1300" b="1" dirty="0">
+                <a:solidFill>
+                  <a:srgbClr val="FFFFFF"/>
+                </a:solidFill>
+                <a:latin typeface="Calibri" pitchFamily="34" charset="0"/>
+                <a:ea typeface="Calibri" pitchFamily="34" charset="-122"/>
+                <a:cs typeface="Calibri" pitchFamily="34" charset="-120"/>
+              </a:rPr>
+              <a:t>1</a:t>
+            </a:r>
+            <a:endParaRPr lang="en-US" sz="1300" dirty="0"/>
+          </a:p>
+        </p:txBody>
+      </p:sp>
+      <p:sp>
+        <p:nvSpPr>
+          <p:cNvPr id="7" name="Text 5"/>
+          <p:cNvSpPr/>
+          <p:nvPr/>
+        </p:nvSpPr>
+        <p:spPr>
+          <a:xfrm>
+            <a:off x="1005840" y="1261872"/>
+            <a:ext cx="3401568" cy="685800"/>
+          </a:xfrm>
+          <a:prstGeom prst="rect">
+            <a:avLst/>
+          </a:prstGeom>
+          <a:noFill/>
+          <a:ln/>
+        </p:spPr>
+        <p:txBody>
+          <a:bodyPr wrap="square" lIns="0" tIns="0" rIns="0" bIns="0" rtlCol="0" anchor="t"/>
+          <a:lstStyle/>
+          <a:p>
+            <a:pPr indent="0" marL="0">
+              <a:lnSpc>
+                <a:spcPct val="105000"/>
+              </a:lnSpc>
+              <a:buNone/>
+            </a:pPr>
+            <a:r>
+              <a:rPr lang="en-US" sz="950" b="1" dirty="0">
+                <a:solidFill>
+                  <a:srgbClr val="1E2761"/>
+                </a:solidFill>
+                <a:latin typeface="Courier New" pitchFamily="34" charset="0"/>
+                <a:ea typeface="Courier New" pitchFamily="34" charset="-122"/>
+                <a:cs typeface="Courier New" pitchFamily="34" charset="-120"/>
+              </a:rPr>
+              <a:t>fit(X_test, y_test)</a:t>
+            </a:r>
+            <a:endParaRPr lang="en-US" sz="950" dirty="0"/>
+          </a:p>
+          <a:p>
+            <a:pPr indent="0" marL="0">
+              <a:lnSpc>
+                <a:spcPct val="105000"/>
+              </a:lnSpc>
+              <a:buNone/>
+            </a:pPr>
+            <a:r>
+              <a:rPr lang="en-US" sz="900" dirty="0">
+                <a:solidFill>
+                  <a:srgbClr val="2A3550"/>
+                </a:solidFill>
+                <a:latin typeface="Calibri" pitchFamily="34" charset="0"/>
+                <a:ea typeface="Calibri" pitchFamily="34" charset="-122"/>
+                <a:cs typeface="Calibri" pitchFamily="34" charset="-120"/>
+              </a:rPr>
+              <a:t>entraîné sur le test = l'élève avec les corrigés (S2_P3)</a:t>
+            </a:r>
+            <a:endParaRPr lang="en-US" sz="950" dirty="0"/>
+          </a:p>
+        </p:txBody>
+      </p:sp>
+      <p:sp>
+        <p:nvSpPr>
+          <p:cNvPr id="8" name="Shape 6"/>
+          <p:cNvSpPr/>
+          <p:nvPr/>
+        </p:nvSpPr>
+        <p:spPr>
+          <a:xfrm>
+            <a:off x="4681728" y="1188720"/>
+            <a:ext cx="4041648" cy="804672"/>
+          </a:xfrm>
+          <a:prstGeom prst="roundRect">
+            <a:avLst>
+              <a:gd name="adj" fmla="val 6818"/>
+            </a:avLst>
+          </a:prstGeom>
+          <a:solidFill>
+            <a:srgbClr val="EEF4FE"/>
+          </a:solidFill>
+          <a:ln/>
+          <a:effectLst>
+            <a:outerShdw sx="100000" sy="100000" kx="0" ky="0" algn="bl" rotWithShape="0" blurRad="88900" dist="25400" dir="2700000">
+              <a:srgbClr val="000000">
+                <a:alpha val="14000"/>
+              </a:srgbClr>
+            </a:outerShdw>
+          </a:effectLst>
+        </p:spPr>
+      </p:sp>
+      <p:sp>
+        <p:nvSpPr>
+          <p:cNvPr id="9" name="Shape 7"/>
+          <p:cNvSpPr/>
+          <p:nvPr/>
+        </p:nvSpPr>
+        <p:spPr>
+          <a:xfrm>
+            <a:off x="4791456" y="1426464"/>
+            <a:ext cx="329184" cy="329184"/>
+          </a:xfrm>
+          <a:prstGeom prst="ellipse">
+            <a:avLst/>
+          </a:prstGeom>
+          <a:solidFill>
+            <a:srgbClr val="D64550"/>
+          </a:solidFill>
+          <a:ln/>
+        </p:spPr>
+      </p:sp>
+      <p:sp>
+        <p:nvSpPr>
+          <p:cNvPr id="10" name="Text 8"/>
+          <p:cNvSpPr/>
+          <p:nvPr/>
+        </p:nvSpPr>
+        <p:spPr>
+          <a:xfrm>
+            <a:off x="4791456" y="1417320"/>
+            <a:ext cx="329184" cy="329184"/>
+          </a:xfrm>
+          <a:prstGeom prst="rect">
+            <a:avLst/>
+          </a:prstGeom>
+          <a:noFill/>
+          <a:ln/>
+        </p:spPr>
+        <p:txBody>
+          <a:bodyPr wrap="square" lIns="0" tIns="0" rIns="0" bIns="0" rtlCol="0" anchor="ctr"/>
+          <a:lstStyle/>
+          <a:p>
+            <a:pPr algn="ctr" indent="0" marL="0">
+              <a:buNone/>
+            </a:pPr>
+            <a:r>
+              <a:rPr lang="en-US" sz="1300" b="1" dirty="0">
+                <a:solidFill>
+                  <a:srgbClr val="FFFFFF"/>
+                </a:solidFill>
+                <a:latin typeface="Calibri" pitchFamily="34" charset="0"/>
+                <a:ea typeface="Calibri" pitchFamily="34" charset="-122"/>
+                <a:cs typeface="Calibri" pitchFamily="34" charset="-120"/>
+              </a:rPr>
+              <a:t>2</a:t>
+            </a:r>
+            <a:endParaRPr lang="en-US" sz="1300" dirty="0"/>
+          </a:p>
+        </p:txBody>
+      </p:sp>
+      <p:sp>
+        <p:nvSpPr>
+          <p:cNvPr id="11" name="Text 9"/>
+          <p:cNvSpPr/>
+          <p:nvPr/>
+        </p:nvSpPr>
+        <p:spPr>
+          <a:xfrm>
+            <a:off x="5230368" y="1261872"/>
+            <a:ext cx="3401568" cy="685800"/>
+          </a:xfrm>
+          <a:prstGeom prst="rect">
+            <a:avLst/>
+          </a:prstGeom>
+          <a:noFill/>
+          <a:ln/>
+        </p:spPr>
+        <p:txBody>
+          <a:bodyPr wrap="square" lIns="0" tIns="0" rIns="0" bIns="0" rtlCol="0" anchor="t"/>
+          <a:lstStyle/>
+          <a:p>
+            <a:pPr indent="0" marL="0">
+              <a:lnSpc>
+                <a:spcPct val="105000"/>
+              </a:lnSpc>
+              <a:buNone/>
+            </a:pPr>
+            <a:r>
+              <a:rPr lang="en-US" sz="950" b="1" dirty="0">
+                <a:solidFill>
+                  <a:srgbClr val="1E2761"/>
+                </a:solidFill>
+                <a:latin typeface="Courier New" pitchFamily="34" charset="0"/>
+                <a:ea typeface="Courier New" pitchFamily="34" charset="-122"/>
+                <a:cs typeface="Courier New" pitchFamily="34" charset="-120"/>
+              </a:rPr>
+              <a:t>classification_report(y_pred, y_test)</a:t>
+            </a:r>
+            <a:endParaRPr lang="en-US" sz="950" dirty="0"/>
+          </a:p>
+          <a:p>
+            <a:pPr indent="0" marL="0">
+              <a:lnSpc>
+                <a:spcPct val="105000"/>
+              </a:lnSpc>
+              <a:buNone/>
+            </a:pPr>
+            <a:r>
+              <a:rPr lang="en-US" sz="900" dirty="0">
+                <a:solidFill>
+                  <a:srgbClr val="2A3550"/>
+                </a:solidFill>
+                <a:latin typeface="Calibri" pitchFamily="34" charset="0"/>
+                <a:ea typeface="Calibri" pitchFamily="34" charset="-122"/>
+                <a:cs typeface="Calibri" pitchFamily="34" charset="-120"/>
+              </a:rPr>
+              <a:t>ordre inversé → précision et rappel ÉCHANGÉS (S3)</a:t>
+            </a:r>
+            <a:endParaRPr lang="en-US" sz="950" dirty="0"/>
+          </a:p>
+        </p:txBody>
+      </p:sp>
+      <p:sp>
+        <p:nvSpPr>
+          <p:cNvPr id="12" name="Shape 10"/>
+          <p:cNvSpPr/>
+          <p:nvPr/>
+        </p:nvSpPr>
+        <p:spPr>
+          <a:xfrm>
+            <a:off x="457200" y="2103120"/>
+            <a:ext cx="4041648" cy="804672"/>
+          </a:xfrm>
+          <a:prstGeom prst="roundRect">
+            <a:avLst>
+              <a:gd name="adj" fmla="val 6818"/>
+            </a:avLst>
+          </a:prstGeom>
+          <a:solidFill>
+            <a:srgbClr val="EEF4FE"/>
+          </a:solidFill>
+          <a:ln/>
+          <a:effectLst>
+            <a:outerShdw sx="100000" sy="100000" kx="0" ky="0" algn="bl" rotWithShape="0" blurRad="88900" dist="25400" dir="2700000">
+              <a:srgbClr val="000000">
+                <a:alpha val="14000"/>
+              </a:srgbClr>
+            </a:outerShdw>
+          </a:effectLst>
+        </p:spPr>
+      </p:sp>
+      <p:sp>
+        <p:nvSpPr>
+          <p:cNvPr id="13" name="Shape 11"/>
+          <p:cNvSpPr/>
+          <p:nvPr/>
+        </p:nvSpPr>
+        <p:spPr>
+          <a:xfrm>
+            <a:off x="566928" y="2340864"/>
+            <a:ext cx="329184" cy="329184"/>
+          </a:xfrm>
+          <a:prstGeom prst="ellipse">
+            <a:avLst/>
+          </a:prstGeom>
+          <a:solidFill>
+            <a:srgbClr val="D64550"/>
+          </a:solidFill>
+          <a:ln/>
+        </p:spPr>
+      </p:sp>
+      <p:sp>
+        <p:nvSpPr>
+          <p:cNvPr id="14" name="Text 12"/>
+          <p:cNvSpPr/>
+          <p:nvPr/>
+        </p:nvSpPr>
+        <p:spPr>
+          <a:xfrm>
+            <a:off x="566928" y="2331720"/>
+            <a:ext cx="329184" cy="329184"/>
+          </a:xfrm>
+          <a:prstGeom prst="rect">
+            <a:avLst/>
+          </a:prstGeom>
+          <a:noFill/>
+          <a:ln/>
+        </p:spPr>
+        <p:txBody>
+          <a:bodyPr wrap="square" lIns="0" tIns="0" rIns="0" bIns="0" rtlCol="0" anchor="ctr"/>
+          <a:lstStyle/>
+          <a:p>
+            <a:pPr algn="ctr" indent="0" marL="0">
+              <a:buNone/>
+            </a:pPr>
+            <a:r>
+              <a:rPr lang="en-US" sz="1300" b="1" dirty="0">
+                <a:solidFill>
+                  <a:srgbClr val="FFFFFF"/>
+                </a:solidFill>
+                <a:latin typeface="Calibri" pitchFamily="34" charset="0"/>
+                <a:ea typeface="Calibri" pitchFamily="34" charset="-122"/>
+                <a:cs typeface="Calibri" pitchFamily="34" charset="-120"/>
+              </a:rPr>
+              <a:t>3</a:t>
+            </a:r>
+            <a:endParaRPr lang="en-US" sz="1300" dirty="0"/>
+          </a:p>
+        </p:txBody>
+      </p:sp>
+      <p:sp>
+        <p:nvSpPr>
+          <p:cNvPr id="15" name="Text 13"/>
+          <p:cNvSpPr/>
+          <p:nvPr/>
+        </p:nvSpPr>
+        <p:spPr>
+          <a:xfrm>
+            <a:off x="1005840" y="2176272"/>
+            <a:ext cx="3401568" cy="685800"/>
+          </a:xfrm>
+          <a:prstGeom prst="rect">
+            <a:avLst/>
+          </a:prstGeom>
+          <a:noFill/>
+          <a:ln/>
+        </p:spPr>
+        <p:txBody>
+          <a:bodyPr wrap="square" lIns="0" tIns="0" rIns="0" bIns="0" rtlCol="0" anchor="t"/>
+          <a:lstStyle/>
+          <a:p>
+            <a:pPr indent="0" marL="0">
+              <a:lnSpc>
+                <a:spcPct val="105000"/>
+              </a:lnSpc>
+              <a:buNone/>
+            </a:pPr>
+            <a:r>
+              <a:rPr lang="en-US" sz="950" b="1" dirty="0">
+                <a:solidFill>
+                  <a:srgbClr val="1E2761"/>
+                </a:solidFill>
+                <a:latin typeface="Courier New" pitchFamily="34" charset="0"/>
+                <a:ea typeface="Courier New" pitchFamily="34" charset="-122"/>
+                <a:cs typeface="Courier New" pitchFamily="34" charset="-120"/>
+              </a:rPr>
+              <a:t>Le kernel qui « sauve »</a:t>
+            </a:r>
+            <a:endParaRPr lang="en-US" sz="950" dirty="0"/>
+          </a:p>
+          <a:p>
+            <a:pPr indent="0" marL="0">
+              <a:lnSpc>
+                <a:spcPct val="105000"/>
+              </a:lnSpc>
+              <a:buNone/>
+            </a:pPr>
+            <a:r>
+              <a:rPr lang="en-US" sz="900" dirty="0">
+                <a:solidFill>
+                  <a:srgbClr val="2A3550"/>
+                </a:solidFill>
+                <a:latin typeface="Calibri" pitchFamily="34" charset="0"/>
+                <a:ea typeface="Calibri" pitchFamily="34" charset="-122"/>
+                <a:cs typeface="Calibri" pitchFamily="34" charset="-120"/>
+              </a:rPr>
+              <a:t>imports supprimés mais encore en mémoire → Restart &amp; Run All ! (S3_P4)</a:t>
+            </a:r>
+            <a:endParaRPr lang="en-US" sz="950" dirty="0"/>
+          </a:p>
+        </p:txBody>
+      </p:sp>
+      <p:sp>
+        <p:nvSpPr>
+          <p:cNvPr id="16" name="Shape 14"/>
+          <p:cNvSpPr/>
+          <p:nvPr/>
+        </p:nvSpPr>
+        <p:spPr>
+          <a:xfrm>
+            <a:off x="4681728" y="2103120"/>
+            <a:ext cx="4041648" cy="804672"/>
+          </a:xfrm>
+          <a:prstGeom prst="roundRect">
+            <a:avLst>
+              <a:gd name="adj" fmla="val 6818"/>
+            </a:avLst>
+          </a:prstGeom>
+          <a:solidFill>
+            <a:srgbClr val="EEF4FE"/>
+          </a:solidFill>
+          <a:ln/>
+          <a:effectLst>
+            <a:outerShdw sx="100000" sy="100000" kx="0" ky="0" algn="bl" rotWithShape="0" blurRad="88900" dist="25400" dir="2700000">
+              <a:srgbClr val="000000">
+                <a:alpha val="14000"/>
+              </a:srgbClr>
+            </a:outerShdw>
+          </a:effectLst>
+        </p:spPr>
+      </p:sp>
+      <p:sp>
+        <p:nvSpPr>
+          <p:cNvPr id="17" name="Shape 15"/>
+          <p:cNvSpPr/>
+          <p:nvPr/>
+        </p:nvSpPr>
+        <p:spPr>
+          <a:xfrm>
+            <a:off x="4791456" y="2340864"/>
+            <a:ext cx="329184" cy="329184"/>
+          </a:xfrm>
+          <a:prstGeom prst="ellipse">
+            <a:avLst/>
+          </a:prstGeom>
+          <a:solidFill>
+            <a:srgbClr val="D64550"/>
+          </a:solidFill>
+          <a:ln/>
+        </p:spPr>
+      </p:sp>
+      <p:sp>
+        <p:nvSpPr>
+          <p:cNvPr id="18" name="Text 16"/>
+          <p:cNvSpPr/>
+          <p:nvPr/>
+        </p:nvSpPr>
+        <p:spPr>
+          <a:xfrm>
+            <a:off x="4791456" y="2331720"/>
+            <a:ext cx="329184" cy="329184"/>
+          </a:xfrm>
+          <a:prstGeom prst="rect">
+            <a:avLst/>
+          </a:prstGeom>
+          <a:noFill/>
+          <a:ln/>
+        </p:spPr>
+        <p:txBody>
+          <a:bodyPr wrap="square" lIns="0" tIns="0" rIns="0" bIns="0" rtlCol="0" anchor="ctr"/>
+          <a:lstStyle/>
+          <a:p>
+            <a:pPr algn="ctr" indent="0" marL="0">
+              <a:buNone/>
+            </a:pPr>
+            <a:r>
+              <a:rPr lang="en-US" sz="1300" b="1" dirty="0">
+                <a:solidFill>
+                  <a:srgbClr val="FFFFFF"/>
+                </a:solidFill>
+                <a:latin typeface="Calibri" pitchFamily="34" charset="0"/>
+                <a:ea typeface="Calibri" pitchFamily="34" charset="-122"/>
+                <a:cs typeface="Calibri" pitchFamily="34" charset="-120"/>
+              </a:rPr>
+              <a:t>4</a:t>
+            </a:r>
+            <a:endParaRPr lang="en-US" sz="1300" dirty="0"/>
+          </a:p>
+        </p:txBody>
+      </p:sp>
+      <p:sp>
+        <p:nvSpPr>
+          <p:cNvPr id="19" name="Text 17"/>
+          <p:cNvSpPr/>
+          <p:nvPr/>
+        </p:nvSpPr>
+        <p:spPr>
+          <a:xfrm>
+            <a:off x="5230368" y="2176272"/>
+            <a:ext cx="3401568" cy="685800"/>
+          </a:xfrm>
+          <a:prstGeom prst="rect">
+            <a:avLst/>
+          </a:prstGeom>
+          <a:noFill/>
+          <a:ln/>
+        </p:spPr>
+        <p:txBody>
+          <a:bodyPr wrap="square" lIns="0" tIns="0" rIns="0" bIns="0" rtlCol="0" anchor="t"/>
+          <a:lstStyle/>
+          <a:p>
+            <a:pPr indent="0" marL="0">
+              <a:lnSpc>
+                <a:spcPct val="105000"/>
+              </a:lnSpc>
+              <a:buNone/>
+            </a:pPr>
+            <a:r>
+              <a:rPr lang="en-US" sz="950" b="1" dirty="0">
+                <a:solidFill>
+                  <a:srgbClr val="1E2761"/>
+                </a:solidFill>
+                <a:latin typeface="Courier New" pitchFamily="34" charset="0"/>
+                <a:ea typeface="Courier New" pitchFamily="34" charset="-122"/>
+                <a:cs typeface="Courier New" pitchFamily="34" charset="-120"/>
+              </a:rPr>
+              <a:t>price / 1e6 exécuté 2 fois</a:t>
+            </a:r>
+            <a:endParaRPr lang="en-US" sz="950" dirty="0"/>
+          </a:p>
+          <a:p>
+            <a:pPr indent="0" marL="0">
+              <a:lnSpc>
+                <a:spcPct val="105000"/>
+              </a:lnSpc>
+              <a:buNone/>
+            </a:pPr>
+            <a:r>
+              <a:rPr lang="en-US" sz="900" dirty="0">
+                <a:solidFill>
+                  <a:srgbClr val="2A3550"/>
+                </a:solidFill>
+                <a:latin typeface="Calibri" pitchFamily="34" charset="0"/>
+                <a:ea typeface="Calibri" pitchFamily="34" charset="-122"/>
+                <a:cs typeface="Calibri" pitchFamily="34" charset="-120"/>
+              </a:rPr>
+              <a:t>cellule non-idempotente → tous les résultats faussés (S1_P2)</a:t>
+            </a:r>
+            <a:endParaRPr lang="en-US" sz="950" dirty="0"/>
+          </a:p>
+        </p:txBody>
+      </p:sp>
+      <p:sp>
+        <p:nvSpPr>
+          <p:cNvPr id="20" name="Shape 18"/>
+          <p:cNvSpPr/>
+          <p:nvPr/>
+        </p:nvSpPr>
+        <p:spPr>
+          <a:xfrm>
+            <a:off x="457200" y="3017520"/>
+            <a:ext cx="4041648" cy="804672"/>
+          </a:xfrm>
+          <a:prstGeom prst="roundRect">
+            <a:avLst>
+              <a:gd name="adj" fmla="val 6818"/>
+            </a:avLst>
+          </a:prstGeom>
+          <a:solidFill>
+            <a:srgbClr val="EEF4FE"/>
+          </a:solidFill>
+          <a:ln/>
+          <a:effectLst>
+            <a:outerShdw sx="100000" sy="100000" kx="0" ky="0" algn="bl" rotWithShape="0" blurRad="88900" dist="25400" dir="2700000">
+              <a:srgbClr val="000000">
+                <a:alpha val="14000"/>
+              </a:srgbClr>
+            </a:outerShdw>
+          </a:effectLst>
+        </p:spPr>
+      </p:sp>
+      <p:sp>
+        <p:nvSpPr>
+          <p:cNvPr id="21" name="Shape 19"/>
+          <p:cNvSpPr/>
+          <p:nvPr/>
+        </p:nvSpPr>
+        <p:spPr>
+          <a:xfrm>
+            <a:off x="566928" y="3255264"/>
+            <a:ext cx="329184" cy="329184"/>
+          </a:xfrm>
+          <a:prstGeom prst="ellipse">
+            <a:avLst/>
+          </a:prstGeom>
+          <a:solidFill>
+            <a:srgbClr val="D64550"/>
+          </a:solidFill>
+          <a:ln/>
+        </p:spPr>
+      </p:sp>
+      <p:sp>
+        <p:nvSpPr>
+          <p:cNvPr id="22" name="Text 20"/>
+          <p:cNvSpPr/>
+          <p:nvPr/>
+        </p:nvSpPr>
+        <p:spPr>
+          <a:xfrm>
+            <a:off x="566928" y="3246120"/>
+            <a:ext cx="329184" cy="329184"/>
+          </a:xfrm>
+          <a:prstGeom prst="rect">
+            <a:avLst/>
+          </a:prstGeom>
+          <a:noFill/>
+          <a:ln/>
+        </p:spPr>
+        <p:txBody>
+          <a:bodyPr wrap="square" lIns="0" tIns="0" rIns="0" bIns="0" rtlCol="0" anchor="ctr"/>
+          <a:lstStyle/>
+          <a:p>
+            <a:pPr algn="ctr" indent="0" marL="0">
+              <a:buNone/>
+            </a:pPr>
+            <a:r>
+              <a:rPr lang="en-US" sz="1300" b="1" dirty="0">
+                <a:solidFill>
+                  <a:srgbClr val="FFFFFF"/>
+                </a:solidFill>
+                <a:latin typeface="Calibri" pitchFamily="34" charset="0"/>
+                <a:ea typeface="Calibri" pitchFamily="34" charset="-122"/>
+                <a:cs typeface="Calibri" pitchFamily="34" charset="-120"/>
+              </a:rPr>
+              <a:t>5</a:t>
+            </a:r>
+            <a:endParaRPr lang="en-US" sz="1300" dirty="0"/>
+          </a:p>
+        </p:txBody>
+      </p:sp>
+      <p:sp>
+        <p:nvSpPr>
+          <p:cNvPr id="23" name="Text 21"/>
+          <p:cNvSpPr/>
+          <p:nvPr/>
+        </p:nvSpPr>
+        <p:spPr>
+          <a:xfrm>
+            <a:off x="1005840" y="3090672"/>
+            <a:ext cx="3401568" cy="685800"/>
+          </a:xfrm>
+          <a:prstGeom prst="rect">
+            <a:avLst/>
+          </a:prstGeom>
+          <a:noFill/>
+          <a:ln/>
+        </p:spPr>
+        <p:txBody>
+          <a:bodyPr wrap="square" lIns="0" tIns="0" rIns="0" bIns="0" rtlCol="0" anchor="t"/>
+          <a:lstStyle/>
+          <a:p>
+            <a:pPr indent="0" marL="0">
+              <a:lnSpc>
+                <a:spcPct val="105000"/>
+              </a:lnSpc>
+              <a:buNone/>
+            </a:pPr>
+            <a:r>
+              <a:rPr lang="en-US" sz="950" b="1" dirty="0">
+                <a:solidFill>
+                  <a:srgbClr val="1E2761"/>
+                </a:solidFill>
+                <a:latin typeface="Courier New" pitchFamily="34" charset="0"/>
+                <a:ea typeface="Courier New" pitchFamily="34" charset="-122"/>
+                <a:cs typeface="Courier New" pitchFamily="34" charset="-120"/>
+              </a:rPr>
+              <a:t>b = a  sur une liste</a:t>
+            </a:r>
+            <a:endParaRPr lang="en-US" sz="950" dirty="0"/>
+          </a:p>
+          <a:p>
+            <a:pPr indent="0" marL="0">
+              <a:lnSpc>
+                <a:spcPct val="105000"/>
+              </a:lnSpc>
+              <a:buNone/>
+            </a:pPr>
+            <a:r>
+              <a:rPr lang="en-US" sz="900" dirty="0">
+                <a:solidFill>
+                  <a:srgbClr val="2A3550"/>
+                </a:solidFill>
+                <a:latin typeface="Calibri" pitchFamily="34" charset="0"/>
+                <a:ea typeface="Calibri" pitchFamily="34" charset="-122"/>
+                <a:cs typeface="Calibri" pitchFamily="34" charset="-120"/>
+              </a:rPr>
+              <a:t>pas une copie ! .copy() sinon modifications partagées (day2)</a:t>
+            </a:r>
+            <a:endParaRPr lang="en-US" sz="950" dirty="0"/>
+          </a:p>
+        </p:txBody>
+      </p:sp>
+      <p:sp>
+        <p:nvSpPr>
+          <p:cNvPr id="24" name="Shape 22"/>
+          <p:cNvSpPr/>
+          <p:nvPr/>
+        </p:nvSpPr>
+        <p:spPr>
+          <a:xfrm>
+            <a:off x="4681728" y="3017520"/>
+            <a:ext cx="4041648" cy="804672"/>
+          </a:xfrm>
+          <a:prstGeom prst="roundRect">
+            <a:avLst>
+              <a:gd name="adj" fmla="val 6818"/>
+            </a:avLst>
+          </a:prstGeom>
+          <a:solidFill>
+            <a:srgbClr val="EEF4FE"/>
+          </a:solidFill>
+          <a:ln/>
+          <a:effectLst>
+            <a:outerShdw sx="100000" sy="100000" kx="0" ky="0" algn="bl" rotWithShape="0" blurRad="88900" dist="25400" dir="2700000">
+              <a:srgbClr val="000000">
+                <a:alpha val="14000"/>
+              </a:srgbClr>
+            </a:outerShdw>
+          </a:effectLst>
+        </p:spPr>
+      </p:sp>
+      <p:sp>
+        <p:nvSpPr>
+          <p:cNvPr id="25" name="Shape 23"/>
+          <p:cNvSpPr/>
+          <p:nvPr/>
+        </p:nvSpPr>
+        <p:spPr>
+          <a:xfrm>
+            <a:off x="4791456" y="3255264"/>
+            <a:ext cx="329184" cy="329184"/>
+          </a:xfrm>
+          <a:prstGeom prst="ellipse">
+            <a:avLst/>
+          </a:prstGeom>
+          <a:solidFill>
+            <a:srgbClr val="D64550"/>
+          </a:solidFill>
+          <a:ln/>
+        </p:spPr>
+      </p:sp>
+      <p:sp>
+        <p:nvSpPr>
+          <p:cNvPr id="26" name="Text 24"/>
+          <p:cNvSpPr/>
+          <p:nvPr/>
+        </p:nvSpPr>
+        <p:spPr>
+          <a:xfrm>
+            <a:off x="4791456" y="3246120"/>
+            <a:ext cx="329184" cy="329184"/>
+          </a:xfrm>
+          <a:prstGeom prst="rect">
+            <a:avLst/>
+          </a:prstGeom>
+          <a:noFill/>
+          <a:ln/>
+        </p:spPr>
+        <p:txBody>
+          <a:bodyPr wrap="square" lIns="0" tIns="0" rIns="0" bIns="0" rtlCol="0" anchor="ctr"/>
+          <a:lstStyle/>
+          <a:p>
+            <a:pPr algn="ctr" indent="0" marL="0">
+              <a:buNone/>
+            </a:pPr>
+            <a:r>
+              <a:rPr lang="en-US" sz="1300" b="1" dirty="0">
+                <a:solidFill>
+                  <a:srgbClr val="FFFFFF"/>
+                </a:solidFill>
+                <a:latin typeface="Calibri" pitchFamily="34" charset="0"/>
+                <a:ea typeface="Calibri" pitchFamily="34" charset="-122"/>
+                <a:cs typeface="Calibri" pitchFamily="34" charset="-120"/>
+              </a:rPr>
+              <a:t>6</a:t>
+            </a:r>
+            <a:endParaRPr lang="en-US" sz="1300" dirty="0"/>
+          </a:p>
+        </p:txBody>
+      </p:sp>
+      <p:sp>
+        <p:nvSpPr>
+          <p:cNvPr id="27" name="Text 25"/>
+          <p:cNvSpPr/>
+          <p:nvPr/>
+        </p:nvSpPr>
+        <p:spPr>
+          <a:xfrm>
+            <a:off x="5230368" y="3090672"/>
+            <a:ext cx="3401568" cy="685800"/>
+          </a:xfrm>
+          <a:prstGeom prst="rect">
+            <a:avLst/>
+          </a:prstGeom>
+          <a:noFill/>
+          <a:ln/>
+        </p:spPr>
+        <p:txBody>
+          <a:bodyPr wrap="square" lIns="0" tIns="0" rIns="0" bIns="0" rtlCol="0" anchor="t"/>
+          <a:lstStyle/>
+          <a:p>
+            <a:pPr indent="0" marL="0">
+              <a:lnSpc>
+                <a:spcPct val="105000"/>
+              </a:lnSpc>
+              <a:buNone/>
+            </a:pPr>
+            <a:r>
+              <a:rPr lang="en-US" sz="950" b="1" dirty="0">
+                <a:solidFill>
+                  <a:srgbClr val="1E2761"/>
+                </a:solidFill>
+                <a:latin typeface="Courier New" pitchFamily="34" charset="0"/>
+                <a:ea typeface="Courier New" pitchFamily="34" charset="-122"/>
+                <a:cs typeface="Courier New" pitchFamily="34" charset="-120"/>
+              </a:rPr>
+              <a:t>hypot(a**2 + b**2)</a:t>
+            </a:r>
+            <a:endParaRPr lang="en-US" sz="950" dirty="0"/>
+          </a:p>
+          <a:p>
+            <a:pPr indent="0" marL="0">
+              <a:lnSpc>
+                <a:spcPct val="105000"/>
+              </a:lnSpc>
+              <a:buNone/>
+            </a:pPr>
+            <a:r>
+              <a:rPr lang="en-US" sz="900" dirty="0">
+                <a:solidFill>
+                  <a:srgbClr val="2A3550"/>
+                </a:solidFill>
+                <a:latin typeface="Calibri" pitchFamily="34" charset="0"/>
+                <a:ea typeface="Calibri" pitchFamily="34" charset="-122"/>
+                <a:cs typeface="Calibri" pitchFamily="34" charset="-120"/>
+              </a:rPr>
+              <a:t>hypoténuse de 767 km — vérifier la SIGNATURE (fonction?) (day1)</a:t>
+            </a:r>
+            <a:endParaRPr lang="en-US" sz="950" dirty="0"/>
+          </a:p>
+        </p:txBody>
+      </p:sp>
+      <p:sp>
+        <p:nvSpPr>
+          <p:cNvPr id="28" name="Shape 26"/>
+          <p:cNvSpPr/>
+          <p:nvPr/>
+        </p:nvSpPr>
+        <p:spPr>
+          <a:xfrm>
+            <a:off x="457200" y="3931920"/>
+            <a:ext cx="4041648" cy="804672"/>
+          </a:xfrm>
+          <a:prstGeom prst="roundRect">
+            <a:avLst>
+              <a:gd name="adj" fmla="val 6818"/>
+            </a:avLst>
+          </a:prstGeom>
+          <a:solidFill>
+            <a:srgbClr val="EEF4FE"/>
+          </a:solidFill>
+          <a:ln/>
+          <a:effectLst>
+            <a:outerShdw sx="100000" sy="100000" kx="0" ky="0" algn="bl" rotWithShape="0" blurRad="88900" dist="25400" dir="2700000">
+              <a:srgbClr val="000000">
+                <a:alpha val="14000"/>
+              </a:srgbClr>
+            </a:outerShdw>
+          </a:effectLst>
+        </p:spPr>
+      </p:sp>
+      <p:sp>
+        <p:nvSpPr>
+          <p:cNvPr id="29" name="Shape 27"/>
+          <p:cNvSpPr/>
+          <p:nvPr/>
+        </p:nvSpPr>
+        <p:spPr>
+          <a:xfrm>
+            <a:off x="566928" y="4169664"/>
+            <a:ext cx="329184" cy="329184"/>
+          </a:xfrm>
+          <a:prstGeom prst="ellipse">
+            <a:avLst/>
+          </a:prstGeom>
+          <a:solidFill>
+            <a:srgbClr val="D64550"/>
+          </a:solidFill>
+          <a:ln/>
+        </p:spPr>
+      </p:sp>
+      <p:sp>
+        <p:nvSpPr>
+          <p:cNvPr id="30" name="Text 28"/>
+          <p:cNvSpPr/>
+          <p:nvPr/>
+        </p:nvSpPr>
+        <p:spPr>
+          <a:xfrm>
+            <a:off x="566928" y="4160520"/>
+            <a:ext cx="329184" cy="329184"/>
+          </a:xfrm>
+          <a:prstGeom prst="rect">
+            <a:avLst/>
+          </a:prstGeom>
+          <a:noFill/>
+          <a:ln/>
+        </p:spPr>
+        <p:txBody>
+          <a:bodyPr wrap="square" lIns="0" tIns="0" rIns="0" bIns="0" rtlCol="0" anchor="ctr"/>
+          <a:lstStyle/>
+          <a:p>
+            <a:pPr algn="ctr" indent="0" marL="0">
+              <a:buNone/>
+            </a:pPr>
+            <a:r>
+              <a:rPr lang="en-US" sz="1300" b="1" dirty="0">
+                <a:solidFill>
+                  <a:srgbClr val="FFFFFF"/>
+                </a:solidFill>
+                <a:latin typeface="Calibri" pitchFamily="34" charset="0"/>
+                <a:ea typeface="Calibri" pitchFamily="34" charset="-122"/>
+                <a:cs typeface="Calibri" pitchFamily="34" charset="-120"/>
+              </a:rPr>
+              <a:t>7</a:t>
+            </a:r>
+            <a:endParaRPr lang="en-US" sz="1300" dirty="0"/>
+          </a:p>
+        </p:txBody>
+      </p:sp>
+      <p:sp>
+        <p:nvSpPr>
+          <p:cNvPr id="31" name="Text 29"/>
+          <p:cNvSpPr/>
+          <p:nvPr/>
+        </p:nvSpPr>
+        <p:spPr>
+          <a:xfrm>
+            <a:off x="1005840" y="4005072"/>
+            <a:ext cx="3401568" cy="685800"/>
+          </a:xfrm>
+          <a:prstGeom prst="rect">
+            <a:avLst/>
+          </a:prstGeom>
+          <a:noFill/>
+          <a:ln/>
+        </p:spPr>
+        <p:txBody>
+          <a:bodyPr wrap="square" lIns="0" tIns="0" rIns="0" bIns="0" rtlCol="0" anchor="t"/>
+          <a:lstStyle/>
+          <a:p>
+            <a:pPr indent="0" marL="0">
+              <a:lnSpc>
+                <a:spcPct val="105000"/>
+              </a:lnSpc>
+              <a:buNone/>
+            </a:pPr>
+            <a:r>
+              <a:rPr lang="en-US" sz="950" b="1" dirty="0">
+                <a:solidFill>
+                  <a:srgbClr val="1E2761"/>
+                </a:solidFill>
+                <a:latin typeface="Courier New" pitchFamily="34" charset="0"/>
+                <a:ea typeface="Courier New" pitchFamily="34" charset="-122"/>
+                <a:cs typeface="Courier New" pitchFamily="34" charset="-120"/>
+              </a:rPr>
+              <a:t>Accuracy 84 % sur du 85/15</a:t>
+            </a:r>
+            <a:endParaRPr lang="en-US" sz="950" dirty="0"/>
+          </a:p>
+          <a:p>
+            <a:pPr indent="0" marL="0">
+              <a:lnSpc>
+                <a:spcPct val="105000"/>
+              </a:lnSpc>
+              <a:buNone/>
+            </a:pPr>
+            <a:r>
+              <a:rPr lang="en-US" sz="900" dirty="0">
+                <a:solidFill>
+                  <a:srgbClr val="2A3550"/>
+                </a:solidFill>
+                <a:latin typeface="Calibri" pitchFamily="34" charset="0"/>
+                <a:ea typeface="Calibri" pitchFamily="34" charset="-122"/>
+                <a:cs typeface="Calibri" pitchFamily="34" charset="-120"/>
+              </a:rPr>
+              <a:t>pire que l'idiot « toujours Deny » — baseline d'abord ! (S3_P1)</a:t>
+            </a:r>
+            <a:endParaRPr lang="en-US" sz="950" dirty="0"/>
+          </a:p>
+        </p:txBody>
+      </p:sp>
+      <p:sp>
+        <p:nvSpPr>
+          <p:cNvPr id="32" name="Shape 30"/>
+          <p:cNvSpPr/>
+          <p:nvPr/>
+        </p:nvSpPr>
+        <p:spPr>
+          <a:xfrm>
+            <a:off x="4681728" y="3931920"/>
+            <a:ext cx="4041648" cy="804672"/>
+          </a:xfrm>
+          <a:prstGeom prst="roundRect">
+            <a:avLst>
+              <a:gd name="adj" fmla="val 6818"/>
+            </a:avLst>
+          </a:prstGeom>
+          <a:solidFill>
+            <a:srgbClr val="EEF4FE"/>
+          </a:solidFill>
+          <a:ln/>
+          <a:effectLst>
+            <a:outerShdw sx="100000" sy="100000" kx="0" ky="0" algn="bl" rotWithShape="0" blurRad="88900" dist="25400" dir="2700000">
+              <a:srgbClr val="000000">
+                <a:alpha val="14000"/>
+              </a:srgbClr>
+            </a:outerShdw>
+          </a:effectLst>
+        </p:spPr>
+      </p:sp>
+      <p:sp>
+        <p:nvSpPr>
+          <p:cNvPr id="33" name="Shape 31"/>
+          <p:cNvSpPr/>
+          <p:nvPr/>
+        </p:nvSpPr>
+        <p:spPr>
+          <a:xfrm>
+            <a:off x="4791456" y="4169664"/>
+            <a:ext cx="329184" cy="329184"/>
+          </a:xfrm>
+          <a:prstGeom prst="ellipse">
+            <a:avLst/>
+          </a:prstGeom>
+          <a:solidFill>
+            <a:srgbClr val="D64550"/>
+          </a:solidFill>
+          <a:ln/>
+        </p:spPr>
+      </p:sp>
+      <p:sp>
+        <p:nvSpPr>
+          <p:cNvPr id="34" name="Text 32"/>
+          <p:cNvSpPr/>
+          <p:nvPr/>
+        </p:nvSpPr>
+        <p:spPr>
+          <a:xfrm>
+            <a:off x="4791456" y="4160520"/>
+            <a:ext cx="329184" cy="329184"/>
+          </a:xfrm>
+          <a:prstGeom prst="rect">
+            <a:avLst/>
+          </a:prstGeom>
+          <a:noFill/>
+          <a:ln/>
+        </p:spPr>
+        <p:txBody>
+          <a:bodyPr wrap="square" lIns="0" tIns="0" rIns="0" bIns="0" rtlCol="0" anchor="ctr"/>
+          <a:lstStyle/>
+          <a:p>
+            <a:pPr algn="ctr" indent="0" marL="0">
+              <a:buNone/>
+            </a:pPr>
+            <a:r>
+              <a:rPr lang="en-US" sz="1300" b="1" dirty="0">
+                <a:solidFill>
+                  <a:srgbClr val="FFFFFF"/>
+                </a:solidFill>
+                <a:latin typeface="Calibri" pitchFamily="34" charset="0"/>
+                <a:ea typeface="Calibri" pitchFamily="34" charset="-122"/>
+                <a:cs typeface="Calibri" pitchFamily="34" charset="-120"/>
+              </a:rPr>
+              <a:t>8</a:t>
+            </a:r>
+            <a:endParaRPr lang="en-US" sz="1300" dirty="0"/>
+          </a:p>
+        </p:txBody>
+      </p:sp>
+      <p:sp>
+        <p:nvSpPr>
+          <p:cNvPr id="35" name="Text 33"/>
+          <p:cNvSpPr/>
+          <p:nvPr/>
+        </p:nvSpPr>
+        <p:spPr>
+          <a:xfrm>
+            <a:off x="5230368" y="4005072"/>
+            <a:ext cx="3401568" cy="685800"/>
+          </a:xfrm>
+          <a:prstGeom prst="rect">
+            <a:avLst/>
+          </a:prstGeom>
+          <a:noFill/>
+          <a:ln/>
+        </p:spPr>
+        <p:txBody>
+          <a:bodyPr wrap="square" lIns="0" tIns="0" rIns="0" bIns="0" rtlCol="0" anchor="t"/>
+          <a:lstStyle/>
+          <a:p>
+            <a:pPr indent="0" marL="0">
+              <a:lnSpc>
+                <a:spcPct val="105000"/>
+              </a:lnSpc>
+              <a:buNone/>
+            </a:pPr>
+            <a:r>
+              <a:rPr lang="en-US" sz="950" b="1" dirty="0">
+                <a:solidFill>
+                  <a:srgbClr val="1E2761"/>
+                </a:solidFill>
+                <a:latin typeface="Courier New" pitchFamily="34" charset="0"/>
+                <a:ea typeface="Courier New" pitchFamily="34" charset="-122"/>
+                <a:cs typeface="Courier New" pitchFamily="34" charset="-120"/>
+              </a:rPr>
+              <a:t>idxmin() → indice, pas valeur</a:t>
+            </a:r>
+            <a:endParaRPr lang="en-US" sz="950" dirty="0"/>
+          </a:p>
+          <a:p>
+            <a:pPr indent="0" marL="0">
+              <a:lnSpc>
+                <a:spcPct val="105000"/>
+              </a:lnSpc>
+              <a:buNone/>
+            </a:pPr>
+            <a:r>
+              <a:rPr lang="en-US" sz="900" dirty="0">
+                <a:solidFill>
+                  <a:srgbClr val="2A3550"/>
+                </a:solidFill>
+                <a:latin typeface="Calibri" pitchFamily="34" charset="0"/>
+                <a:ea typeface="Calibri" pitchFamily="34" charset="-122"/>
+                <a:cs typeface="Calibri" pitchFamily="34" charset="-120"/>
+              </a:rPr>
+              <a:t>ligne 2 = k 3 : le meilleur k n'était pas 2 ! (S4_P1)</a:t>
+            </a:r>
+            <a:endParaRPr lang="en-US" sz="950" dirty="0"/>
+          </a:p>
+        </p:txBody>
+      </p:sp>
+    </p:spTree>
+  </p:cSld>
+  <p:clrMapOvr>
+    <a:masterClrMapping/>
+  </p:clrMapOvr>
+</p:sld>
+</file>
+
+<file path=ppt/slides/slide51.xml><?xml version="1.0" encoding="utf-8"?>
+<p:sld xmlns:a="http://schemas.openxmlformats.org/drawingml/2006/main" xmlns:r="http://schemas.openxmlformats.org/officeDocument/2006/relationships" xmlns:p="http://schemas.openxmlformats.org/presentationml/2006/main">
+  <p:cSld name="Slide 51">
+    <p:bg>
+      <p:bgPr>
+        <a:solidFill>
+          <a:srgbClr val="1E2761"/>
+        </a:solidFill>
+      </p:bgPr>
+    </p:bg>
+    <p:spTree>
+      <p:nvGrpSpPr>
+        <p:cNvPr id="1" name=""/>
+        <p:cNvGrpSpPr/>
+        <p:nvPr/>
+      </p:nvGrpSpPr>
+      <p:grpSpPr>
+        <a:xfrm>
+          <a:off x="0" y="0"/>
+          <a:ext cx="0" cy="0"/>
+          <a:chOff x="0" y="0"/>
+          <a:chExt cx="0" cy="0"/>
+        </a:xfrm>
+      </p:grpSpPr>
+      <p:sp>
+        <p:nvSpPr>
+          <p:cNvPr id="2" name="Text 0"/>
+          <p:cNvSpPr/>
+          <p:nvPr/>
+        </p:nvSpPr>
+        <p:spPr>
+          <a:xfrm>
+            <a:off x="640080" y="685800"/>
+            <a:ext cx="7863840" cy="320040"/>
+          </a:xfrm>
+          <a:prstGeom prst="rect">
+            <a:avLst/>
+          </a:prstGeom>
+          <a:noFill/>
+          <a:ln/>
+        </p:spPr>
+        <p:txBody>
+          <a:bodyPr wrap="square" lIns="0" tIns="0" rIns="0" bIns="0" rtlCol="0" anchor="ctr"/>
+          <a:lstStyle/>
+          <a:p>
+            <a:pPr indent="0" marL="0">
+              <a:buNone/>
+            </a:pPr>
+            <a:r>
+              <a:rPr lang="en-US" sz="1300" b="1" spc="300" kern="0" dirty="0">
+                <a:solidFill>
+                  <a:srgbClr val="02C39A"/>
+                </a:solidFill>
+                <a:latin typeface="Calibri" pitchFamily="34" charset="0"/>
+                <a:ea typeface="Calibri" pitchFamily="34" charset="-122"/>
+                <a:cs typeface="Calibri" pitchFamily="34" charset="-120"/>
+              </a:rPr>
+              <a:t>LE VOYAGE EST COMPLET</a:t>
+            </a:r>
+            <a:endParaRPr lang="en-US" sz="1300" dirty="0"/>
+          </a:p>
+        </p:txBody>
+      </p:sp>
+      <p:sp>
+        <p:nvSpPr>
+          <p:cNvPr id="3" name="Text 1"/>
+          <p:cNvSpPr/>
+          <p:nvPr/>
+        </p:nvSpPr>
+        <p:spPr>
+          <a:xfrm>
+            <a:off x="640080" y="1005840"/>
+            <a:ext cx="7863840" cy="685800"/>
+          </a:xfrm>
+          <a:prstGeom prst="rect">
+            <a:avLst/>
+          </a:prstGeom>
+          <a:noFill/>
+          <a:ln/>
+        </p:spPr>
+        <p:txBody>
+          <a:bodyPr wrap="square" lIns="0" tIns="0" rIns="0" bIns="0" rtlCol="0" anchor="ctr"/>
+          <a:lstStyle/>
+          <a:p>
+            <a:pPr indent="0" marL="0">
+              <a:buNone/>
+            </a:pPr>
+            <a:r>
+              <a:rPr lang="en-US" sz="3000" b="1" dirty="0">
+                <a:solidFill>
+                  <a:srgbClr val="FFFFFF"/>
+                </a:solidFill>
+                <a:latin typeface="Calibri" pitchFamily="34" charset="0"/>
+                <a:ea typeface="Calibri" pitchFamily="34" charset="-122"/>
+                <a:cs typeface="Calibri" pitchFamily="34" charset="-120"/>
+              </a:rPr>
+              <a:t>De  a = 3  à  trainer.fit(model)</a:t>
+            </a:r>
+            <a:endParaRPr lang="en-US" sz="3000" dirty="0"/>
+          </a:p>
+        </p:txBody>
+      </p:sp>
+      <p:sp>
+        <p:nvSpPr>
+          <p:cNvPr id="4" name="Shape 2"/>
+          <p:cNvSpPr/>
+          <p:nvPr/>
+        </p:nvSpPr>
+        <p:spPr>
+          <a:xfrm>
+            <a:off x="640080" y="1965960"/>
+            <a:ext cx="3840480" cy="804672"/>
+          </a:xfrm>
+          <a:prstGeom prst="roundRect">
+            <a:avLst>
+              <a:gd name="adj" fmla="val 7955"/>
+            </a:avLst>
+          </a:prstGeom>
+          <a:solidFill>
+            <a:srgbClr val="273672"/>
+          </a:solidFill>
+          <a:ln/>
+        </p:spPr>
+      </p:sp>
+      <p:sp>
+        <p:nvSpPr>
+          <p:cNvPr id="5" name="Text 3"/>
+          <p:cNvSpPr/>
+          <p:nvPr/>
+        </p:nvSpPr>
+        <p:spPr>
+          <a:xfrm>
+            <a:off x="822960" y="2057400"/>
+            <a:ext cx="3520440" cy="640080"/>
+          </a:xfrm>
+          <a:prstGeom prst="rect">
+            <a:avLst/>
+          </a:prstGeom>
+          <a:noFill/>
+          <a:ln/>
+        </p:spPr>
+        <p:txBody>
+          <a:bodyPr wrap="square" lIns="0" tIns="0" rIns="0" bIns="0" rtlCol="0" anchor="t"/>
+          <a:lstStyle/>
+          <a:p>
+            <a:pPr indent="0" marL="0">
+              <a:lnSpc>
+                <a:spcPct val="115000"/>
+              </a:lnSpc>
+              <a:buNone/>
+            </a:pPr>
+            <a:r>
+              <a:rPr lang="en-US" sz="1100" b="1" dirty="0">
+                <a:solidFill>
+                  <a:srgbClr val="FFD43B"/>
+                </a:solidFill>
+                <a:latin typeface="Calibri" pitchFamily="34" charset="0"/>
+                <a:ea typeface="Calibri" pitchFamily="34" charset="-122"/>
+                <a:cs typeface="Calibri" pitchFamily="34" charset="-120"/>
+              </a:rPr>
+              <a:t>PYTHON</a:t>
+            </a:r>
+            <a:endParaRPr lang="en-US" sz="1100" dirty="0"/>
+          </a:p>
+          <a:p>
+            <a:pPr indent="0" marL="0">
+              <a:lnSpc>
+                <a:spcPct val="115000"/>
+              </a:lnSpc>
+              <a:buNone/>
+            </a:pPr>
+            <a:r>
+              <a:rPr lang="en-US" sz="1050" dirty="0">
+                <a:solidFill>
+                  <a:srgbClr val="CADCFC"/>
+                </a:solidFill>
+                <a:latin typeface="Calibri" pitchFamily="34" charset="0"/>
+                <a:ea typeface="Calibri" pitchFamily="34" charset="-122"/>
+                <a:cs typeface="Calibri" pitchFamily="34" charset="-120"/>
+              </a:rPr>
+              <a:t>types · listes · fonctions · POO · pandas</a:t>
+            </a:r>
+            <a:endParaRPr lang="en-US" sz="1100" dirty="0"/>
+          </a:p>
+        </p:txBody>
+      </p:sp>
+      <p:sp>
+        <p:nvSpPr>
+          <p:cNvPr id="6" name="Shape 4"/>
+          <p:cNvSpPr/>
+          <p:nvPr/>
+        </p:nvSpPr>
+        <p:spPr>
+          <a:xfrm>
+            <a:off x="4709160" y="1965960"/>
+            <a:ext cx="3840480" cy="804672"/>
+          </a:xfrm>
+          <a:prstGeom prst="roundRect">
+            <a:avLst>
+              <a:gd name="adj" fmla="val 7955"/>
+            </a:avLst>
+          </a:prstGeom>
+          <a:solidFill>
+            <a:srgbClr val="273672"/>
+          </a:solidFill>
+          <a:ln/>
+        </p:spPr>
+      </p:sp>
+      <p:sp>
+        <p:nvSpPr>
+          <p:cNvPr id="7" name="Text 5"/>
+          <p:cNvSpPr/>
+          <p:nvPr/>
+        </p:nvSpPr>
+        <p:spPr>
+          <a:xfrm>
+            <a:off x="4892040" y="2057400"/>
+            <a:ext cx="3520440" cy="640080"/>
+          </a:xfrm>
+          <a:prstGeom prst="rect">
+            <a:avLst/>
+          </a:prstGeom>
+          <a:noFill/>
+          <a:ln/>
+        </p:spPr>
+        <p:txBody>
+          <a:bodyPr wrap="square" lIns="0" tIns="0" rIns="0" bIns="0" rtlCol="0" anchor="t"/>
+          <a:lstStyle/>
+          <a:p>
+            <a:pPr indent="0" marL="0">
+              <a:lnSpc>
+                <a:spcPct val="115000"/>
+              </a:lnSpc>
+              <a:buNone/>
+            </a:pPr>
+            <a:r>
+              <a:rPr lang="en-US" sz="1100" b="1" dirty="0">
+                <a:solidFill>
+                  <a:srgbClr val="02C39A"/>
+                </a:solidFill>
+                <a:latin typeface="Calibri" pitchFamily="34" charset="0"/>
+                <a:ea typeface="Calibri" pitchFamily="34" charset="-122"/>
+                <a:cs typeface="Calibri" pitchFamily="34" charset="-120"/>
+              </a:rPr>
+              <a:t>RÉGRESSION</a:t>
+            </a:r>
+            <a:endParaRPr lang="en-US" sz="1100" dirty="0"/>
+          </a:p>
+          <a:p>
+            <a:pPr indent="0" marL="0">
+              <a:lnSpc>
+                <a:spcPct val="115000"/>
+              </a:lnSpc>
+              <a:buNone/>
+            </a:pPr>
+            <a:r>
+              <a:rPr lang="en-US" sz="1050" dirty="0">
+                <a:solidFill>
+                  <a:srgbClr val="CADCFC"/>
+                </a:solidFill>
+                <a:latin typeface="Calibri" pitchFamily="34" charset="0"/>
+                <a:ea typeface="Calibri" pitchFamily="34" charset="-122"/>
+                <a:cs typeface="Calibri" pitchFamily="34" charset="-120"/>
+              </a:rPr>
+              <a:t>moindres carrés · MAE / RMSE · multiple</a:t>
+            </a:r>
+            <a:endParaRPr lang="en-US" sz="1100" dirty="0"/>
+          </a:p>
+        </p:txBody>
+      </p:sp>
+      <p:sp>
+        <p:nvSpPr>
+          <p:cNvPr id="8" name="Shape 6"/>
+          <p:cNvSpPr/>
+          <p:nvPr/>
+        </p:nvSpPr>
+        <p:spPr>
+          <a:xfrm>
+            <a:off x="640080" y="2926080"/>
+            <a:ext cx="3840480" cy="804672"/>
+          </a:xfrm>
+          <a:prstGeom prst="roundRect">
+            <a:avLst>
+              <a:gd name="adj" fmla="val 7955"/>
+            </a:avLst>
+          </a:prstGeom>
+          <a:solidFill>
+            <a:srgbClr val="273672"/>
+          </a:solidFill>
+          <a:ln/>
+        </p:spPr>
+      </p:sp>
+      <p:sp>
+        <p:nvSpPr>
+          <p:cNvPr id="9" name="Text 7"/>
+          <p:cNvSpPr/>
+          <p:nvPr/>
+        </p:nvSpPr>
+        <p:spPr>
+          <a:xfrm>
+            <a:off x="822960" y="3017520"/>
+            <a:ext cx="3520440" cy="640080"/>
+          </a:xfrm>
+          <a:prstGeom prst="rect">
+            <a:avLst/>
+          </a:prstGeom>
+          <a:noFill/>
+          <a:ln/>
+        </p:spPr>
+        <p:txBody>
+          <a:bodyPr wrap="square" lIns="0" tIns="0" rIns="0" bIns="0" rtlCol="0" anchor="t"/>
+          <a:lstStyle/>
+          <a:p>
+            <a:pPr indent="0" marL="0">
+              <a:lnSpc>
+                <a:spcPct val="115000"/>
+              </a:lnSpc>
+              <a:buNone/>
+            </a:pPr>
+            <a:r>
+              <a:rPr lang="en-US" sz="1100" b="1" dirty="0">
+                <a:solidFill>
+                  <a:srgbClr val="02C39A"/>
+                </a:solidFill>
+                <a:latin typeface="Calibri" pitchFamily="34" charset="0"/>
+                <a:ea typeface="Calibri" pitchFamily="34" charset="-122"/>
+                <a:cs typeface="Calibri" pitchFamily="34" charset="-120"/>
+              </a:rPr>
+              <a:t>CLASSIFICATION</a:t>
+            </a:r>
+            <a:endParaRPr lang="en-US" sz="1100" dirty="0"/>
+          </a:p>
+          <a:p>
+            <a:pPr indent="0" marL="0">
+              <a:lnSpc>
+                <a:spcPct val="115000"/>
+              </a:lnSpc>
+              <a:buNone/>
+            </a:pPr>
+            <a:r>
+              <a:rPr lang="en-US" sz="1050" dirty="0">
+                <a:solidFill>
+                  <a:srgbClr val="CADCFC"/>
+                </a:solidFill>
+                <a:latin typeface="Calibri" pitchFamily="34" charset="0"/>
+                <a:ea typeface="Calibri" pitchFamily="34" charset="-122"/>
+                <a:cs typeface="Calibri" pitchFamily="34" charset="-120"/>
+              </a:rPr>
+              <a:t>sigmoïde · confusion · précision / rappel</a:t>
+            </a:r>
+            <a:endParaRPr lang="en-US" sz="1100" dirty="0"/>
+          </a:p>
+        </p:txBody>
+      </p:sp>
+      <p:sp>
+        <p:nvSpPr>
+          <p:cNvPr id="10" name="Shape 8"/>
+          <p:cNvSpPr/>
+          <p:nvPr/>
+        </p:nvSpPr>
+        <p:spPr>
+          <a:xfrm>
+            <a:off x="4709160" y="2926080"/>
+            <a:ext cx="3840480" cy="804672"/>
+          </a:xfrm>
+          <a:prstGeom prst="roundRect">
+            <a:avLst>
+              <a:gd name="adj" fmla="val 7955"/>
+            </a:avLst>
+          </a:prstGeom>
+          <a:solidFill>
+            <a:srgbClr val="273672"/>
+          </a:solidFill>
+          <a:ln/>
+        </p:spPr>
+      </p:sp>
+      <p:sp>
+        <p:nvSpPr>
+          <p:cNvPr id="11" name="Text 9"/>
+          <p:cNvSpPr/>
+          <p:nvPr/>
+        </p:nvSpPr>
+        <p:spPr>
+          <a:xfrm>
+            <a:off x="4892040" y="3017520"/>
+            <a:ext cx="3520440" cy="640080"/>
+          </a:xfrm>
+          <a:prstGeom prst="rect">
+            <a:avLst/>
+          </a:prstGeom>
+          <a:noFill/>
+          <a:ln/>
+        </p:spPr>
+        <p:txBody>
+          <a:bodyPr wrap="square" lIns="0" tIns="0" rIns="0" bIns="0" rtlCol="0" anchor="t"/>
+          <a:lstStyle/>
+          <a:p>
+            <a:pPr indent="0" marL="0">
+              <a:lnSpc>
+                <a:spcPct val="115000"/>
+              </a:lnSpc>
+              <a:buNone/>
+            </a:pPr>
+            <a:r>
+              <a:rPr lang="en-US" sz="1100" b="1" dirty="0">
+                <a:solidFill>
+                  <a:srgbClr val="02C39A"/>
+                </a:solidFill>
+                <a:latin typeface="Calibri" pitchFamily="34" charset="0"/>
+                <a:ea typeface="Calibri" pitchFamily="34" charset="-122"/>
+                <a:cs typeface="Calibri" pitchFamily="34" charset="-120"/>
+              </a:rPr>
+              <a:t>MODÈLES</a:t>
+            </a:r>
+            <a:endParaRPr lang="en-US" sz="1100" dirty="0"/>
+          </a:p>
+          <a:p>
+            <a:pPr indent="0" marL="0">
+              <a:lnSpc>
+                <a:spcPct val="115000"/>
+              </a:lnSpc>
+              <a:buNone/>
+            </a:pPr>
+            <a:r>
+              <a:rPr lang="en-US" sz="1050" dirty="0">
+                <a:solidFill>
+                  <a:srgbClr val="CADCFC"/>
+                </a:solidFill>
+                <a:latin typeface="Calibri" pitchFamily="34" charset="0"/>
+                <a:ea typeface="Calibri" pitchFamily="34" charset="-122"/>
+                <a:cs typeface="Calibri" pitchFamily="34" charset="-120"/>
+              </a:rPr>
+              <a:t>KNN · NB · arbres · forêts · boosting · clustering</a:t>
+            </a:r>
+            <a:endParaRPr lang="en-US" sz="1100" dirty="0"/>
+          </a:p>
+        </p:txBody>
+      </p:sp>
+      <p:sp>
+        <p:nvSpPr>
+          <p:cNvPr id="12" name="Shape 10"/>
+          <p:cNvSpPr/>
+          <p:nvPr/>
+        </p:nvSpPr>
+        <p:spPr>
+          <a:xfrm>
+            <a:off x="640080" y="3886200"/>
+            <a:ext cx="3840480" cy="804672"/>
+          </a:xfrm>
+          <a:prstGeom prst="roundRect">
+            <a:avLst>
+              <a:gd name="adj" fmla="val 7955"/>
+            </a:avLst>
+          </a:prstGeom>
+          <a:solidFill>
+            <a:srgbClr val="273672"/>
+          </a:solidFill>
+          <a:ln/>
+        </p:spPr>
+      </p:sp>
+      <p:sp>
+        <p:nvSpPr>
+          <p:cNvPr id="13" name="Text 11"/>
+          <p:cNvSpPr/>
+          <p:nvPr/>
+        </p:nvSpPr>
+        <p:spPr>
+          <a:xfrm>
+            <a:off x="822960" y="3977640"/>
+            <a:ext cx="3520440" cy="640080"/>
+          </a:xfrm>
+          <a:prstGeom prst="rect">
+            <a:avLst/>
+          </a:prstGeom>
+          <a:noFill/>
+          <a:ln/>
+        </p:spPr>
+        <p:txBody>
+          <a:bodyPr wrap="square" lIns="0" tIns="0" rIns="0" bIns="0" rtlCol="0" anchor="t"/>
+          <a:lstStyle/>
+          <a:p>
+            <a:pPr indent="0" marL="0">
+              <a:lnSpc>
+                <a:spcPct val="115000"/>
+              </a:lnSpc>
+              <a:buNone/>
+            </a:pPr>
+            <a:r>
+              <a:rPr lang="en-US" sz="1100" b="1" dirty="0">
+                <a:solidFill>
+                  <a:srgbClr val="FFD43B"/>
+                </a:solidFill>
+                <a:latin typeface="Calibri" pitchFamily="34" charset="0"/>
+                <a:ea typeface="Calibri" pitchFamily="34" charset="-122"/>
+                <a:cs typeface="Calibri" pitchFamily="34" charset="-120"/>
+              </a:rPr>
+              <a:t>DEEP LEARNING</a:t>
+            </a:r>
+            <a:endParaRPr lang="en-US" sz="1100" dirty="0"/>
+          </a:p>
+          <a:p>
+            <a:pPr indent="0" marL="0">
+              <a:lnSpc>
+                <a:spcPct val="115000"/>
+              </a:lnSpc>
+              <a:buNone/>
+            </a:pPr>
+            <a:r>
+              <a:rPr lang="en-US" sz="1050" dirty="0">
+                <a:solidFill>
+                  <a:srgbClr val="CADCFC"/>
+                </a:solidFill>
+                <a:latin typeface="Calibri" pitchFamily="34" charset="0"/>
+                <a:ea typeface="Calibri" pitchFamily="34" charset="-122"/>
+                <a:cs typeface="Calibri" pitchFamily="34" charset="-120"/>
+              </a:rPr>
+              <a:t>tenseurs · autograd · nn.Module · Lightning · GPU</a:t>
+            </a:r>
+            <a:endParaRPr lang="en-US" sz="1100" dirty="0"/>
+          </a:p>
+        </p:txBody>
+      </p:sp>
+      <p:sp>
+        <p:nvSpPr>
+          <p:cNvPr id="14" name="Text 12"/>
+          <p:cNvSpPr/>
+          <p:nvPr/>
+        </p:nvSpPr>
+        <p:spPr>
+          <a:xfrm>
+            <a:off x="640080" y="4114800"/>
+            <a:ext cx="7863840" cy="640080"/>
+          </a:xfrm>
+          <a:prstGeom prst="rect">
+            <a:avLst/>
+          </a:prstGeom>
+          <a:noFill/>
+          <a:ln/>
+        </p:spPr>
+        <p:txBody>
+          <a:bodyPr wrap="square" lIns="0" tIns="0" rIns="0" bIns="0" rtlCol="0" anchor="ctr"/>
+          <a:lstStyle/>
+          <a:p>
+            <a:pPr indent="0" marL="0">
+              <a:lnSpc>
+                <a:spcPct val="120000"/>
+              </a:lnSpc>
+              <a:buNone/>
+            </a:pPr>
+            <a:r>
+              <a:rPr lang="en-US" sz="1250" b="1" dirty="0">
+                <a:solidFill>
+                  <a:srgbClr val="FFFFFF"/>
+                </a:solidFill>
+                <a:latin typeface="Calibri" pitchFamily="34" charset="0"/>
+                <a:ea typeface="Calibri" pitchFamily="34" charset="-122"/>
+                <a:cs typeface="Calibri" pitchFamily="34" charset="-120"/>
+              </a:rPr>
+              <a:t>La suite ? </a:t>
+            </a:r>
+            <a:pPr indent="0" marL="0">
+              <a:lnSpc>
+                <a:spcPct val="120000"/>
+              </a:lnSpc>
+              <a:buNone/>
+            </a:pPr>
+            <a:r>
+              <a:rPr lang="en-US" sz="1250" dirty="0">
+                <a:solidFill>
+                  <a:srgbClr val="CADCFC"/>
+                </a:solidFill>
+                <a:latin typeface="Calibri" pitchFamily="34" charset="0"/>
+                <a:ea typeface="Calibri" pitchFamily="34" charset="-122"/>
+                <a:cs typeface="Calibri" pitchFamily="34" charset="-120"/>
+              </a:rPr>
+              <a:t>Standardiser (StandardScaler) · valider (cross-validation systématique) · forêts aléatoires · et toujours : baseline d'abord, Restart &amp; Run All avant de rendre !</a:t>
+            </a:r>
+            <a:endParaRPr lang="en-US" sz="1250" dirty="0"/>
+          </a:p>
+        </p:txBody>
+      </p:sp>
+    </p:spTree>
+  </p:cSld>
+  <p:clrMapOvr>
+    <a:masterClrMapping/>
+  </p:clrMapOvr>
+</p:sld>
+</file>
+
 <file path=ppt/slides/slide6.xml><?xml version="1.0" encoding="utf-8"?>
 <p:sld xmlns:a="http://schemas.openxmlformats.org/drawingml/2006/main" xmlns:r="http://schemas.openxmlformats.org/officeDocument/2006/relationships" xmlns:p="http://schemas.openxmlformats.org/presentationml/2006/main">
   <p:cSld name="Slide 6">
